--- a/examples/pptx/immersion-1-3-dividing-work.pptx
+++ b/examples/pptx/immersion-1-3-dividing-work.pptx
@@ -544,7 +544,7 @@
           <a:lstStyle/>
           <a:p>
             <a:r>
-              <a:t>Last session of Day 1. They have a precise problem and a map of the path. This hour turns that map into assignments, so that tomorrow morning four people can start building at once instead of negotiating.</a:t>
+              <a:t>This is session 1.3, Dividing the Work. You have a problem and a map; this hour turns that map into assignments so four people can start building at once tomorrow.</a:t>
             </a:r>
           </a:p>
         </p:txBody>
@@ -614,7 +614,7 @@
           <a:lstStyle/>
           <a:p>
             <a:r>
-              <a:t>Give the room ninety seconds to say these out loud. It feels awkward and it is the highest-value ninety seconds of the hour — every unspoken gap becomes a silent blocker tomorrow.</a:t>
+              <a:t>Say the quiet part too — what you have never done, what you would need help with, and what you would rather not own.</a:t>
             </a:r>
           </a:p>
         </p:txBody>
@@ -684,7 +684,7 @@
           <a:lstStyle/>
           <a:p>
             <a:r>
-              <a:t>Map the inventory onto the boxes from 1.2. The last row matters most — the person who knows the domain is your quality bar, whether or not they write any code this week.</a:t>
+              <a:t>Here is skill mapped to step. Data wrangling fits intake and parse. Prompt design fits score and summarise. Front end fits report and demo. And a domain expert judges quality.</a:t>
             </a:r>
           </a:p>
         </p:txBody>
@@ -754,7 +754,7 @@
           <a:lstStyle/>
           <a:p>
             <a:r>
-              <a:t>Accountable, not working alone. Others can help. But when a step slips there must be exactly one person who noticed first and one person to ask about it.</a:t>
+              <a:t>A single owner is one named person accountable for a step being done.</a:t>
             </a:r>
           </a:p>
         </p:txBody>
@@ -824,7 +824,7 @@
           <a:lstStyle/>
           <a:p>
             <a:r>
-              <a:t>The bottom row is the whole argument. Shared ownership does not double the attention, it halves it. Say this plainly — teams resist it because single ownership feels unfriendly.</a:t>
+              <a:t>Shared ownership means everyone assumes someone else has cover, nobody watches the clock, and slips get found late. A single owner means one person tracking it, one person to ask, and slips found early.</a:t>
             </a:r>
           </a:p>
         </p:txBody>
@@ -894,7 +894,7 @@
           <a:lstStyle/>
           <a:p>
             <a:r>
-              <a:t>Riskiest first follows directly from 1.2 — they already identified it. Do not let the risky step go to whoever is most enthusiastic; it goes to whoever is most likely to finish it.</a:t>
+              <a:t>Assign in three passes. Riskiest step first, and it gets the best fit. Then the rest, matching skill to step. Then name the gaps — the steps nobody can own.</a:t>
             </a:r>
           </a:p>
         </p:txBody>
@@ -964,7 +964,7 @@
           <a:lstStyle/>
           <a:p>
             <a:r>
-              <a:t>Not an argument against learning — the middle row says learn on the step that can absorb it. Put the stretch assignment somewhere a delay does not stop everyone else.</a:t>
+              <a:t>Volunteers pick what excites them, learn on your deadline, and leave the risky step until last. Best fit picks what they can ship, learns on the safe step, and takes the risky step first.</a:t>
             </a:r>
           </a:p>
         </p:txBody>
@@ -1034,7 +1034,7 @@
           <a:lstStyle/>
           <a:p>
             <a:r>
-              <a:t>Three legitimate answers, and none of them is hope. Stubbing is honourable this week — a fake step with a real interface still lets the rest of the path be built and demoed.</a:t>
+              <a:t>When nobody can own a step, you have three options: stub it and move on, buy it with an existing tool, or cut it from the happy path.</a:t>
             </a:r>
           </a:p>
         </p:txBody>
@@ -1104,7 +1104,7 @@
           <a:lstStyle/>
           <a:p>
             <a:r>
-              <a:t>The portable line. If a box cannot get a single name, it is either too big — send it back to the granularity test — or it is not really in scope this week.</a:t>
+              <a:t>One name per box, or no name at all. That is the rule that survives Day 2.</a:t>
             </a:r>
           </a:p>
         </p:txBody>
@@ -1174,7 +1174,7 @@
           <a:lstStyle/>
           <a:p>
             <a:r>
-              <a:t>Four jobs that are real work and often unassigned. The scribe keeps the Claude Project from going stale; the demo owner should be chosen today, not panicked over on Friday morning.</a:t>
+              <a:t>Four roles beyond writing code. The owner holds the problem. The tester breaks it on purpose. The scribe keeps the Project current. And the demo person tells the story on Friday.</a:t>
             </a:r>
           </a:p>
         </p:txBody>
@@ -1244,7 +1244,7 @@
           <a:lstStyle/>
           <a:p>
             <a:r>
-              <a:t>Second objective. Owners alone still produce a queue. This section is about running several workstreams at once without the team colliding.</a:t>
+              <a:t>Second objective: running several workstreams at once without stepping on each other.</a:t>
             </a:r>
           </a:p>
         </p:txBody>
@@ -1314,7 +1314,7 @@
           <a:lstStyle/>
           <a:p>
             <a:r>
-              <a:t>Name the deliverable immediately: a GitHub board where every Day 2 task has an owner and a definition of done. Anything less and tomorrow starts with an hour of meetings.</a:t>
+              <a:t>Fifty minutes, and you leave with a board in GitHub where every Day 2 task has an owner and a definition of done.</a:t>
             </a:r>
           </a:p>
         </p:txBody>
@@ -1384,7 +1384,7 @@
           <a:lstStyle/>
           <a:p>
             <a:r>
-              <a:t>Frame it as a teammate that can hold a whole workstream, not a chat that answers questions. That difference is what makes parallel work possible for a team of four.</a:t>
+              <a:t>Claude Cowork is Claude running multi-step work on files you choose.</a:t>
             </a:r>
           </a:p>
         </p:txBody>
@@ -1454,7 +1454,7 @@
           <a:lstStyle/>
           <a:p>
             <a:r>
-              <a:t>The middle row is the design idea: waiting is not bad luck, it is a thing you remove on purpose by agreeing interfaces up front. That is the next few slides.</a:t>
+              <a:t>Queued work means one step at a time, everyone waiting on one person, and Day 2 running out. Parallel means streams run at once, waiting is designed out, and Day 2 finishes.</a:t>
             </a:r>
           </a:p>
         </p:txBody>
@@ -1524,7 +1524,7 @@
           <a:lstStyle/>
           <a:p>
             <a:r>
-              <a:t>The third row is the one to dwell on. The point is not speed of a single answer; it is that a stream progresses while its owner is doing something else.</a:t>
+              <a:t>Cowork runs on your files, reading and editing what you pick. It is multi- step, so it finishes a task rather than a reply. And it runs alongside you — you work while it works.</a:t>
             </a:r>
           </a:p>
         </p:txBody>
@@ -1594,7 +1594,7 @@
           <a:lstStyle/>
           <a:p>
             <a:r>
-              <a:t>Three things every stream needs before it starts. Skipping the second is what causes merge pain — two streams that each invented their own format for the same handoff.</a:t>
+              <a:t>Three things in every workstream. Scope it to one step only, a single box. Give it the contract, its input and its output. And say what done means, so it can prove it worked.</a:t>
             </a:r>
           </a:p>
         </p:txBody>
@@ -1664,7 +1664,7 @@
           <a:lstStyle/>
           <a:p>
             <a:r>
-              <a:t>Copy this shape for every stream. Named input, named output with its actual shape, and a done condition someone else could check. Have them write one for their riskiest step now.</a:t>
+              <a:t>Here is a brief written out. The step is parsing resumes to text. Input is PDF files in intake, output is one JSON per file with name, skills and years. Done when ten sample files parse with no manual fixes.</a:t>
             </a:r>
           </a:p>
         </p:txBody>
@@ -1734,7 +1734,7 @@
           <a:lstStyle/>
           <a:p>
             <a:r>
-              <a:t>This is the arrow label from their 1.2 diagram, made precise. Agreeing it before anyone builds is what lets two people work on adjacent steps without talking all day.</a:t>
+              <a:t>A contract is the agreed shape passed between two steps.</a:t>
             </a:r>
           </a:p>
         </p:txBody>
@@ -1804,7 +1804,7 @@
           <a:lstStyle/>
           <a:p>
             <a:r>
-              <a:t>Fifteen minutes on contracts saves hours of rework. Point at the Artifact from 1.2 — the arrows already exist, they just need field names written on them.</a:t>
+              <a:t>Agree contracts first: name every field you pass, decide it before building, and write it on the diagram.</a:t>
             </a:r>
           </a:p>
         </p:txBody>
@@ -1874,7 +1874,7 @@
           <a:lstStyle/>
           <a:p>
             <a:r>
-              <a:t>Three handoffs, three contracts, all boring on purpose. Boring contracts are good contracts — anything clever here becomes the thing that breaks during the Friday demo.</a:t>
+              <a:t>Here are the contracts for the worked example. Intake to parse passes a file path plus an id. Parse to score passes JSON with skills. Score to report passes an id plus a number.</a:t>
             </a:r>
           </a:p>
         </p:txBody>
@@ -1944,7 +1944,7 @@
           <a:lstStyle/>
           <a:p>
             <a:r>
-              <a:t>The three collisions worth naming. The second is the nastiest because everything keeps running while producing wrong results. Announce contract changes out loud.</a:t>
+              <a:t>Streams collide in three ways: two people editing one file, a contract changed silently, or one stream simply waiting on another.</a:t>
             </a:r>
           </a:p>
         </p:txBody>
@@ -2014,7 +2014,7 @@
           <a:lstStyle/>
           <a:p>
             <a:r>
-              <a:t>Three habits, all cheap. Stubbing is the important one again — never let a stream idle waiting for another; fake the input and keep building.</a:t>
+              <a:t>Keep them apart with one owner per file or folder, contract changes made by announcement, and a stub for whatever you are waiting on.</a:t>
             </a:r>
           </a:p>
         </p:txBody>
@@ -2084,7 +2084,7 @@
           <a:lstStyle/>
           <a:p>
             <a:r>
-              <a:t>The three syllabus objectives, split into four moves. Point out that the third is what lets a small team act bigger than it is, and the fourth is what makes it survive the night.</a:t>
+              <a:t>Four things this hour. We inventory the team's real skills, give every step a single owner, run workstreams in parallel with Cowork, and put the board in GitHub.</a:t>
             </a:r>
           </a:p>
         </p:txBody>
@@ -2154,7 +2154,7 @@
           <a:lstStyle/>
           <a:p>
             <a:r>
-              <a:t>Third objective. Assignments that live in someone's memory do not survive the night. This section makes them a board everyone can see tomorrow morning.</a:t>
+              <a:t>Third objective: getting the board out of your heads and into GitHub.</a:t>
             </a:r>
           </a:p>
         </p:txBody>
@@ -2224,7 +2224,7 @@
           <a:lstStyle/>
           <a:p>
             <a:r>
-              <a:t>Straight from the syllabus: a repo, issues with owners, and a definition of done for every Day 2 task. Nothing fancier is needed for a three-day build.</a:t>
+              <a:t>Three things you need. A repo, one place the code lives. Issues, one per task with an owner. And done, meaning how each task proves itself.</a:t>
             </a:r>
           </a:p>
         </p:txBody>
@@ -2294,7 +2294,7 @@
           <a:lstStyle/>
           <a:p>
             <a:r>
-              <a:t>Ten minutes at the laptops. Step three is mechanical — the map from 1.2 is the issue list. If a box does not become an issue, ask why it is on the map at all.</a:t>
+              <a:t>Three steps, now. Create the repo and name it for the problem. Add everyone with write access today. Then one issue per step, straight off the map.</a:t>
             </a:r>
           </a:p>
         </p:txBody>
@@ -2364,7 +2364,7 @@
           <a:lstStyle/>
           <a:p>
             <a:r>
-              <a:t>The same shape as the workstream brief — deliberately. One artifact, two places. Anyone can pick up this issue without asking a question, which is the whole test.</a:t>
+              <a:t>Here is an issue filled in. Title, owner, input, output, and done when ten samples parse with no manual fixes. It is the workstream brief, in GitHub.</a:t>
             </a:r>
           </a:p>
         </p:txBody>
@@ -2434,7 +2434,7 @@
           <a:lstStyle/>
           <a:p>
             <a:r>
-              <a:t>Someone else is the key phrase. If only the author can tell whether it is finished, it is not a definition of done — it is a feeling, and it will slip quietly.</a:t>
+              <a:t>A definition of done is a check someone else can run to confirm it works.</a:t>
             </a:r>
           </a:p>
         </p:txBody>
@@ -2504,7 +2504,7 @@
           <a:lstStyle/>
           <a:p>
             <a:r>
-              <a:t>Three tests. The third prevents the most common failure — writing the done criterion afterwards, which always describes whatever happened to get built.</a:t>
+              <a:t>A good one is observable rather than felt, checkable in about a minute, and written before the work starts.</a:t>
             </a:r>
           </a:p>
         </p:txBody>
@@ -2574,7 +2574,7 @@
           <a:lstStyle/>
           <a:p>
             <a:r>
-              <a:t>Three real done criteria. Each is checkable by a teammate in under a minute. Ask the room to write theirs for the riskiest step before the session ends.</a:t>
+              <a:t>Task on the left, done on the right. Parse files: ten samples, no fixes. Score match: ranks a known set correctly. Build report: one click, no errors.</a:t>
             </a:r>
           </a:p>
         </p:txBody>
@@ -2644,7 +2644,7 @@
           <a:lstStyle/>
           <a:p>
             <a:r>
-              <a:t>The third is a team norm worth stating aloud: being blocked is normal and silent blocking is not. A comment costs ten seconds and saves someone's afternoon.</a:t>
+              <a:t>Three habits: one task per issue, close it the moment it is done, and comment when you are blocked.</a:t>
             </a:r>
           </a:p>
         </p:txBody>
@@ -2714,7 +2714,7 @@
           <a:lstStyle/>
           <a:p>
             <a:r>
-              <a:t>Only Parse is ready to start. Score needs one line written. Deploy is not a Day 2 task at all yet — it belongs in the backlog until someone can own it.</a:t>
+              <a:t>Three tasks against three criteria. Parse has an owner, a contract and a definition of done, so it is ready. Score has no done. Deploy has none of the three.</a:t>
             </a:r>
           </a:p>
         </p:txBody>
@@ -2784,7 +2784,7 @@
           <a:lstStyle/>
           <a:p>
             <a:r>
-              <a:t>The exit criteria for Day 1 as a whole. Have each team read these against their board out loud. Anything missing is fixable in the next ten minutes, not tomorrow.</a:t>
+              <a:t>You are ready for tomorrow when every step is an issue, every issue has one owner, every issue says what done means, and the contracts are written down.</a:t>
             </a:r>
           </a:p>
         </p:txBody>
@@ -2854,7 +2854,7 @@
           <a:lstStyle/>
           <a:p>
             <a:r>
-              <a:t>Ask it against their diagram from 1.2 and let it be uncomfortable. Most teams have never assigned a box, and the silence makes the case for the next fifty minutes better than any slide can.</a:t>
+              <a:t>Looking at your diagram from last hour: who owns which box? Most teams have never assigned one.</a:t>
             </a:r>
           </a:p>
         </p:txBody>
@@ -2924,7 +2924,7 @@
           <a:lstStyle/>
           <a:p>
             <a:r>
-              <a:t>The concrete output of Day 1's last hour. The third number is the one to check — a single unowned task is tomorrow's stall, and it costs two minutes to fix now.</a:t>
+              <a:t>You leave with one repo and board, one owner per step, and zero unowned tasks.</a:t>
             </a:r>
           </a:p>
         </p:txBody>
@@ -2994,7 +2994,7 @@
           <a:lstStyle/>
           <a:p>
             <a:r>
-              <a:t>Recap the whole day in three lines. Say plainly that teams who skip any one of these spend Day 2 rebuilding it under time pressure, usually while arguing.</a:t>
+              <a:t>That is Day 1 behind you: a precise problem statement, a workflow map that is shared, and a board with owners.</a:t>
             </a:r>
           </a:p>
         </p:txBody>
@@ -3064,7 +3064,7 @@
           <a:lstStyle/>
           <a:p>
             <a:r>
-              <a:t>The bridge into Day 2, session 2.1. Tool choice was deliberately deferred all of Day 1 — now that every step has an owner and a contract, choosing tools is a small decision instead of a large one.</a:t>
+              <a:t>Tomorrow we match each step to a tool, decide what to stub, and pick retrieval only if you actually need it.</a:t>
             </a:r>
           </a:p>
         </p:txBody>
@@ -3134,7 +3134,7 @@
           <a:lstStyle/>
           <a:p>
             <a:r>
-              <a:t>Close on the real test of the board. If any owner would need to ask a question before starting tomorrow, the board is not finished. Hold the slide while they check, then release them.</a:t>
+              <a:t>One question before you go: can you start unaided tomorrow morning? If not, find the box that is stopping you.</a:t>
             </a:r>
           </a:p>
         </p:txBody>
@@ -3204,7 +3204,7 @@
           <a:lstStyle/>
           <a:p>
             <a:r>
-              <a:t>The bridge. A diagram tells you what must happen; a board tells you who is doing it and when it is finished. The map was the design, this is the plan.</a:t>
+              <a:t>Last hour you drew the path. This hour you assign it. A map tells you what must happen; a board tells you who is doing it.</a:t>
             </a:r>
           </a:p>
         </p:txBody>
@@ -3274,7 +3274,7 @@
           <a:lstStyle/>
           <a:p>
             <a:r>
-              <a:t>The arc in four moves. Return here if the room drifts. Note that the order matters — assigning before you know the skills produces polite lies about who can do what.</a:t>
+              <a:t>Four moves: inventory your skills, give every step one owner, split the work so streams run in parallel, and put it all on a board as GitHub issues.</a:t>
             </a:r>
           </a:p>
         </p:txBody>
@@ -3344,7 +3344,7 @@
           <a:lstStyle/>
           <a:p>
             <a:r>
-              <a:t>First objective. Two ideas here: know what the team can actually do, and give every step exactly one name. Both are less obvious than they sound.</a:t>
+              <a:t>First objective: owners rather than volunteers, and exactly one owner per step.</a:t>
             </a:r>
           </a:p>
         </p:txBody>
@@ -3414,7 +3414,7 @@
           <a:lstStyle/>
           <a:p>
             <a:r>
-              <a:t>Unaided is the load-bearing word. Not what they have read about or want to learn — what they could ship tomorrow without help. Optimism here costs you Day 2.</a:t>
+              <a:t>A skills inventory is an honest list of what each person on the team can do unaided.</a:t>
             </a:r>
           </a:p>
         </p:txBody>
@@ -3484,7 +3484,7 @@
           <a:lstStyle/>
           <a:p>
             <a:r>
-              <a:t>The second one surprises people. Having the account, the key, or the license already is a genuine capability this week — access is a skill when the clock is three days.</a:t>
+              <a:t>Three things count as a skill: something you have shipped before, a tool you already have access to, and a domain you actually know.</a:t>
             </a:r>
           </a:p>
         </p:txBody>

--- a/examples/pptx/immersion-1-3-dividing-work.pptx
+++ b/examples/pptx/immersion-1-3-dividing-work.pptx
@@ -47,7 +47,6 @@
     <p:sldId id="295" r:id="rId47"/>
     <p:sldId id="296" r:id="rId48"/>
     <p:sldId id="297" r:id="rId49"/>
-    <p:sldId id="298" r:id="rId50"/>
   </p:sldIdLst>
   <p:sldSz cx="12192000" cy="6858000" type="screen16x9"/>
   <p:notesSz cx="6858000" cy="9144000"/>
@@ -3089,76 +3088,6 @@
 </p:notes>
 </file>
 
-<file path=ppt/notesSlides/notesSlide43.xml><?xml version="1.0" encoding="utf-8"?>
-<p:notes xmlns:a="http://schemas.openxmlformats.org/drawingml/2006/main" xmlns:p="http://schemas.openxmlformats.org/presentationml/2006/main" xmlns:r="http://schemas.openxmlformats.org/officeDocument/2006/relationships">
-  <p:cSld>
-    <p:spTree>
-      <p:nvGrpSpPr>
-        <p:cNvPr id="1" name=""/>
-        <p:cNvGrpSpPr/>
-        <p:nvPr/>
-      </p:nvGrpSpPr>
-      <p:grpSpPr>
-        <a:xfrm>
-          <a:off x="0" y="0"/>
-          <a:ext cx="0" cy="0"/>
-          <a:chOff x="0" y="0"/>
-          <a:chExt cx="0" cy="0"/>
-        </a:xfrm>
-      </p:grpSpPr>
-      <p:sp>
-        <p:nvSpPr>
-          <p:cNvPr id="2" name="Slide Image Placeholder 1"/>
-          <p:cNvSpPr>
-            <a:spLocks noGrp="1"/>
-          </p:cNvSpPr>
-          <p:nvPr>
-            <p:ph type="sldImg" idx="2"/>
-          </p:nvPr>
-        </p:nvSpPr>
-        <p:spPr/>
-      </p:sp>
-      <p:sp>
-        <p:nvSpPr>
-          <p:cNvPr id="3" name="Notes Placeholder 2"/>
-          <p:cNvSpPr>
-            <a:spLocks noGrp="1"/>
-          </p:cNvSpPr>
-          <p:nvPr>
-            <p:ph type="body" idx="3" sz="quarter"/>
-          </p:nvPr>
-        </p:nvSpPr>
-        <p:spPr/>
-        <p:txBody>
-          <a:bodyPr/>
-          <a:lstStyle/>
-          <a:p>
-            <a:r>
-              <a:t>One question before you go: can you start unaided tomorrow morning? If not, find the box that is stopping you.</a:t>
-            </a:r>
-          </a:p>
-        </p:txBody>
-      </p:sp>
-      <p:sp>
-        <p:nvSpPr>
-          <p:cNvPr id="4" name="Slide Number Placeholder 3"/>
-          <p:cNvSpPr>
-            <a:spLocks noGrp="1"/>
-          </p:cNvSpPr>
-          <p:nvPr>
-            <p:ph type="sldNum" idx="5" sz="quarter"/>
-          </p:nvPr>
-        </p:nvSpPr>
-        <p:spPr/>
-      </p:sp>
-    </p:spTree>
-  </p:cSld>
-  <p:clrMapOvr>
-    <a:masterClrMapping/>
-  </p:clrMapOvr>
-</p:notes>
-</file>
-
 <file path=ppt/notesSlides/notesSlide5.xml><?xml version="1.0" encoding="utf-8"?>
 <p:notes xmlns:a="http://schemas.openxmlformats.org/drawingml/2006/main" xmlns:p="http://schemas.openxmlformats.org/presentationml/2006/main" xmlns:r="http://schemas.openxmlformats.org/officeDocument/2006/relationships">
   <p:cSld>
@@ -4972,7 +4901,7 @@
             <a:r>
               <a:rPr sz="3400" b="1" i="0">
                 <a:solidFill>
-                  <a:srgbClr val="123A6B"/>
+                  <a:srgbClr val="0072CE"/>
                 </a:solidFill>
                 <a:latin typeface="Arial"/>
               </a:rPr>
@@ -5009,7 +4938,7 @@
             <a:r>
               <a:rPr sz="3400" b="1" i="0">
                 <a:solidFill>
-                  <a:srgbClr val="123A6B"/>
+                  <a:srgbClr val="0072CE"/>
                 </a:solidFill>
                 <a:latin typeface="Arial"/>
               </a:rPr>
@@ -5901,6 +5830,43 @@
         <p:spPr>
           <a:xfrm>
             <a:off x="6233160" y="1499616"/>
+            <a:ext cx="5958840" cy="609600"/>
+          </a:xfrm>
+          <a:prstGeom prst="rect">
+            <a:avLst/>
+          </a:prstGeom>
+          <a:noFill/>
+        </p:spPr>
+        <p:txBody>
+          <a:bodyPr wrap="none" lIns="0" rIns="0">
+            <a:noAutofit/>
+          </a:bodyPr>
+          <a:lstStyle/>
+          <a:p>
+            <a:pPr algn="l"/>
+            <a:r>
+              <a:rPr sz="3400" b="0" i="0">
+                <a:solidFill>
+                  <a:srgbClr val="0A2240"/>
+                </a:solidFill>
+                <a:latin typeface="Arial"/>
+              </a:rPr>
+              <a:t>Built with customers.</a:t>
+            </a:r>
+          </a:p>
+        </p:txBody>
+      </p:sp>
+      <p:sp>
+        <p:nvSpPr>
+          <p:cNvPr id="7" name="TextBox 6"/>
+          <p:cNvSpPr/>
+          <p:nvPr>
+            <p:ph type="body" idx="2"/>
+          </p:nvPr>
+        </p:nvSpPr>
+        <p:spPr>
+          <a:xfrm>
+            <a:off x="6233160" y="2383536"/>
             <a:ext cx="5501640" cy="1127760"/>
           </a:xfrm>
           <a:prstGeom prst="rect">
@@ -5922,44 +5888,7 @@
                 </a:solidFill>
                 <a:latin typeface="Arial"/>
               </a:rPr>
-              <a:t>Built with customers, not just for them.</a:t>
-            </a:r>
-          </a:p>
-        </p:txBody>
-      </p:sp>
-      <p:sp>
-        <p:nvSpPr>
-          <p:cNvPr id="7" name="TextBox 6"/>
-          <p:cNvSpPr/>
-          <p:nvPr>
-            <p:ph type="body" idx="2"/>
-          </p:nvPr>
-        </p:nvSpPr>
-        <p:spPr>
-          <a:xfrm>
-            <a:off x="6233160" y="2901696"/>
-            <a:ext cx="5501640" cy="1127760"/>
-          </a:xfrm>
-          <a:prstGeom prst="rect">
-            <a:avLst/>
-          </a:prstGeom>
-          <a:noFill/>
-        </p:spPr>
-        <p:txBody>
-          <a:bodyPr wrap="square" lIns="0" rIns="0">
-            <a:noAutofit/>
-          </a:bodyPr>
-          <a:lstStyle/>
-          <a:p>
-            <a:pPr algn="l"/>
-            <a:r>
-              <a:rPr sz="3400" b="0" i="0">
-                <a:solidFill>
-                  <a:srgbClr val="0A2240"/>
-                </a:solidFill>
-                <a:latin typeface="Arial"/>
-              </a:rPr>
-              <a:t>60% faster rollout; 50% fewer tickets.</a:t>
+              <a:t>60% faster; 50% fewer tickets</a:t>
             </a:r>
           </a:p>
         </p:txBody>
@@ -5978,405 +5907,6 @@
 </file>
 
 <file path=ppt/slideLayouts/slideLayout18.xml><?xml version="1.0" encoding="utf-8"?>
-<p:sldLayout xmlns:a="http://schemas.openxmlformats.org/drawingml/2006/main" xmlns:r="http://schemas.openxmlformats.org/officeDocument/2006/relationships" xmlns:p="http://schemas.openxmlformats.org/presentationml/2006/main" type="blank" preserve="1">
-  <p:cSld name="slidekit · Card Grid">
-    <p:bg>
-      <p:bgPr>
-        <a:solidFill>
-          <a:srgbClr val="FFFFFF"/>
-        </a:solidFill>
-        <a:effectLst/>
-      </p:bgPr>
-    </p:bg>
-    <p:spTree>
-      <p:nvGrpSpPr>
-        <p:cNvPr id="1" name=""/>
-        <p:cNvGrpSpPr/>
-        <p:nvPr/>
-      </p:nvGrpSpPr>
-      <p:grpSpPr>
-        <a:xfrm>
-          <a:off x="0" y="0"/>
-          <a:ext cx="0" cy="0"/>
-          <a:chOff x="0" y="0"/>
-          <a:chExt cx="0" cy="0"/>
-        </a:xfrm>
-      </p:grpSpPr>
-      <p:sp>
-        <p:nvSpPr>
-          <p:cNvPr id="4" name="Slide Number Placeholder 3"/>
-          <p:cNvSpPr>
-            <a:spLocks noGrp="1"/>
-          </p:cNvSpPr>
-          <p:nvPr>
-            <p:ph type="sldNum" sz="quarter" idx="12"/>
-          </p:nvPr>
-        </p:nvSpPr>
-        <p:spPr>
-          <a:xfrm>
-            <a:off x="11186160" y="6035040"/>
-            <a:ext cx="548640" cy="365760"/>
-          </a:xfrm>
-        </p:spPr>
-        <p:txBody>
-          <a:bodyPr/>
-          <a:lstStyle/>
-          <a:p>
-            <a:fld id="{C1FF6DA9-008F-8B48-92A6-B652298478BF}" type="slidenum">
-              <a:rPr lang="en-US" smtClean="0"/>
-              <a:t>‹#›</a:t>
-            </a:fld>
-            <a:endParaRPr lang="en-US"/>
-          </a:p>
-        </p:txBody>
-      </p:sp>
-      <p:sp>
-        <p:nvSpPr>
-          <p:cNvPr id="5" name="TextBox 4"/>
-          <p:cNvSpPr/>
-          <p:nvPr>
-            <p:ph type="title"/>
-          </p:nvPr>
-        </p:nvSpPr>
-        <p:spPr>
-          <a:xfrm>
-            <a:off x="457200" y="457200"/>
-            <a:ext cx="11277600" cy="768096"/>
-          </a:xfrm>
-          <a:prstGeom prst="rect">
-            <a:avLst/>
-          </a:prstGeom>
-          <a:noFill/>
-        </p:spPr>
-        <p:txBody>
-          <a:bodyPr wrap="none" lIns="0" rIns="0">
-            <a:noAutofit/>
-          </a:bodyPr>
-          <a:lstStyle/>
-          <a:p>
-            <a:pPr algn="l"/>
-            <a:r>
-              <a:rPr sz="4200" b="1" i="0">
-                <a:solidFill>
-                  <a:srgbClr val="0072CE"/>
-                </a:solidFill>
-                <a:latin typeface="Arial"/>
-              </a:rPr>
-              <a:t>What We Offer</a:t>
-            </a:r>
-          </a:p>
-        </p:txBody>
-      </p:sp>
-      <p:sp>
-        <p:nvSpPr>
-          <p:cNvPr id="6" name="TextBox 5"/>
-          <p:cNvSpPr/>
-          <p:nvPr>
-            <p:ph type="body" idx="1"/>
-          </p:nvPr>
-        </p:nvSpPr>
-        <p:spPr>
-          <a:xfrm>
-            <a:off x="457200" y="1499616"/>
-            <a:ext cx="2831366" cy="518159"/>
-          </a:xfrm>
-          <a:prstGeom prst="rect">
-            <a:avLst/>
-          </a:prstGeom>
-          <a:noFill/>
-        </p:spPr>
-        <p:txBody>
-          <a:bodyPr wrap="none" lIns="0" rIns="0">
-            <a:noAutofit/>
-          </a:bodyPr>
-          <a:lstStyle/>
-          <a:p>
-            <a:pPr algn="l"/>
-            <a:r>
-              <a:rPr sz="3400" b="1" i="0">
-                <a:solidFill>
-                  <a:srgbClr val="0A2240"/>
-                </a:solidFill>
-                <a:latin typeface="Arial"/>
-              </a:rPr>
-              <a:t>Insights</a:t>
-            </a:r>
-          </a:p>
-        </p:txBody>
-      </p:sp>
-      <p:sp>
-        <p:nvSpPr>
-          <p:cNvPr id="7" name="TextBox 6"/>
-          <p:cNvSpPr/>
-          <p:nvPr>
-            <p:ph type="body" idx="2"/>
-          </p:nvPr>
-        </p:nvSpPr>
-        <p:spPr>
-          <a:xfrm>
-            <a:off x="457200" y="2154935"/>
-            <a:ext cx="2613660" cy="3605785"/>
-          </a:xfrm>
-          <a:prstGeom prst="rect">
-            <a:avLst/>
-          </a:prstGeom>
-          <a:noFill/>
-        </p:spPr>
-        <p:txBody>
-          <a:bodyPr wrap="square" lIns="0" rIns="0">
-            <a:noAutofit/>
-          </a:bodyPr>
-          <a:lstStyle/>
-          <a:p>
-            <a:pPr algn="l"/>
-            <a:r>
-              <a:rPr sz="3400" b="0" i="0">
-                <a:solidFill>
-                  <a:srgbClr val="0A2240"/>
-                </a:solidFill>
-                <a:latin typeface="Arial"/>
-              </a:rPr>
-              <a:t>Live data and AI analytics.</a:t>
-            </a:r>
-          </a:p>
-        </p:txBody>
-      </p:sp>
-      <p:sp>
-        <p:nvSpPr>
-          <p:cNvPr id="8" name="TextBox 7"/>
-          <p:cNvSpPr/>
-          <p:nvPr>
-            <p:ph type="body" idx="3"/>
-          </p:nvPr>
-        </p:nvSpPr>
-        <p:spPr>
-          <a:xfrm>
-            <a:off x="3345180" y="1499616"/>
-            <a:ext cx="2909292" cy="518159"/>
-          </a:xfrm>
-          <a:prstGeom prst="rect">
-            <a:avLst/>
-          </a:prstGeom>
-          <a:noFill/>
-        </p:spPr>
-        <p:txBody>
-          <a:bodyPr wrap="none" lIns="0" rIns="0">
-            <a:noAutofit/>
-          </a:bodyPr>
-          <a:lstStyle/>
-          <a:p>
-            <a:pPr algn="l"/>
-            <a:r>
-              <a:rPr sz="3400" b="1" i="0">
-                <a:solidFill>
-                  <a:srgbClr val="0A2240"/>
-                </a:solidFill>
-                <a:latin typeface="Arial"/>
-              </a:rPr>
-              <a:t>Security</a:t>
-            </a:r>
-          </a:p>
-        </p:txBody>
-      </p:sp>
-      <p:sp>
-        <p:nvSpPr>
-          <p:cNvPr id="9" name="TextBox 8"/>
-          <p:cNvSpPr/>
-          <p:nvPr>
-            <p:ph type="body" idx="4"/>
-          </p:nvPr>
-        </p:nvSpPr>
-        <p:spPr>
-          <a:xfrm>
-            <a:off x="3345180" y="2154935"/>
-            <a:ext cx="2613660" cy="3605785"/>
-          </a:xfrm>
-          <a:prstGeom prst="rect">
-            <a:avLst/>
-          </a:prstGeom>
-          <a:noFill/>
-        </p:spPr>
-        <p:txBody>
-          <a:bodyPr wrap="square" lIns="0" rIns="0">
-            <a:noAutofit/>
-          </a:bodyPr>
-          <a:lstStyle/>
-          <a:p>
-            <a:pPr algn="l"/>
-            <a:r>
-              <a:rPr sz="3400" b="0" i="0">
-                <a:solidFill>
-                  <a:srgbClr val="0A2240"/>
-                </a:solidFill>
-                <a:latin typeface="Arial"/>
-              </a:rPr>
-              <a:t>Zero-trust, SOC 2 ready.</a:t>
-            </a:r>
-          </a:p>
-        </p:txBody>
-      </p:sp>
-      <p:sp>
-        <p:nvSpPr>
-          <p:cNvPr id="10" name="TextBox 9"/>
-          <p:cNvSpPr/>
-          <p:nvPr>
-            <p:ph type="body" idx="5"/>
-          </p:nvPr>
-        </p:nvSpPr>
-        <p:spPr>
-          <a:xfrm>
-            <a:off x="6233160" y="1499616"/>
-            <a:ext cx="2613660" cy="518159"/>
-          </a:xfrm>
-          <a:prstGeom prst="rect">
-            <a:avLst/>
-          </a:prstGeom>
-          <a:noFill/>
-        </p:spPr>
-        <p:txBody>
-          <a:bodyPr wrap="none" lIns="0" rIns="0">
-            <a:noAutofit/>
-          </a:bodyPr>
-          <a:lstStyle/>
-          <a:p>
-            <a:pPr algn="l"/>
-            <a:r>
-              <a:rPr sz="3400" b="1" i="0">
-                <a:solidFill>
-                  <a:srgbClr val="0A2240"/>
-                </a:solidFill>
-                <a:latin typeface="Arial"/>
-              </a:rPr>
-              <a:t>Speed</a:t>
-            </a:r>
-          </a:p>
-        </p:txBody>
-      </p:sp>
-      <p:sp>
-        <p:nvSpPr>
-          <p:cNvPr id="11" name="TextBox 10"/>
-          <p:cNvSpPr/>
-          <p:nvPr>
-            <p:ph type="body" idx="6"/>
-          </p:nvPr>
-        </p:nvSpPr>
-        <p:spPr>
-          <a:xfrm>
-            <a:off x="6233160" y="2154935"/>
-            <a:ext cx="2613660" cy="3605785"/>
-          </a:xfrm>
-          <a:prstGeom prst="rect">
-            <a:avLst/>
-          </a:prstGeom>
-          <a:noFill/>
-        </p:spPr>
-        <p:txBody>
-          <a:bodyPr wrap="square" lIns="0" rIns="0">
-            <a:noAutofit/>
-          </a:bodyPr>
-          <a:lstStyle/>
-          <a:p>
-            <a:pPr algn="l"/>
-            <a:r>
-              <a:rPr sz="3400" b="0" i="0">
-                <a:solidFill>
-                  <a:srgbClr val="0A2240"/>
-                </a:solidFill>
-                <a:latin typeface="Arial"/>
-              </a:rPr>
-              <a:t>Sub-100ms p99 latency.</a:t>
-            </a:r>
-          </a:p>
-        </p:txBody>
-      </p:sp>
-      <p:sp>
-        <p:nvSpPr>
-          <p:cNvPr id="12" name="TextBox 11"/>
-          <p:cNvSpPr/>
-          <p:nvPr>
-            <p:ph type="body" idx="7"/>
-          </p:nvPr>
-        </p:nvSpPr>
-        <p:spPr>
-          <a:xfrm>
-            <a:off x="9121140" y="1499616"/>
-            <a:ext cx="2613660" cy="518159"/>
-          </a:xfrm>
-          <a:prstGeom prst="rect">
-            <a:avLst/>
-          </a:prstGeom>
-          <a:noFill/>
-        </p:spPr>
-        <p:txBody>
-          <a:bodyPr wrap="none" lIns="0" rIns="0">
-            <a:noAutofit/>
-          </a:bodyPr>
-          <a:lstStyle/>
-          <a:p>
-            <a:pPr algn="l"/>
-            <a:r>
-              <a:rPr sz="3400" b="1" i="0">
-                <a:solidFill>
-                  <a:srgbClr val="0A2240"/>
-                </a:solidFill>
-                <a:latin typeface="Arial"/>
-              </a:rPr>
-              <a:t>APIs</a:t>
-            </a:r>
-          </a:p>
-        </p:txBody>
-      </p:sp>
-      <p:sp>
-        <p:nvSpPr>
-          <p:cNvPr id="13" name="TextBox 12"/>
-          <p:cNvSpPr/>
-          <p:nvPr>
-            <p:ph type="body" idx="8"/>
-          </p:nvPr>
-        </p:nvSpPr>
-        <p:spPr>
-          <a:xfrm>
-            <a:off x="9121140" y="2154935"/>
-            <a:ext cx="2613660" cy="3605785"/>
-          </a:xfrm>
-          <a:prstGeom prst="rect">
-            <a:avLst/>
-          </a:prstGeom>
-          <a:noFill/>
-        </p:spPr>
-        <p:txBody>
-          <a:bodyPr wrap="square" lIns="0" rIns="0">
-            <a:noAutofit/>
-          </a:bodyPr>
-          <a:lstStyle/>
-          <a:p>
-            <a:pPr algn="l"/>
-            <a:r>
-              <a:rPr sz="3400" b="0" i="0">
-                <a:solidFill>
-                  <a:srgbClr val="0A2240"/>
-                </a:solidFill>
-                <a:latin typeface="Arial"/>
-              </a:rPr>
-              <a:t>300+ open connectors.</a:t>
-            </a:r>
-          </a:p>
-        </p:txBody>
-      </p:sp>
-    </p:spTree>
-    <p:extLst>
-      <p:ext uri="{BB962C8B-B14F-4D97-AF65-F5344CB8AC3E}">
-        <p14:creationId xmlns:p14="http://schemas.microsoft.com/office/powerpoint/2010/main" val="1212999818"/>
-      </p:ext>
-    </p:extLst>
-  </p:cSld>
-  <p:clrMapOvr>
-    <a:masterClrMapping/>
-  </p:clrMapOvr>
-</p:sldLayout>
-</file>
-
-<file path=ppt/slideLayouts/slideLayout19.xml><?xml version="1.0" encoding="utf-8"?>
 <p:sldLayout xmlns:a="http://schemas.openxmlformats.org/drawingml/2006/main" xmlns:r="http://schemas.openxmlformats.org/officeDocument/2006/relationships" xmlns:p="http://schemas.openxmlformats.org/presentationml/2006/main" type="blank" preserve="1">
   <p:cSld name="slidekit · Section Divider">
     <p:bg>
@@ -6531,6 +6061,511 @@
                 <a:latin typeface="Arial"/>
               </a:rPr>
               <a:t>Where We Stand Today</a:t>
+            </a:r>
+          </a:p>
+        </p:txBody>
+      </p:sp>
+    </p:spTree>
+    <p:extLst>
+      <p:ext uri="{BB962C8B-B14F-4D97-AF65-F5344CB8AC3E}">
+        <p14:creationId xmlns:p14="http://schemas.microsoft.com/office/powerpoint/2010/main" val="1212999818"/>
+      </p:ext>
+    </p:extLst>
+  </p:cSld>
+  <p:clrMapOvr>
+    <a:masterClrMapping/>
+  </p:clrMapOvr>
+</p:sldLayout>
+</file>
+
+<file path=ppt/slideLayouts/slideLayout19.xml><?xml version="1.0" encoding="utf-8"?>
+<p:sldLayout xmlns:a="http://schemas.openxmlformats.org/drawingml/2006/main" xmlns:r="http://schemas.openxmlformats.org/officeDocument/2006/relationships" xmlns:p="http://schemas.openxmlformats.org/presentationml/2006/main" type="blank" preserve="1">
+  <p:cSld name="slidekit · Agenda">
+    <p:bg>
+      <p:bgPr>
+        <a:solidFill>
+          <a:srgbClr val="FFFFFF"/>
+        </a:solidFill>
+        <a:effectLst/>
+      </p:bgPr>
+    </p:bg>
+    <p:spTree>
+      <p:nvGrpSpPr>
+        <p:cNvPr id="1" name=""/>
+        <p:cNvGrpSpPr/>
+        <p:nvPr/>
+      </p:nvGrpSpPr>
+      <p:grpSpPr>
+        <a:xfrm>
+          <a:off x="0" y="0"/>
+          <a:ext cx="0" cy="0"/>
+          <a:chOff x="0" y="0"/>
+          <a:chExt cx="0" cy="0"/>
+        </a:xfrm>
+      </p:grpSpPr>
+      <p:sp>
+        <p:nvSpPr>
+          <p:cNvPr id="4" name="Slide Number Placeholder 3"/>
+          <p:cNvSpPr>
+            <a:spLocks noGrp="1"/>
+          </p:cNvSpPr>
+          <p:nvPr>
+            <p:ph type="sldNum" sz="quarter" idx="12"/>
+          </p:nvPr>
+        </p:nvSpPr>
+        <p:spPr>
+          <a:xfrm>
+            <a:off x="11186160" y="6035040"/>
+            <a:ext cx="548640" cy="365760"/>
+          </a:xfrm>
+        </p:spPr>
+        <p:txBody>
+          <a:bodyPr/>
+          <a:lstStyle/>
+          <a:p>
+            <a:fld id="{C1FF6DA9-008F-8B48-92A6-B652298478BF}" type="slidenum">
+              <a:rPr lang="en-US" smtClean="0"/>
+              <a:t>‹#›</a:t>
+            </a:fld>
+            <a:endParaRPr lang="en-US"/>
+          </a:p>
+        </p:txBody>
+      </p:sp>
+      <p:sp>
+        <p:nvSpPr>
+          <p:cNvPr id="5" name="TextBox 4"/>
+          <p:cNvSpPr/>
+          <p:nvPr>
+            <p:ph type="title"/>
+          </p:nvPr>
+        </p:nvSpPr>
+        <p:spPr>
+          <a:xfrm>
+            <a:off x="457200" y="457200"/>
+            <a:ext cx="11277600" cy="768096"/>
+          </a:xfrm>
+          <a:prstGeom prst="rect">
+            <a:avLst/>
+          </a:prstGeom>
+          <a:noFill/>
+        </p:spPr>
+        <p:txBody>
+          <a:bodyPr wrap="none" lIns="0" rIns="0">
+            <a:noAutofit/>
+          </a:bodyPr>
+          <a:lstStyle/>
+          <a:p>
+            <a:pPr algn="l"/>
+            <a:r>
+              <a:rPr sz="4200" b="1" i="0">
+                <a:solidFill>
+                  <a:srgbClr val="0072CE"/>
+                </a:solidFill>
+                <a:latin typeface="Arial"/>
+              </a:rPr>
+              <a:t>What We Will Cover</a:t>
+            </a:r>
+          </a:p>
+        </p:txBody>
+      </p:sp>
+      <p:sp>
+        <p:nvSpPr>
+          <p:cNvPr id="6" name="Rectangle 5"/>
+          <p:cNvSpPr/>
+          <p:nvPr>
+            <p:ph type="body" idx="1"/>
+          </p:nvPr>
+        </p:nvSpPr>
+        <p:spPr>
+          <a:xfrm>
+            <a:off x="457200" y="1280160"/>
+            <a:ext cx="11277600" cy="64008"/>
+          </a:xfrm>
+          <a:prstGeom prst="rect">
+            <a:avLst/>
+          </a:prstGeom>
+          <a:solidFill>
+            <a:srgbClr val="0072CE"/>
+          </a:solidFill>
+          <a:ln>
+            <a:noFill/>
+          </a:ln>
+          <a:effectLst/>
+        </p:spPr>
+        <p:txBody>
+          <a:bodyPr rtlCol="0" anchor="ctr"/>
+          <a:lstStyle/>
+          <a:p>
+            <a:pPr algn="ctr"/>
+          </a:p>
+        </p:txBody>
+      </p:sp>
+      <p:sp>
+        <p:nvSpPr>
+          <p:cNvPr id="7" name="TextBox 6"/>
+          <p:cNvSpPr/>
+          <p:nvPr>
+            <p:ph type="body" idx="2"/>
+          </p:nvPr>
+        </p:nvSpPr>
+        <p:spPr>
+          <a:xfrm>
+            <a:off x="457200" y="1618488"/>
+            <a:ext cx="951348" cy="518159"/>
+          </a:xfrm>
+          <a:prstGeom prst="rect">
+            <a:avLst/>
+          </a:prstGeom>
+          <a:noFill/>
+        </p:spPr>
+        <p:txBody>
+          <a:bodyPr wrap="none" lIns="0" rIns="0">
+            <a:noAutofit/>
+          </a:bodyPr>
+          <a:lstStyle/>
+          <a:p>
+            <a:pPr algn="l"/>
+            <a:r>
+              <a:rPr sz="3400" b="1" i="0">
+                <a:solidFill>
+                  <a:srgbClr val="0072CE"/>
+                </a:solidFill>
+                <a:latin typeface="Arial"/>
+              </a:rPr>
+              <a:t>01</a:t>
+            </a:r>
+          </a:p>
+        </p:txBody>
+      </p:sp>
+      <p:sp>
+        <p:nvSpPr>
+          <p:cNvPr id="8" name="TextBox 7"/>
+          <p:cNvSpPr/>
+          <p:nvPr>
+            <p:ph type="body" idx="3"/>
+          </p:nvPr>
+        </p:nvSpPr>
+        <p:spPr>
+          <a:xfrm>
+            <a:off x="1371600" y="1618488"/>
+            <a:ext cx="10363200" cy="518159"/>
+          </a:xfrm>
+          <a:prstGeom prst="rect">
+            <a:avLst/>
+          </a:prstGeom>
+          <a:noFill/>
+        </p:spPr>
+        <p:txBody>
+          <a:bodyPr wrap="none" lIns="0" rIns="0">
+            <a:noAutofit/>
+          </a:bodyPr>
+          <a:lstStyle/>
+          <a:p>
+            <a:pPr algn="l"/>
+            <a:r>
+              <a:rPr sz="3400" b="0" i="0">
+                <a:solidFill>
+                  <a:srgbClr val="0A2240"/>
+                </a:solidFill>
+                <a:latin typeface="Arial"/>
+              </a:rPr>
+              <a:t>Performance against targets</a:t>
+            </a:r>
+          </a:p>
+        </p:txBody>
+      </p:sp>
+      <p:sp>
+        <p:nvSpPr>
+          <p:cNvPr id="9" name="TextBox 8"/>
+          <p:cNvSpPr/>
+          <p:nvPr>
+            <p:ph type="body" idx="4"/>
+          </p:nvPr>
+        </p:nvSpPr>
+        <p:spPr>
+          <a:xfrm>
+            <a:off x="457200" y="2501798"/>
+            <a:ext cx="951348" cy="518159"/>
+          </a:xfrm>
+          <a:prstGeom prst="rect">
+            <a:avLst/>
+          </a:prstGeom>
+          <a:noFill/>
+        </p:spPr>
+        <p:txBody>
+          <a:bodyPr wrap="none" lIns="0" rIns="0">
+            <a:noAutofit/>
+          </a:bodyPr>
+          <a:lstStyle/>
+          <a:p>
+            <a:pPr algn="l"/>
+            <a:r>
+              <a:rPr sz="3400" b="1" i="0">
+                <a:solidFill>
+                  <a:srgbClr val="0072CE"/>
+                </a:solidFill>
+                <a:latin typeface="Arial"/>
+              </a:rPr>
+              <a:t>02</a:t>
+            </a:r>
+          </a:p>
+        </p:txBody>
+      </p:sp>
+      <p:sp>
+        <p:nvSpPr>
+          <p:cNvPr id="10" name="TextBox 9"/>
+          <p:cNvSpPr/>
+          <p:nvPr>
+            <p:ph type="body" idx="5"/>
+          </p:nvPr>
+        </p:nvSpPr>
+        <p:spPr>
+          <a:xfrm>
+            <a:off x="1371600" y="2501798"/>
+            <a:ext cx="10363200" cy="518159"/>
+          </a:xfrm>
+          <a:prstGeom prst="rect">
+            <a:avLst/>
+          </a:prstGeom>
+          <a:noFill/>
+        </p:spPr>
+        <p:txBody>
+          <a:bodyPr wrap="none" lIns="0" rIns="0">
+            <a:noAutofit/>
+          </a:bodyPr>
+          <a:lstStyle/>
+          <a:p>
+            <a:pPr algn="l"/>
+            <a:r>
+              <a:rPr sz="3400" b="0" i="0">
+                <a:solidFill>
+                  <a:srgbClr val="0A2240"/>
+                </a:solidFill>
+                <a:latin typeface="Arial"/>
+              </a:rPr>
+              <a:t>Customer and market signals</a:t>
+            </a:r>
+          </a:p>
+        </p:txBody>
+      </p:sp>
+      <p:sp>
+        <p:nvSpPr>
+          <p:cNvPr id="11" name="TextBox 10"/>
+          <p:cNvSpPr/>
+          <p:nvPr>
+            <p:ph type="body" idx="6"/>
+          </p:nvPr>
+        </p:nvSpPr>
+        <p:spPr>
+          <a:xfrm>
+            <a:off x="457200" y="3385108"/>
+            <a:ext cx="951348" cy="518159"/>
+          </a:xfrm>
+          <a:prstGeom prst="rect">
+            <a:avLst/>
+          </a:prstGeom>
+          <a:noFill/>
+        </p:spPr>
+        <p:txBody>
+          <a:bodyPr wrap="none" lIns="0" rIns="0">
+            <a:noAutofit/>
+          </a:bodyPr>
+          <a:lstStyle/>
+          <a:p>
+            <a:pPr algn="l"/>
+            <a:r>
+              <a:rPr sz="3400" b="1" i="0">
+                <a:solidFill>
+                  <a:srgbClr val="0072CE"/>
+                </a:solidFill>
+                <a:latin typeface="Arial"/>
+              </a:rPr>
+              <a:t>03</a:t>
+            </a:r>
+          </a:p>
+        </p:txBody>
+      </p:sp>
+      <p:sp>
+        <p:nvSpPr>
+          <p:cNvPr id="12" name="TextBox 11"/>
+          <p:cNvSpPr/>
+          <p:nvPr>
+            <p:ph type="body" idx="7"/>
+          </p:nvPr>
+        </p:nvSpPr>
+        <p:spPr>
+          <a:xfrm>
+            <a:off x="1371600" y="3385108"/>
+            <a:ext cx="10363200" cy="518159"/>
+          </a:xfrm>
+          <a:prstGeom prst="rect">
+            <a:avLst/>
+          </a:prstGeom>
+          <a:noFill/>
+        </p:spPr>
+        <p:txBody>
+          <a:bodyPr wrap="none" lIns="0" rIns="0">
+            <a:noAutofit/>
+          </a:bodyPr>
+          <a:lstStyle/>
+          <a:p>
+            <a:pPr algn="l"/>
+            <a:r>
+              <a:rPr sz="3400" b="0" i="0">
+                <a:solidFill>
+                  <a:srgbClr val="0A2240"/>
+                </a:solidFill>
+                <a:latin typeface="Arial"/>
+              </a:rPr>
+              <a:t>Operational health and risks</a:t>
+            </a:r>
+          </a:p>
+        </p:txBody>
+      </p:sp>
+      <p:sp>
+        <p:nvSpPr>
+          <p:cNvPr id="13" name="TextBox 12"/>
+          <p:cNvSpPr/>
+          <p:nvPr>
+            <p:ph type="body" idx="8"/>
+          </p:nvPr>
+        </p:nvSpPr>
+        <p:spPr>
+          <a:xfrm>
+            <a:off x="457200" y="4268418"/>
+            <a:ext cx="951348" cy="518159"/>
+          </a:xfrm>
+          <a:prstGeom prst="rect">
+            <a:avLst/>
+          </a:prstGeom>
+          <a:noFill/>
+        </p:spPr>
+        <p:txBody>
+          <a:bodyPr wrap="none" lIns="0" rIns="0">
+            <a:noAutofit/>
+          </a:bodyPr>
+          <a:lstStyle/>
+          <a:p>
+            <a:pPr algn="l"/>
+            <a:r>
+              <a:rPr sz="3400" b="1" i="0">
+                <a:solidFill>
+                  <a:srgbClr val="0072CE"/>
+                </a:solidFill>
+                <a:latin typeface="Arial"/>
+              </a:rPr>
+              <a:t>04</a:t>
+            </a:r>
+          </a:p>
+        </p:txBody>
+      </p:sp>
+      <p:sp>
+        <p:nvSpPr>
+          <p:cNvPr id="14" name="TextBox 13"/>
+          <p:cNvSpPr/>
+          <p:nvPr>
+            <p:ph type="body" idx="9"/>
+          </p:nvPr>
+        </p:nvSpPr>
+        <p:spPr>
+          <a:xfrm>
+            <a:off x="1371600" y="4268418"/>
+            <a:ext cx="10363200" cy="518159"/>
+          </a:xfrm>
+          <a:prstGeom prst="rect">
+            <a:avLst/>
+          </a:prstGeom>
+          <a:noFill/>
+        </p:spPr>
+        <p:txBody>
+          <a:bodyPr wrap="none" lIns="0" rIns="0">
+            <a:noAutofit/>
+          </a:bodyPr>
+          <a:lstStyle/>
+          <a:p>
+            <a:pPr algn="l"/>
+            <a:r>
+              <a:rPr sz="3400" b="0" i="0">
+                <a:solidFill>
+                  <a:srgbClr val="0A2240"/>
+                </a:solidFill>
+                <a:latin typeface="Arial"/>
+              </a:rPr>
+              <a:t>Roadmap for next quarter</a:t>
+            </a:r>
+          </a:p>
+        </p:txBody>
+      </p:sp>
+      <p:sp>
+        <p:nvSpPr>
+          <p:cNvPr id="15" name="TextBox 14"/>
+          <p:cNvSpPr/>
+          <p:nvPr>
+            <p:ph type="body" idx="13"/>
+          </p:nvPr>
+        </p:nvSpPr>
+        <p:spPr>
+          <a:xfrm>
+            <a:off x="457200" y="5151728"/>
+            <a:ext cx="951348" cy="518159"/>
+          </a:xfrm>
+          <a:prstGeom prst="rect">
+            <a:avLst/>
+          </a:prstGeom>
+          <a:noFill/>
+        </p:spPr>
+        <p:txBody>
+          <a:bodyPr wrap="none" lIns="0" rIns="0">
+            <a:noAutofit/>
+          </a:bodyPr>
+          <a:lstStyle/>
+          <a:p>
+            <a:pPr algn="l"/>
+            <a:r>
+              <a:rPr sz="3400" b="1" i="0">
+                <a:solidFill>
+                  <a:srgbClr val="0072CE"/>
+                </a:solidFill>
+                <a:latin typeface="Arial"/>
+              </a:rPr>
+              <a:t>05</a:t>
+            </a:r>
+          </a:p>
+        </p:txBody>
+      </p:sp>
+      <p:sp>
+        <p:nvSpPr>
+          <p:cNvPr id="16" name="TextBox 15"/>
+          <p:cNvSpPr/>
+          <p:nvPr>
+            <p:ph type="body" idx="14"/>
+          </p:nvPr>
+        </p:nvSpPr>
+        <p:spPr>
+          <a:xfrm>
+            <a:off x="1371600" y="5151728"/>
+            <a:ext cx="10363200" cy="518159"/>
+          </a:xfrm>
+          <a:prstGeom prst="rect">
+            <a:avLst/>
+          </a:prstGeom>
+          <a:noFill/>
+        </p:spPr>
+        <p:txBody>
+          <a:bodyPr wrap="none" lIns="0" rIns="0">
+            <a:noAutofit/>
+          </a:bodyPr>
+          <a:lstStyle/>
+          <a:p>
+            <a:pPr algn="l"/>
+            <a:r>
+              <a:rPr sz="3400" b="0" i="0">
+                <a:solidFill>
+                  <a:srgbClr val="0A2240"/>
+                </a:solidFill>
+                <a:latin typeface="Arial"/>
+              </a:rPr>
+              <a:t>Decisions we need today</a:t>
             </a:r>
           </a:p>
         </p:txBody>
@@ -6720,511 +6755,6 @@
 
 <file path=ppt/slideLayouts/slideLayout20.xml><?xml version="1.0" encoding="utf-8"?>
 <p:sldLayout xmlns:a="http://schemas.openxmlformats.org/drawingml/2006/main" xmlns:r="http://schemas.openxmlformats.org/officeDocument/2006/relationships" xmlns:p="http://schemas.openxmlformats.org/presentationml/2006/main" type="blank" preserve="1">
-  <p:cSld name="slidekit · Agenda">
-    <p:bg>
-      <p:bgPr>
-        <a:solidFill>
-          <a:srgbClr val="FFFFFF"/>
-        </a:solidFill>
-        <a:effectLst/>
-      </p:bgPr>
-    </p:bg>
-    <p:spTree>
-      <p:nvGrpSpPr>
-        <p:cNvPr id="1" name=""/>
-        <p:cNvGrpSpPr/>
-        <p:nvPr/>
-      </p:nvGrpSpPr>
-      <p:grpSpPr>
-        <a:xfrm>
-          <a:off x="0" y="0"/>
-          <a:ext cx="0" cy="0"/>
-          <a:chOff x="0" y="0"/>
-          <a:chExt cx="0" cy="0"/>
-        </a:xfrm>
-      </p:grpSpPr>
-      <p:sp>
-        <p:nvSpPr>
-          <p:cNvPr id="4" name="Slide Number Placeholder 3"/>
-          <p:cNvSpPr>
-            <a:spLocks noGrp="1"/>
-          </p:cNvSpPr>
-          <p:nvPr>
-            <p:ph type="sldNum" sz="quarter" idx="12"/>
-          </p:nvPr>
-        </p:nvSpPr>
-        <p:spPr>
-          <a:xfrm>
-            <a:off x="11186160" y="6035040"/>
-            <a:ext cx="548640" cy="365760"/>
-          </a:xfrm>
-        </p:spPr>
-        <p:txBody>
-          <a:bodyPr/>
-          <a:lstStyle/>
-          <a:p>
-            <a:fld id="{C1FF6DA9-008F-8B48-92A6-B652298478BF}" type="slidenum">
-              <a:rPr lang="en-US" smtClean="0"/>
-              <a:t>‹#›</a:t>
-            </a:fld>
-            <a:endParaRPr lang="en-US"/>
-          </a:p>
-        </p:txBody>
-      </p:sp>
-      <p:sp>
-        <p:nvSpPr>
-          <p:cNvPr id="5" name="TextBox 4"/>
-          <p:cNvSpPr/>
-          <p:nvPr>
-            <p:ph type="title"/>
-          </p:nvPr>
-        </p:nvSpPr>
-        <p:spPr>
-          <a:xfrm>
-            <a:off x="457200" y="457200"/>
-            <a:ext cx="11277600" cy="768096"/>
-          </a:xfrm>
-          <a:prstGeom prst="rect">
-            <a:avLst/>
-          </a:prstGeom>
-          <a:noFill/>
-        </p:spPr>
-        <p:txBody>
-          <a:bodyPr wrap="none" lIns="0" rIns="0">
-            <a:noAutofit/>
-          </a:bodyPr>
-          <a:lstStyle/>
-          <a:p>
-            <a:pPr algn="l"/>
-            <a:r>
-              <a:rPr sz="4200" b="1" i="0">
-                <a:solidFill>
-                  <a:srgbClr val="0072CE"/>
-                </a:solidFill>
-                <a:latin typeface="Arial"/>
-              </a:rPr>
-              <a:t>What We Will Cover</a:t>
-            </a:r>
-          </a:p>
-        </p:txBody>
-      </p:sp>
-      <p:sp>
-        <p:nvSpPr>
-          <p:cNvPr id="6" name="Rectangle 5"/>
-          <p:cNvSpPr/>
-          <p:nvPr>
-            <p:ph type="body" idx="1"/>
-          </p:nvPr>
-        </p:nvSpPr>
-        <p:spPr>
-          <a:xfrm>
-            <a:off x="457200" y="1280160"/>
-            <a:ext cx="11277600" cy="64008"/>
-          </a:xfrm>
-          <a:prstGeom prst="rect">
-            <a:avLst/>
-          </a:prstGeom>
-          <a:solidFill>
-            <a:srgbClr val="0072CE"/>
-          </a:solidFill>
-          <a:ln>
-            <a:noFill/>
-          </a:ln>
-          <a:effectLst/>
-        </p:spPr>
-        <p:txBody>
-          <a:bodyPr rtlCol="0" anchor="ctr"/>
-          <a:lstStyle/>
-          <a:p>
-            <a:pPr algn="ctr"/>
-          </a:p>
-        </p:txBody>
-      </p:sp>
-      <p:sp>
-        <p:nvSpPr>
-          <p:cNvPr id="7" name="TextBox 6"/>
-          <p:cNvSpPr/>
-          <p:nvPr>
-            <p:ph type="body" idx="2"/>
-          </p:nvPr>
-        </p:nvSpPr>
-        <p:spPr>
-          <a:xfrm>
-            <a:off x="457200" y="1618488"/>
-            <a:ext cx="951348" cy="518159"/>
-          </a:xfrm>
-          <a:prstGeom prst="rect">
-            <a:avLst/>
-          </a:prstGeom>
-          <a:noFill/>
-        </p:spPr>
-        <p:txBody>
-          <a:bodyPr wrap="none" lIns="0" rIns="0">
-            <a:noAutofit/>
-          </a:bodyPr>
-          <a:lstStyle/>
-          <a:p>
-            <a:pPr algn="l"/>
-            <a:r>
-              <a:rPr sz="3400" b="1" i="0">
-                <a:solidFill>
-                  <a:srgbClr val="0072CE"/>
-                </a:solidFill>
-                <a:latin typeface="Arial"/>
-              </a:rPr>
-              <a:t>01</a:t>
-            </a:r>
-          </a:p>
-        </p:txBody>
-      </p:sp>
-      <p:sp>
-        <p:nvSpPr>
-          <p:cNvPr id="8" name="TextBox 7"/>
-          <p:cNvSpPr/>
-          <p:nvPr>
-            <p:ph type="body" idx="3"/>
-          </p:nvPr>
-        </p:nvSpPr>
-        <p:spPr>
-          <a:xfrm>
-            <a:off x="1371600" y="1618488"/>
-            <a:ext cx="10363200" cy="518159"/>
-          </a:xfrm>
-          <a:prstGeom prst="rect">
-            <a:avLst/>
-          </a:prstGeom>
-          <a:noFill/>
-        </p:spPr>
-        <p:txBody>
-          <a:bodyPr wrap="none" lIns="0" rIns="0">
-            <a:noAutofit/>
-          </a:bodyPr>
-          <a:lstStyle/>
-          <a:p>
-            <a:pPr algn="l"/>
-            <a:r>
-              <a:rPr sz="3400" b="0" i="0">
-                <a:solidFill>
-                  <a:srgbClr val="0A2240"/>
-                </a:solidFill>
-                <a:latin typeface="Arial"/>
-              </a:rPr>
-              <a:t>Performance against targets</a:t>
-            </a:r>
-          </a:p>
-        </p:txBody>
-      </p:sp>
-      <p:sp>
-        <p:nvSpPr>
-          <p:cNvPr id="9" name="TextBox 8"/>
-          <p:cNvSpPr/>
-          <p:nvPr>
-            <p:ph type="body" idx="4"/>
-          </p:nvPr>
-        </p:nvSpPr>
-        <p:spPr>
-          <a:xfrm>
-            <a:off x="457200" y="2501798"/>
-            <a:ext cx="951348" cy="518159"/>
-          </a:xfrm>
-          <a:prstGeom prst="rect">
-            <a:avLst/>
-          </a:prstGeom>
-          <a:noFill/>
-        </p:spPr>
-        <p:txBody>
-          <a:bodyPr wrap="none" lIns="0" rIns="0">
-            <a:noAutofit/>
-          </a:bodyPr>
-          <a:lstStyle/>
-          <a:p>
-            <a:pPr algn="l"/>
-            <a:r>
-              <a:rPr sz="3400" b="1" i="0">
-                <a:solidFill>
-                  <a:srgbClr val="0072CE"/>
-                </a:solidFill>
-                <a:latin typeface="Arial"/>
-              </a:rPr>
-              <a:t>02</a:t>
-            </a:r>
-          </a:p>
-        </p:txBody>
-      </p:sp>
-      <p:sp>
-        <p:nvSpPr>
-          <p:cNvPr id="10" name="TextBox 9"/>
-          <p:cNvSpPr/>
-          <p:nvPr>
-            <p:ph type="body" idx="5"/>
-          </p:nvPr>
-        </p:nvSpPr>
-        <p:spPr>
-          <a:xfrm>
-            <a:off x="1371600" y="2501798"/>
-            <a:ext cx="10363200" cy="518159"/>
-          </a:xfrm>
-          <a:prstGeom prst="rect">
-            <a:avLst/>
-          </a:prstGeom>
-          <a:noFill/>
-        </p:spPr>
-        <p:txBody>
-          <a:bodyPr wrap="none" lIns="0" rIns="0">
-            <a:noAutofit/>
-          </a:bodyPr>
-          <a:lstStyle/>
-          <a:p>
-            <a:pPr algn="l"/>
-            <a:r>
-              <a:rPr sz="3400" b="0" i="0">
-                <a:solidFill>
-                  <a:srgbClr val="0A2240"/>
-                </a:solidFill>
-                <a:latin typeface="Arial"/>
-              </a:rPr>
-              <a:t>Customer and market signals</a:t>
-            </a:r>
-          </a:p>
-        </p:txBody>
-      </p:sp>
-      <p:sp>
-        <p:nvSpPr>
-          <p:cNvPr id="11" name="TextBox 10"/>
-          <p:cNvSpPr/>
-          <p:nvPr>
-            <p:ph type="body" idx="6"/>
-          </p:nvPr>
-        </p:nvSpPr>
-        <p:spPr>
-          <a:xfrm>
-            <a:off x="457200" y="3385108"/>
-            <a:ext cx="951348" cy="518159"/>
-          </a:xfrm>
-          <a:prstGeom prst="rect">
-            <a:avLst/>
-          </a:prstGeom>
-          <a:noFill/>
-        </p:spPr>
-        <p:txBody>
-          <a:bodyPr wrap="none" lIns="0" rIns="0">
-            <a:noAutofit/>
-          </a:bodyPr>
-          <a:lstStyle/>
-          <a:p>
-            <a:pPr algn="l"/>
-            <a:r>
-              <a:rPr sz="3400" b="1" i="0">
-                <a:solidFill>
-                  <a:srgbClr val="0072CE"/>
-                </a:solidFill>
-                <a:latin typeface="Arial"/>
-              </a:rPr>
-              <a:t>03</a:t>
-            </a:r>
-          </a:p>
-        </p:txBody>
-      </p:sp>
-      <p:sp>
-        <p:nvSpPr>
-          <p:cNvPr id="12" name="TextBox 11"/>
-          <p:cNvSpPr/>
-          <p:nvPr>
-            <p:ph type="body" idx="7"/>
-          </p:nvPr>
-        </p:nvSpPr>
-        <p:spPr>
-          <a:xfrm>
-            <a:off x="1371600" y="3385108"/>
-            <a:ext cx="10363200" cy="518159"/>
-          </a:xfrm>
-          <a:prstGeom prst="rect">
-            <a:avLst/>
-          </a:prstGeom>
-          <a:noFill/>
-        </p:spPr>
-        <p:txBody>
-          <a:bodyPr wrap="none" lIns="0" rIns="0">
-            <a:noAutofit/>
-          </a:bodyPr>
-          <a:lstStyle/>
-          <a:p>
-            <a:pPr algn="l"/>
-            <a:r>
-              <a:rPr sz="3400" b="0" i="0">
-                <a:solidFill>
-                  <a:srgbClr val="0A2240"/>
-                </a:solidFill>
-                <a:latin typeface="Arial"/>
-              </a:rPr>
-              <a:t>Operational health and risks</a:t>
-            </a:r>
-          </a:p>
-        </p:txBody>
-      </p:sp>
-      <p:sp>
-        <p:nvSpPr>
-          <p:cNvPr id="13" name="TextBox 12"/>
-          <p:cNvSpPr/>
-          <p:nvPr>
-            <p:ph type="body" idx="8"/>
-          </p:nvPr>
-        </p:nvSpPr>
-        <p:spPr>
-          <a:xfrm>
-            <a:off x="457200" y="4268418"/>
-            <a:ext cx="951348" cy="518159"/>
-          </a:xfrm>
-          <a:prstGeom prst="rect">
-            <a:avLst/>
-          </a:prstGeom>
-          <a:noFill/>
-        </p:spPr>
-        <p:txBody>
-          <a:bodyPr wrap="none" lIns="0" rIns="0">
-            <a:noAutofit/>
-          </a:bodyPr>
-          <a:lstStyle/>
-          <a:p>
-            <a:pPr algn="l"/>
-            <a:r>
-              <a:rPr sz="3400" b="1" i="0">
-                <a:solidFill>
-                  <a:srgbClr val="0072CE"/>
-                </a:solidFill>
-                <a:latin typeface="Arial"/>
-              </a:rPr>
-              <a:t>04</a:t>
-            </a:r>
-          </a:p>
-        </p:txBody>
-      </p:sp>
-      <p:sp>
-        <p:nvSpPr>
-          <p:cNvPr id="14" name="TextBox 13"/>
-          <p:cNvSpPr/>
-          <p:nvPr>
-            <p:ph type="body" idx="9"/>
-          </p:nvPr>
-        </p:nvSpPr>
-        <p:spPr>
-          <a:xfrm>
-            <a:off x="1371600" y="4268418"/>
-            <a:ext cx="10363200" cy="518159"/>
-          </a:xfrm>
-          <a:prstGeom prst="rect">
-            <a:avLst/>
-          </a:prstGeom>
-          <a:noFill/>
-        </p:spPr>
-        <p:txBody>
-          <a:bodyPr wrap="none" lIns="0" rIns="0">
-            <a:noAutofit/>
-          </a:bodyPr>
-          <a:lstStyle/>
-          <a:p>
-            <a:pPr algn="l"/>
-            <a:r>
-              <a:rPr sz="3400" b="0" i="0">
-                <a:solidFill>
-                  <a:srgbClr val="0A2240"/>
-                </a:solidFill>
-                <a:latin typeface="Arial"/>
-              </a:rPr>
-              <a:t>Roadmap for next quarter</a:t>
-            </a:r>
-          </a:p>
-        </p:txBody>
-      </p:sp>
-      <p:sp>
-        <p:nvSpPr>
-          <p:cNvPr id="15" name="TextBox 14"/>
-          <p:cNvSpPr/>
-          <p:nvPr>
-            <p:ph type="body" idx="13"/>
-          </p:nvPr>
-        </p:nvSpPr>
-        <p:spPr>
-          <a:xfrm>
-            <a:off x="457200" y="5151728"/>
-            <a:ext cx="951348" cy="518159"/>
-          </a:xfrm>
-          <a:prstGeom prst="rect">
-            <a:avLst/>
-          </a:prstGeom>
-          <a:noFill/>
-        </p:spPr>
-        <p:txBody>
-          <a:bodyPr wrap="none" lIns="0" rIns="0">
-            <a:noAutofit/>
-          </a:bodyPr>
-          <a:lstStyle/>
-          <a:p>
-            <a:pPr algn="l"/>
-            <a:r>
-              <a:rPr sz="3400" b="1" i="0">
-                <a:solidFill>
-                  <a:srgbClr val="0072CE"/>
-                </a:solidFill>
-                <a:latin typeface="Arial"/>
-              </a:rPr>
-              <a:t>05</a:t>
-            </a:r>
-          </a:p>
-        </p:txBody>
-      </p:sp>
-      <p:sp>
-        <p:nvSpPr>
-          <p:cNvPr id="16" name="TextBox 15"/>
-          <p:cNvSpPr/>
-          <p:nvPr>
-            <p:ph type="body" idx="14"/>
-          </p:nvPr>
-        </p:nvSpPr>
-        <p:spPr>
-          <a:xfrm>
-            <a:off x="1371600" y="5151728"/>
-            <a:ext cx="10363200" cy="518159"/>
-          </a:xfrm>
-          <a:prstGeom prst="rect">
-            <a:avLst/>
-          </a:prstGeom>
-          <a:noFill/>
-        </p:spPr>
-        <p:txBody>
-          <a:bodyPr wrap="none" lIns="0" rIns="0">
-            <a:noAutofit/>
-          </a:bodyPr>
-          <a:lstStyle/>
-          <a:p>
-            <a:pPr algn="l"/>
-            <a:r>
-              <a:rPr sz="3400" b="0" i="0">
-                <a:solidFill>
-                  <a:srgbClr val="0A2240"/>
-                </a:solidFill>
-                <a:latin typeface="Arial"/>
-              </a:rPr>
-              <a:t>Decisions we need today</a:t>
-            </a:r>
-          </a:p>
-        </p:txBody>
-      </p:sp>
-    </p:spTree>
-    <p:extLst>
-      <p:ext uri="{BB962C8B-B14F-4D97-AF65-F5344CB8AC3E}">
-        <p14:creationId xmlns:p14="http://schemas.microsoft.com/office/powerpoint/2010/main" val="1212999818"/>
-      </p:ext>
-    </p:extLst>
-  </p:cSld>
-  <p:clrMapOvr>
-    <a:masterClrMapping/>
-  </p:clrMapOvr>
-</p:sldLayout>
-</file>
-
-<file path=ppt/slideLayouts/slideLayout21.xml><?xml version="1.0" encoding="utf-8"?>
-<p:sldLayout xmlns:a="http://schemas.openxmlformats.org/drawingml/2006/main" xmlns:r="http://schemas.openxmlformats.org/officeDocument/2006/relationships" xmlns:p="http://schemas.openxmlformats.org/presentationml/2006/main" type="blank" preserve="1">
   <p:cSld name="slidekit · Big Number">
     <p:bg>
       <p:bgPr>
@@ -7395,7 +6925,7 @@
 </p:sldLayout>
 </file>
 
-<file path=ppt/slideLayouts/slideLayout22.xml><?xml version="1.0" encoding="utf-8"?>
+<file path=ppt/slideLayouts/slideLayout21.xml><?xml version="1.0" encoding="utf-8"?>
 <p:sldLayout xmlns:a="http://schemas.openxmlformats.org/drawingml/2006/main" xmlns:r="http://schemas.openxmlformats.org/officeDocument/2006/relationships" xmlns:p="http://schemas.openxmlformats.org/presentationml/2006/main" type="blank" preserve="1">
   <p:cSld name="slidekit · Pull Quote">
     <p:bg>
@@ -7458,8 +6988,8 @@
         </p:nvSpPr>
         <p:spPr>
           <a:xfrm>
-            <a:off x="457200" y="2301240"/>
-            <a:ext cx="128016" cy="2255520"/>
+            <a:off x="457200" y="2621280"/>
+            <a:ext cx="128016" cy="1615440"/>
           </a:xfrm>
           <a:prstGeom prst="rect">
             <a:avLst/>
@@ -7490,16 +7020,16 @@
         </p:nvSpPr>
         <p:spPr>
           <a:xfrm>
-            <a:off x="996696" y="2301240"/>
-            <a:ext cx="10738104" cy="1371600"/>
-          </a:xfrm>
-          <a:prstGeom prst="rect">
-            <a:avLst/>
-          </a:prstGeom>
-          <a:noFill/>
-        </p:spPr>
-        <p:txBody>
-          <a:bodyPr wrap="square" lIns="0" rIns="0">
+            <a:off x="996696" y="2621280"/>
+            <a:ext cx="11195304" cy="731520"/>
+          </a:xfrm>
+          <a:prstGeom prst="rect">
+            <a:avLst/>
+          </a:prstGeom>
+          <a:noFill/>
+        </p:spPr>
+        <p:txBody>
+          <a:bodyPr wrap="none" lIns="0" rIns="0">
             <a:noAutofit/>
           </a:bodyPr>
           <a:lstStyle/>
@@ -7512,7 +7042,7 @@
                 </a:solidFill>
                 <a:latin typeface="Arial"/>
               </a:rPr>
-              <a:t>"We stopped buying tools and started buying outcomes."</a:t>
+              <a:t>"We buy outcomes, not tools."</a:t>
             </a:r>
           </a:p>
         </p:txBody>
@@ -7527,7 +7057,7 @@
         </p:nvSpPr>
         <p:spPr>
           <a:xfrm>
-            <a:off x="996696" y="3947160"/>
+            <a:off x="996696" y="3627120"/>
             <a:ext cx="11195304" cy="609600"/>
           </a:xfrm>
           <a:prstGeom prst="rect">
@@ -7545,7 +7075,7 @@
             <a:r>
               <a:rPr sz="3400" b="0" i="0">
                 <a:solidFill>
-                  <a:srgbClr val="5B6B82"/>
+                  <a:srgbClr val="0A2240"/>
                 </a:solidFill>
                 <a:latin typeface="Arial"/>
               </a:rPr>
@@ -7567,7 +7097,7 @@
 </p:sldLayout>
 </file>
 
-<file path=ppt/slideLayouts/slideLayout23.xml><?xml version="1.0" encoding="utf-8"?>
+<file path=ppt/slideLayouts/slideLayout22.xml><?xml version="1.0" encoding="utf-8"?>
 <p:sldLayout xmlns:a="http://schemas.openxmlformats.org/drawingml/2006/main" xmlns:r="http://schemas.openxmlformats.org/officeDocument/2006/relationships" xmlns:p="http://schemas.openxmlformats.org/presentationml/2006/main" type="blank" preserve="1">
   <p:cSld name="slidekit · Definition">
     <p:bg>
@@ -7630,8 +7160,8 @@
         </p:nvSpPr>
         <p:spPr>
           <a:xfrm>
-            <a:off x="457200" y="1965960"/>
-            <a:ext cx="128016" cy="2926080"/>
+            <a:off x="457200" y="2484120"/>
+            <a:ext cx="128016" cy="1889760"/>
           </a:xfrm>
           <a:prstGeom prst="rect">
             <a:avLst/>
@@ -7662,7 +7192,7 @@
         </p:nvSpPr>
         <p:spPr>
           <a:xfrm>
-            <a:off x="996696" y="1965960"/>
+            <a:off x="996696" y="2484120"/>
             <a:ext cx="11195304" cy="1005840"/>
           </a:xfrm>
           <a:prstGeom prst="rect">
@@ -7699,16 +7229,16 @@
         </p:nvSpPr>
         <p:spPr>
           <a:xfrm>
-            <a:off x="996696" y="3246120"/>
-            <a:ext cx="10738104" cy="1645920"/>
-          </a:xfrm>
-          <a:prstGeom prst="rect">
-            <a:avLst/>
-          </a:prstGeom>
-          <a:noFill/>
-        </p:spPr>
-        <p:txBody>
-          <a:bodyPr wrap="square" lIns="0" rIns="0">
+            <a:off x="996696" y="3764280"/>
+            <a:ext cx="11195304" cy="609600"/>
+          </a:xfrm>
+          <a:prstGeom prst="rect">
+            <a:avLst/>
+          </a:prstGeom>
+          <a:noFill/>
+        </p:spPr>
+        <p:txBody>
+          <a:bodyPr wrap="none" lIns="0" rIns="0">
             <a:noAutofit/>
           </a:bodyPr>
           <a:lstStyle/>
@@ -7721,7 +7251,7 @@
                 </a:solidFill>
                 <a:latin typeface="Arial"/>
               </a:rPr>
-              <a:t>The percentage of recurring revenue retained from existing customers over a period, including expansion and after churn.</a:t>
+              <a:t>Revenue kept from existing customers.</a:t>
             </a:r>
           </a:p>
         </p:txBody>
@@ -7739,7 +7269,7 @@
 </p:sldLayout>
 </file>
 
-<file path=ppt/slideLayouts/slideLayout24.xml><?xml version="1.0" encoding="utf-8"?>
+<file path=ppt/slideLayouts/slideLayout23.xml><?xml version="1.0" encoding="utf-8"?>
 <p:sldLayout xmlns:a="http://schemas.openxmlformats.org/drawingml/2006/main" xmlns:r="http://schemas.openxmlformats.org/officeDocument/2006/relationships" xmlns:p="http://schemas.openxmlformats.org/presentationml/2006/main" type="blank" preserve="1">
   <p:cSld name="slidekit · Question">
     <p:bg>
@@ -7802,8 +7332,8 @@
         </p:nvSpPr>
         <p:spPr>
           <a:xfrm>
-            <a:off x="457200" y="2011680"/>
-            <a:ext cx="128016" cy="2834640"/>
+            <a:off x="457200" y="2926080"/>
+            <a:ext cx="128016" cy="1005840"/>
           </a:xfrm>
           <a:prstGeom prst="rect">
             <a:avLst/>
@@ -7834,16 +7364,16 @@
         </p:nvSpPr>
         <p:spPr>
           <a:xfrm>
-            <a:off x="996696" y="2011680"/>
-            <a:ext cx="10738104" cy="2834640"/>
-          </a:xfrm>
-          <a:prstGeom prst="rect">
-            <a:avLst/>
-          </a:prstGeom>
-          <a:noFill/>
-        </p:spPr>
-        <p:txBody>
-          <a:bodyPr wrap="square" lIns="0" rIns="0">
+            <a:off x="996696" y="2926080"/>
+            <a:ext cx="11195304" cy="1005840"/>
+          </a:xfrm>
+          <a:prstGeom prst="rect">
+            <a:avLst/>
+          </a:prstGeom>
+          <a:noFill/>
+        </p:spPr>
+        <p:txBody>
+          <a:bodyPr wrap="none" lIns="0" rIns="0">
             <a:noAutofit/>
           </a:bodyPr>
           <a:lstStyle/>
@@ -7856,7 +7386,7 @@
                 </a:solidFill>
                 <a:latin typeface="Arial"/>
               </a:rPr>
-              <a:t>What would we build if we trusted our customers completely?</a:t>
+              <a:t>What if we trusted users?</a:t>
             </a:r>
           </a:p>
         </p:txBody>
@@ -7874,7 +7404,7 @@
 </p:sldLayout>
 </file>
 
-<file path=ppt/slideLayouts/slideLayout25.xml><?xml version="1.0" encoding="utf-8"?>
+<file path=ppt/slideLayouts/slideLayout24.xml><?xml version="1.0" encoding="utf-8"?>
 <p:sldLayout xmlns:a="http://schemas.openxmlformats.org/drawingml/2006/main" xmlns:r="http://schemas.openxmlformats.org/officeDocument/2006/relationships" xmlns:p="http://schemas.openxmlformats.org/presentationml/2006/main" type="blank" preserve="1">
   <p:cSld name="slidekit · Bullet List">
     <p:bg>
@@ -8088,7 +7618,7 @@
 </p:sldLayout>
 </file>
 
-<file path=ppt/slideLayouts/slideLayout26.xml><?xml version="1.0" encoding="utf-8"?>
+<file path=ppt/slideLayouts/slideLayout25.xml><?xml version="1.0" encoding="utf-8"?>
 <p:sldLayout xmlns:a="http://schemas.openxmlformats.org/drawingml/2006/main" xmlns:r="http://schemas.openxmlformats.org/officeDocument/2006/relationships" xmlns:p="http://schemas.openxmlformats.org/presentationml/2006/main" type="blank" preserve="1">
   <p:cSld name="slidekit · Code Block">
     <p:bg>
@@ -8158,7 +7688,7 @@
             <a:avLst/>
           </a:prstGeom>
           <a:solidFill>
-            <a:srgbClr val="FF5F56"/>
+            <a:srgbClr val="FFFFFF"/>
           </a:solidFill>
           <a:ln>
             <a:noFill/>
@@ -8190,7 +7720,7 @@
             <a:avLst/>
           </a:prstGeom>
           <a:solidFill>
-            <a:srgbClr val="FFBD2E"/>
+            <a:srgbClr val="FFFFFF"/>
           </a:solidFill>
           <a:ln>
             <a:noFill/>
@@ -8222,7 +7752,7 @@
             <a:avLst/>
           </a:prstGeom>
           <a:solidFill>
-            <a:srgbClr val="27C93F"/>
+            <a:srgbClr val="FFFFFF"/>
           </a:solidFill>
           <a:ln>
             <a:noFill/>
@@ -8265,7 +7795,7 @@
             <a:r>
               <a:rPr sz="4200" b="0" i="0">
                 <a:solidFill>
-                  <a:srgbClr val="D4D4D4"/>
+                  <a:srgbClr val="FFFFFF"/>
                 </a:solidFill>
                 <a:latin typeface="Arial"/>
               </a:rPr>
@@ -8302,7 +7832,7 @@
             <a:r>
               <a:rPr sz="3400" b="0" i="0">
                 <a:solidFill>
-                  <a:srgbClr val="6A9955"/>
+                  <a:srgbClr val="FFFFFF"/>
                 </a:solidFill>
                 <a:latin typeface="Arial"/>
               </a:rPr>
@@ -8359,7 +7889,7 @@
         <p:spPr>
           <a:xfrm>
             <a:off x="1057461" y="2356103"/>
-            <a:ext cx="302848" cy="518159"/>
+            <a:ext cx="2524382" cy="518159"/>
           </a:xfrm>
           <a:prstGeom prst="rect">
             <a:avLst/>
@@ -8376,11 +7906,11 @@
             <a:r>
               <a:rPr sz="3400" b="0" i="0">
                 <a:solidFill>
-                  <a:srgbClr val="D4D4D4"/>
-                </a:solidFill>
-                <a:latin typeface="Arial"/>
-              </a:rPr>
-              <a:t> </a:t>
+                  <a:srgbClr val="FFFFFF"/>
+                </a:solidFill>
+                <a:latin typeface="Arial"/>
+              </a:rPr>
+              <a:t> main():</a:t>
             </a:r>
           </a:p>
         </p:txBody>
@@ -8395,8 +7925,8 @@
         </p:nvSpPr>
         <p:spPr>
           <a:xfrm>
-            <a:off x="1177429" y="2356103"/>
-            <a:ext cx="1680348" cy="518159"/>
+            <a:off x="457200" y="2874262"/>
+            <a:ext cx="7046475" cy="518159"/>
           </a:xfrm>
           <a:prstGeom prst="rect">
             <a:avLst/>
@@ -8413,11 +7943,11 @@
             <a:r>
               <a:rPr sz="3400" b="0" i="0">
                 <a:solidFill>
-                  <a:srgbClr val="DCDCAA"/>
-                </a:solidFill>
-                <a:latin typeface="Arial"/>
-              </a:rPr>
-              <a:t>main</a:t>
+                  <a:srgbClr val="FFFFFF"/>
+                </a:solidFill>
+                <a:latin typeface="Arial"/>
+              </a:rPr>
+              <a:t>    print("Hello, world!")</a:t>
             </a:r>
           </a:p>
         </p:txBody>
@@ -8432,8 +7962,8 @@
         </p:nvSpPr>
         <p:spPr>
           <a:xfrm>
-            <a:off x="2113347" y="2356103"/>
-            <a:ext cx="834964" cy="518159"/>
+            <a:off x="457200" y="3910580"/>
+            <a:ext cx="2140486" cy="518159"/>
           </a:xfrm>
           <a:prstGeom prst="rect">
             <a:avLst/>
@@ -8450,11 +7980,11 @@
             <a:r>
               <a:rPr sz="3400" b="0" i="0">
                 <a:solidFill>
-                  <a:srgbClr val="D4D4D4"/>
-                </a:solidFill>
-                <a:latin typeface="Arial"/>
-              </a:rPr>
-              <a:t>():</a:t>
+                  <a:srgbClr val="FFFFFF"/>
+                </a:solidFill>
+                <a:latin typeface="Arial"/>
+              </a:rPr>
+              <a:t>main()</a:t>
             </a:r>
           </a:p>
         </p:txBody>
@@ -8465,265 +7995,6 @@
           <p:cNvSpPr/>
           <p:nvPr>
             <p:ph type="body" idx="13"/>
-          </p:nvPr>
-        </p:nvSpPr>
-        <p:spPr>
-          <a:xfrm>
-            <a:off x="457200" y="2874262"/>
-            <a:ext cx="662751" cy="518159"/>
-          </a:xfrm>
-          <a:prstGeom prst="rect">
-            <a:avLst/>
-          </a:prstGeom>
-          <a:noFill/>
-        </p:spPr>
-        <p:txBody>
-          <a:bodyPr wrap="none" lIns="0" rIns="0">
-            <a:noAutofit/>
-          </a:bodyPr>
-          <a:lstStyle/>
-          <a:p>
-            <a:pPr algn="l"/>
-            <a:r>
-              <a:rPr sz="3400" b="0" i="0">
-                <a:solidFill>
-                  <a:srgbClr val="D4D4D4"/>
-                </a:solidFill>
-                <a:latin typeface="Arial"/>
-              </a:rPr>
-              <a:t>    </a:t>
-            </a:r>
-          </a:p>
-        </p:txBody>
-      </p:sp>
-      <p:sp>
-        <p:nvSpPr>
-          <p:cNvPr id="15" name="TextBox 14"/>
-          <p:cNvSpPr/>
-          <p:nvPr>
-            <p:ph type="body" idx="14"/>
-          </p:nvPr>
-        </p:nvSpPr>
-        <p:spPr>
-          <a:xfrm>
-            <a:off x="937071" y="2874262"/>
-            <a:ext cx="1526857" cy="518159"/>
-          </a:xfrm>
-          <a:prstGeom prst="rect">
-            <a:avLst/>
-          </a:prstGeom>
-          <a:noFill/>
-        </p:spPr>
-        <p:txBody>
-          <a:bodyPr wrap="none" lIns="0" rIns="0">
-            <a:noAutofit/>
-          </a:bodyPr>
-          <a:lstStyle/>
-          <a:p>
-            <a:pPr algn="l"/>
-            <a:r>
-              <a:rPr sz="3400" b="0" i="0">
-                <a:solidFill>
-                  <a:srgbClr val="DCDCAA"/>
-                </a:solidFill>
-                <a:latin typeface="Arial"/>
-              </a:rPr>
-              <a:t>print</a:t>
-            </a:r>
-          </a:p>
-        </p:txBody>
-      </p:sp>
-      <p:sp>
-        <p:nvSpPr>
-          <p:cNvPr id="16" name="TextBox 15"/>
-          <p:cNvSpPr/>
-          <p:nvPr>
-            <p:ph type="body" idx="15"/>
-          </p:nvPr>
-        </p:nvSpPr>
-        <p:spPr>
-          <a:xfrm>
-            <a:off x="1777057" y="2874262"/>
-            <a:ext cx="412948" cy="518159"/>
-          </a:xfrm>
-          <a:prstGeom prst="rect">
-            <a:avLst/>
-          </a:prstGeom>
-          <a:noFill/>
-        </p:spPr>
-        <p:txBody>
-          <a:bodyPr wrap="none" lIns="0" rIns="0">
-            <a:noAutofit/>
-          </a:bodyPr>
-          <a:lstStyle/>
-          <a:p>
-            <a:pPr algn="l"/>
-            <a:r>
-              <a:rPr sz="3400" b="0" i="0">
-                <a:solidFill>
-                  <a:srgbClr val="D4D4D4"/>
-                </a:solidFill>
-                <a:latin typeface="Arial"/>
-              </a:rPr>
-              <a:t>(</a:t>
-            </a:r>
-          </a:p>
-        </p:txBody>
-      </p:sp>
-      <p:sp>
-        <p:nvSpPr>
-          <p:cNvPr id="17" name="TextBox 16"/>
-          <p:cNvSpPr/>
-          <p:nvPr>
-            <p:ph type="body" idx="16"/>
-          </p:nvPr>
-        </p:nvSpPr>
-        <p:spPr>
-          <a:xfrm>
-            <a:off x="1920850" y="2874262"/>
-            <a:ext cx="4474566" cy="518159"/>
-          </a:xfrm>
-          <a:prstGeom prst="rect">
-            <a:avLst/>
-          </a:prstGeom>
-          <a:noFill/>
-        </p:spPr>
-        <p:txBody>
-          <a:bodyPr wrap="none" lIns="0" rIns="0">
-            <a:noAutofit/>
-          </a:bodyPr>
-          <a:lstStyle/>
-          <a:p>
-            <a:pPr algn="l"/>
-            <a:r>
-              <a:rPr sz="3400" b="0" i="0">
-                <a:solidFill>
-                  <a:srgbClr val="CE9178"/>
-                </a:solidFill>
-                <a:latin typeface="Arial"/>
-              </a:rPr>
-              <a:t>"Hello, world!"</a:t>
-            </a:r>
-          </a:p>
-        </p:txBody>
-      </p:sp>
-      <p:sp>
-        <p:nvSpPr>
-          <p:cNvPr id="18" name="TextBox 17"/>
-          <p:cNvSpPr/>
-          <p:nvPr>
-            <p:ph type="body" idx="17"/>
-          </p:nvPr>
-        </p:nvSpPr>
-        <p:spPr>
-          <a:xfrm>
-            <a:off x="4603155" y="2874262"/>
-            <a:ext cx="412948" cy="518159"/>
-          </a:xfrm>
-          <a:prstGeom prst="rect">
-            <a:avLst/>
-          </a:prstGeom>
-          <a:noFill/>
-        </p:spPr>
-        <p:txBody>
-          <a:bodyPr wrap="none" lIns="0" rIns="0">
-            <a:noAutofit/>
-          </a:bodyPr>
-          <a:lstStyle/>
-          <a:p>
-            <a:pPr algn="l"/>
-            <a:r>
-              <a:rPr sz="3400" b="0" i="0">
-                <a:solidFill>
-                  <a:srgbClr val="D4D4D4"/>
-                </a:solidFill>
-                <a:latin typeface="Arial"/>
-              </a:rPr>
-              <a:t>)</a:t>
-            </a:r>
-          </a:p>
-        </p:txBody>
-      </p:sp>
-      <p:sp>
-        <p:nvSpPr>
-          <p:cNvPr id="19" name="TextBox 18"/>
-          <p:cNvSpPr/>
-          <p:nvPr>
-            <p:ph type="body" idx="18"/>
-          </p:nvPr>
-        </p:nvSpPr>
-        <p:spPr>
-          <a:xfrm>
-            <a:off x="457200" y="3910580"/>
-            <a:ext cx="1680348" cy="518159"/>
-          </a:xfrm>
-          <a:prstGeom prst="rect">
-            <a:avLst/>
-          </a:prstGeom>
-          <a:noFill/>
-        </p:spPr>
-        <p:txBody>
-          <a:bodyPr wrap="none" lIns="0" rIns="0">
-            <a:noAutofit/>
-          </a:bodyPr>
-          <a:lstStyle/>
-          <a:p>
-            <a:pPr algn="l"/>
-            <a:r>
-              <a:rPr sz="3400" b="0" i="0">
-                <a:solidFill>
-                  <a:srgbClr val="DCDCAA"/>
-                </a:solidFill>
-                <a:latin typeface="Arial"/>
-              </a:rPr>
-              <a:t>main</a:t>
-            </a:r>
-          </a:p>
-        </p:txBody>
-      </p:sp>
-      <p:sp>
-        <p:nvSpPr>
-          <p:cNvPr id="20" name="TextBox 19"/>
-          <p:cNvSpPr/>
-          <p:nvPr>
-            <p:ph type="body" idx="19"/>
-          </p:nvPr>
-        </p:nvSpPr>
-        <p:spPr>
-          <a:xfrm>
-            <a:off x="1393118" y="3910580"/>
-            <a:ext cx="643017" cy="518159"/>
-          </a:xfrm>
-          <a:prstGeom prst="rect">
-            <a:avLst/>
-          </a:prstGeom>
-          <a:noFill/>
-        </p:spPr>
-        <p:txBody>
-          <a:bodyPr wrap="none" lIns="0" rIns="0">
-            <a:noAutofit/>
-          </a:bodyPr>
-          <a:lstStyle/>
-          <a:p>
-            <a:pPr algn="l"/>
-            <a:r>
-              <a:rPr sz="3400" b="0" i="0">
-                <a:solidFill>
-                  <a:srgbClr val="D4D4D4"/>
-                </a:solidFill>
-                <a:latin typeface="Arial"/>
-              </a:rPr>
-              <a:t>()</a:t>
-            </a:r>
-          </a:p>
-        </p:txBody>
-      </p:sp>
-      <p:sp>
-        <p:nvSpPr>
-          <p:cNvPr id="21" name="TextBox 20"/>
-          <p:cNvSpPr/>
-          <p:nvPr>
-            <p:ph type="body" idx="20"/>
           </p:nvPr>
         </p:nvSpPr>
         <p:spPr>
@@ -8746,7 +8017,7 @@
             <a:r>
               <a:rPr sz="3400" b="0" i="0">
                 <a:solidFill>
-                  <a:srgbClr val="4EC9B0"/>
+                  <a:srgbClr val="569CD6"/>
                 </a:solidFill>
                 <a:latin typeface="Arial"/>
               </a:rPr>
@@ -8757,10 +8028,10 @@
       </p:sp>
       <p:sp>
         <p:nvSpPr>
-          <p:cNvPr id="22" name="TextBox 21"/>
-          <p:cNvSpPr/>
-          <p:nvPr>
-            <p:ph type="body" idx="21"/>
+          <p:cNvPr id="15" name="TextBox 14"/>
+          <p:cNvSpPr/>
+          <p:nvPr>
+            <p:ph type="body" idx="14"/>
           </p:nvPr>
         </p:nvSpPr>
         <p:spPr>
@@ -8783,7 +8054,7 @@
             <a:r>
               <a:rPr sz="3400" b="0" i="0">
                 <a:solidFill>
-                  <a:srgbClr val="D4D4D4"/>
+                  <a:srgbClr val="FFFFFF"/>
                 </a:solidFill>
                 <a:latin typeface="Arial"/>
               </a:rPr>
@@ -8794,10 +8065,10 @@
       </p:sp>
       <p:sp>
         <p:nvSpPr>
-          <p:cNvPr id="23" name="TextBox 22"/>
-          <p:cNvSpPr/>
-          <p:nvPr>
-            <p:ph type="body" idx="22"/>
+          <p:cNvPr id="16" name="TextBox 15"/>
+          <p:cNvSpPr/>
+          <p:nvPr>
+            <p:ph type="body" idx="15"/>
           </p:nvPr>
         </p:nvSpPr>
         <p:spPr>
@@ -8820,7 +8091,7 @@
             <a:r>
               <a:rPr sz="3400" b="0" i="0">
                 <a:solidFill>
-                  <a:srgbClr val="D4D4D4"/>
+                  <a:srgbClr val="FFFFFF"/>
                 </a:solidFill>
                 <a:latin typeface="Arial"/>
               </a:rPr>
@@ -8842,7 +8113,7 @@
 </p:sldLayout>
 </file>
 
-<file path=ppt/slideLayouts/slideLayout27.xml><?xml version="1.0" encoding="utf-8"?>
+<file path=ppt/slideLayouts/slideLayout26.xml><?xml version="1.0" encoding="utf-8"?>
 <p:sldLayout xmlns:a="http://schemas.openxmlformats.org/drawingml/2006/main" xmlns:r="http://schemas.openxmlformats.org/officeDocument/2006/relationships" xmlns:p="http://schemas.openxmlformats.org/presentationml/2006/main" type="blank" preserve="1">
   <p:cSld name="slidekit · File Tree">
     <p:bg>
@@ -8951,7 +8222,7 @@
             </a:avLst>
           </a:prstGeom>
           <a:solidFill>
-            <a:srgbClr val="0C1A1C"/>
+            <a:srgbClr val="0A2240"/>
           </a:solidFill>
           <a:ln>
             <a:noFill/>
@@ -8994,7 +8265,7 @@
             <a:r>
               <a:rPr sz="2600" b="1" i="0">
                 <a:solidFill>
-                  <a:srgbClr val="569CD6"/>
+                  <a:srgbClr val="0072CE"/>
                 </a:solidFill>
                 <a:latin typeface="Courier New"/>
               </a:rPr>
@@ -9031,7 +8302,7 @@
             <a:r>
               <a:rPr sz="2600" b="0" i="0">
                 <a:solidFill>
-                  <a:srgbClr val="55707A"/>
+                  <a:srgbClr val="0072CE"/>
                 </a:solidFill>
                 <a:latin typeface="Courier New"/>
               </a:rPr>
@@ -9068,7 +8339,7 @@
             <a:r>
               <a:rPr sz="2600" b="1" i="0">
                 <a:solidFill>
-                  <a:srgbClr val="569CD6"/>
+                  <a:srgbClr val="0072CE"/>
                 </a:solidFill>
                 <a:latin typeface="Courier New"/>
               </a:rPr>
@@ -9105,7 +8376,7 @@
             <a:r>
               <a:rPr sz="2600" b="0" i="0">
                 <a:solidFill>
-                  <a:srgbClr val="55707A"/>
+                  <a:srgbClr val="0072CE"/>
                 </a:solidFill>
                 <a:latin typeface="Courier New"/>
               </a:rPr>
@@ -9142,7 +8413,7 @@
             <a:r>
               <a:rPr sz="2600" b="1" i="0">
                 <a:solidFill>
-                  <a:srgbClr val="569CD6"/>
+                  <a:srgbClr val="0072CE"/>
                 </a:solidFill>
                 <a:latin typeface="Courier New"/>
               </a:rPr>
@@ -9179,7 +8450,7 @@
             <a:r>
               <a:rPr sz="2600" b="0" i="0">
                 <a:solidFill>
-                  <a:srgbClr val="55707A"/>
+                  <a:srgbClr val="0072CE"/>
                 </a:solidFill>
                 <a:latin typeface="Courier New"/>
               </a:rPr>
@@ -9216,7 +8487,7 @@
             <a:r>
               <a:rPr sz="2600" b="0" i="0">
                 <a:solidFill>
-                  <a:srgbClr val="D4D4D4"/>
+                  <a:srgbClr val="FFFFFF"/>
                 </a:solidFill>
                 <a:latin typeface="Courier New"/>
               </a:rPr>
@@ -9253,7 +8524,7 @@
             <a:r>
               <a:rPr sz="2600" b="0" i="0">
                 <a:solidFill>
-                  <a:srgbClr val="55707A"/>
+                  <a:srgbClr val="0072CE"/>
                 </a:solidFill>
                 <a:latin typeface="Courier New"/>
               </a:rPr>
@@ -9290,7 +8561,7 @@
             <a:r>
               <a:rPr sz="2600" b="0" i="0">
                 <a:solidFill>
-                  <a:srgbClr val="D4D4D4"/>
+                  <a:srgbClr val="FFFFFF"/>
                 </a:solidFill>
                 <a:latin typeface="Courier New"/>
               </a:rPr>
@@ -9327,7 +8598,7 @@
             <a:r>
               <a:rPr sz="2600" b="0" i="0">
                 <a:solidFill>
-                  <a:srgbClr val="55707A"/>
+                  <a:srgbClr val="0072CE"/>
                 </a:solidFill>
                 <a:latin typeface="Courier New"/>
               </a:rPr>
@@ -9364,7 +8635,7 @@
             <a:r>
               <a:rPr sz="2600" b="0" i="0">
                 <a:solidFill>
-                  <a:srgbClr val="D4D4D4"/>
+                  <a:srgbClr val="FFFFFF"/>
                 </a:solidFill>
                 <a:latin typeface="Courier New"/>
               </a:rPr>
@@ -9401,7 +8672,7 @@
             <a:r>
               <a:rPr sz="2600" b="0" i="0">
                 <a:solidFill>
-                  <a:srgbClr val="55707A"/>
+                  <a:srgbClr val="0072CE"/>
                 </a:solidFill>
                 <a:latin typeface="Courier New"/>
               </a:rPr>
@@ -9438,7 +8709,7 @@
             <a:r>
               <a:rPr sz="2600" b="0" i="0">
                 <a:solidFill>
-                  <a:srgbClr val="D4D4D4"/>
+                  <a:srgbClr val="FFFFFF"/>
                 </a:solidFill>
                 <a:latin typeface="Courier New"/>
               </a:rPr>
@@ -9475,7 +8746,7 @@
             <a:r>
               <a:rPr sz="2600" b="0" i="0">
                 <a:solidFill>
-                  <a:srgbClr val="55707A"/>
+                  <a:srgbClr val="0072CE"/>
                 </a:solidFill>
                 <a:latin typeface="Courier New"/>
               </a:rPr>
@@ -9512,7 +8783,7 @@
             <a:r>
               <a:rPr sz="2600" b="0" i="0">
                 <a:solidFill>
-                  <a:srgbClr val="D4D4D4"/>
+                  <a:srgbClr val="FFFFFF"/>
                 </a:solidFill>
                 <a:latin typeface="Courier New"/>
               </a:rPr>
@@ -9534,7 +8805,7 @@
 </p:sldLayout>
 </file>
 
-<file path=ppt/slideLayouts/slideLayout28.xml><?xml version="1.0" encoding="utf-8"?>
+<file path=ppt/slideLayouts/slideLayout27.xml><?xml version="1.0" encoding="utf-8"?>
 <p:sldLayout xmlns:a="http://schemas.openxmlformats.org/drawingml/2006/main" xmlns:r="http://schemas.openxmlformats.org/officeDocument/2006/relationships" xmlns:p="http://schemas.openxmlformats.org/presentationml/2006/main" type="blank" preserve="1">
   <p:cSld name="slidekit · Numbered Steps">
     <p:bg>
@@ -9652,7 +8923,7 @@
             <a:r>
               <a:rPr sz="4200" b="1" i="0">
                 <a:solidFill>
-                  <a:srgbClr val="123A6B"/>
+                  <a:srgbClr val="0072CE"/>
                 </a:solidFill>
                 <a:latin typeface="Arial"/>
               </a:rPr>
@@ -9689,7 +8960,7 @@
             <a:r>
               <a:rPr sz="4200" b="1" i="0">
                 <a:solidFill>
-                  <a:srgbClr val="123A6B"/>
+                  <a:srgbClr val="0072CE"/>
                 </a:solidFill>
                 <a:latin typeface="Arial"/>
               </a:rPr>
@@ -9763,7 +9034,7 @@
             <a:r>
               <a:rPr sz="4200" b="1" i="0">
                 <a:solidFill>
-                  <a:srgbClr val="123A6B"/>
+                  <a:srgbClr val="0072CE"/>
                 </a:solidFill>
                 <a:latin typeface="Arial"/>
               </a:rPr>
@@ -9800,7 +9071,7 @@
             <a:r>
               <a:rPr sz="4200" b="1" i="0">
                 <a:solidFill>
-                  <a:srgbClr val="123A6B"/>
+                  <a:srgbClr val="0072CE"/>
                 </a:solidFill>
                 <a:latin typeface="Arial"/>
               </a:rPr>
@@ -9874,7 +9145,7 @@
             <a:r>
               <a:rPr sz="4200" b="1" i="0">
                 <a:solidFill>
-                  <a:srgbClr val="123A6B"/>
+                  <a:srgbClr val="0072CE"/>
                 </a:solidFill>
                 <a:latin typeface="Arial"/>
               </a:rPr>
@@ -9911,7 +9182,7 @@
             <a:r>
               <a:rPr sz="4200" b="1" i="0">
                 <a:solidFill>
-                  <a:srgbClr val="123A6B"/>
+                  <a:srgbClr val="0072CE"/>
                 </a:solidFill>
                 <a:latin typeface="Arial"/>
               </a:rPr>
@@ -9970,7 +9241,7 @@
 </p:sldLayout>
 </file>
 
-<file path=ppt/slideLayouts/slideLayout29.xml><?xml version="1.0" encoding="utf-8"?>
+<file path=ppt/slideLayouts/slideLayout28.xml><?xml version="1.0" encoding="utf-8"?>
 <p:sldLayout xmlns:a="http://schemas.openxmlformats.org/drawingml/2006/main" xmlns:r="http://schemas.openxmlformats.org/officeDocument/2006/relationships" xmlns:p="http://schemas.openxmlformats.org/presentationml/2006/main" type="blank" preserve="1">
   <p:cSld name="slidekit · Two Panel List">
     <p:bg>
@@ -10088,7 +9359,7 @@
             <a:r>
               <a:rPr sz="3400" b="1" i="0">
                 <a:solidFill>
-                  <a:srgbClr val="123A6B"/>
+                  <a:srgbClr val="0072CE"/>
                 </a:solidFill>
                 <a:latin typeface="Arial"/>
               </a:rPr>
@@ -10107,14 +9378,14 @@
         </p:nvSpPr>
         <p:spPr>
           <a:xfrm>
-            <a:off x="548640" y="2176271"/>
-            <a:ext cx="1650492" cy="54864"/>
+            <a:off x="457200" y="2176271"/>
+            <a:ext cx="1367718" cy="54864"/>
           </a:xfrm>
           <a:prstGeom prst="rect">
             <a:avLst/>
           </a:prstGeom>
           <a:solidFill>
-            <a:srgbClr val="123A6B"/>
+            <a:srgbClr val="0072CE"/>
           </a:solidFill>
           <a:ln>
             <a:noFill/>
@@ -10157,7 +9428,7 @@
             <a:r>
               <a:rPr sz="3400" b="1" i="0">
                 <a:solidFill>
-                  <a:srgbClr val="5B6B82"/>
+                  <a:srgbClr val="0A2240"/>
                 </a:solidFill>
                 <a:latin typeface="Arial"/>
               </a:rPr>
@@ -10176,14 +9447,14 @@
         </p:nvSpPr>
         <p:spPr>
           <a:xfrm>
-            <a:off x="6324600" y="2176271"/>
-            <a:ext cx="1650492" cy="54864"/>
+            <a:off x="6233160" y="2176271"/>
+            <a:ext cx="1007604" cy="54864"/>
           </a:xfrm>
           <a:prstGeom prst="rect">
             <a:avLst/>
           </a:prstGeom>
           <a:solidFill>
-            <a:srgbClr val="5B6B82"/>
+            <a:srgbClr val="0A2240"/>
           </a:solidFill>
           <a:ln>
             <a:noFill/>
@@ -10416,6 +9687,294 @@
                 <a:latin typeface="Arial"/>
               </a:rPr>
               <a:t>In-product live chat</a:t>
+            </a:r>
+          </a:p>
+        </p:txBody>
+      </p:sp>
+    </p:spTree>
+    <p:extLst>
+      <p:ext uri="{BB962C8B-B14F-4D97-AF65-F5344CB8AC3E}">
+        <p14:creationId xmlns:p14="http://schemas.microsoft.com/office/powerpoint/2010/main" val="1212999818"/>
+      </p:ext>
+    </p:extLst>
+  </p:cSld>
+  <p:clrMapOvr>
+    <a:masterClrMapping/>
+  </p:clrMapOvr>
+</p:sldLayout>
+</file>
+
+<file path=ppt/slideLayouts/slideLayout29.xml><?xml version="1.0" encoding="utf-8"?>
+<p:sldLayout xmlns:a="http://schemas.openxmlformats.org/drawingml/2006/main" xmlns:r="http://schemas.openxmlformats.org/officeDocument/2006/relationships" xmlns:p="http://schemas.openxmlformats.org/presentationml/2006/main" type="blank" preserve="1">
+  <p:cSld name="slidekit · This vs That">
+    <p:bg>
+      <p:bgPr>
+        <a:solidFill>
+          <a:srgbClr val="FFFFFF"/>
+        </a:solidFill>
+        <a:effectLst/>
+      </p:bgPr>
+    </p:bg>
+    <p:spTree>
+      <p:nvGrpSpPr>
+        <p:cNvPr id="1" name=""/>
+        <p:cNvGrpSpPr/>
+        <p:nvPr/>
+      </p:nvGrpSpPr>
+      <p:grpSpPr>
+        <a:xfrm>
+          <a:off x="0" y="0"/>
+          <a:ext cx="0" cy="0"/>
+          <a:chOff x="0" y="0"/>
+          <a:chExt cx="0" cy="0"/>
+        </a:xfrm>
+      </p:grpSpPr>
+      <p:sp>
+        <p:nvSpPr>
+          <p:cNvPr id="4" name="Slide Number Placeholder 3"/>
+          <p:cNvSpPr>
+            <a:spLocks noGrp="1"/>
+          </p:cNvSpPr>
+          <p:nvPr>
+            <p:ph type="sldNum" sz="quarter" idx="12"/>
+          </p:nvPr>
+        </p:nvSpPr>
+        <p:spPr>
+          <a:xfrm>
+            <a:off x="11186160" y="6035040"/>
+            <a:ext cx="548640" cy="365760"/>
+          </a:xfrm>
+        </p:spPr>
+        <p:txBody>
+          <a:bodyPr/>
+          <a:lstStyle/>
+          <a:p>
+            <a:fld id="{C1FF6DA9-008F-8B48-92A6-B652298478BF}" type="slidenum">
+              <a:rPr lang="en-US" smtClean="0"/>
+              <a:t>‹#›</a:t>
+            </a:fld>
+            <a:endParaRPr lang="en-US"/>
+          </a:p>
+        </p:txBody>
+      </p:sp>
+      <p:sp>
+        <p:nvSpPr>
+          <p:cNvPr id="5" name="TextBox 4"/>
+          <p:cNvSpPr/>
+          <p:nvPr>
+            <p:ph type="title"/>
+          </p:nvPr>
+        </p:nvSpPr>
+        <p:spPr>
+          <a:xfrm>
+            <a:off x="457200" y="457200"/>
+            <a:ext cx="11277600" cy="768096"/>
+          </a:xfrm>
+          <a:prstGeom prst="rect">
+            <a:avLst/>
+          </a:prstGeom>
+          <a:noFill/>
+        </p:spPr>
+        <p:txBody>
+          <a:bodyPr wrap="none" lIns="0" rIns="0">
+            <a:noAutofit/>
+          </a:bodyPr>
+          <a:lstStyle/>
+          <a:p>
+            <a:pPr algn="l"/>
+            <a:r>
+              <a:rPr sz="4200" b="1" i="0">
+                <a:solidFill>
+                  <a:srgbClr val="0072CE"/>
+                </a:solidFill>
+                <a:latin typeface="Arial"/>
+              </a:rPr>
+              <a:t>Cloud or On-Prem</a:t>
+            </a:r>
+          </a:p>
+        </p:txBody>
+      </p:sp>
+      <p:sp>
+        <p:nvSpPr>
+          <p:cNvPr id="6" name="TextBox 5"/>
+          <p:cNvSpPr/>
+          <p:nvPr>
+            <p:ph type="body" idx="1"/>
+          </p:nvPr>
+        </p:nvSpPr>
+        <p:spPr>
+          <a:xfrm>
+            <a:off x="457200" y="2776728"/>
+            <a:ext cx="4792980" cy="914400"/>
+          </a:xfrm>
+          <a:prstGeom prst="rect">
+            <a:avLst/>
+          </a:prstGeom>
+          <a:noFill/>
+        </p:spPr>
+        <p:txBody>
+          <a:bodyPr wrap="none" lIns="0" rIns="0">
+            <a:noAutofit/>
+          </a:bodyPr>
+          <a:lstStyle/>
+          <a:p>
+            <a:pPr algn="ctr"/>
+            <a:r>
+              <a:rPr sz="6000" b="1" i="0">
+                <a:solidFill>
+                  <a:srgbClr val="0A2240"/>
+                </a:solidFill>
+                <a:latin typeface="Arial"/>
+              </a:rPr>
+              <a:t>3 wks</a:t>
+            </a:r>
+          </a:p>
+        </p:txBody>
+      </p:sp>
+      <p:sp>
+        <p:nvSpPr>
+          <p:cNvPr id="7" name="TextBox 6"/>
+          <p:cNvSpPr/>
+          <p:nvPr>
+            <p:ph type="body" idx="2"/>
+          </p:nvPr>
+        </p:nvSpPr>
+        <p:spPr>
+          <a:xfrm>
+            <a:off x="0" y="3965448"/>
+            <a:ext cx="5707380" cy="518159"/>
+          </a:xfrm>
+          <a:prstGeom prst="rect">
+            <a:avLst/>
+          </a:prstGeom>
+          <a:noFill/>
+        </p:spPr>
+        <p:txBody>
+          <a:bodyPr wrap="none" lIns="0" rIns="0">
+            <a:noAutofit/>
+          </a:bodyPr>
+          <a:lstStyle/>
+          <a:p>
+            <a:pPr algn="ctr"/>
+            <a:r>
+              <a:rPr sz="3400" b="0" i="0">
+                <a:solidFill>
+                  <a:srgbClr val="0A2240"/>
+                </a:solidFill>
+                <a:latin typeface="Arial"/>
+              </a:rPr>
+              <a:t>Cloud time-to-launch</a:t>
+            </a:r>
+          </a:p>
+        </p:txBody>
+      </p:sp>
+      <p:sp>
+        <p:nvSpPr>
+          <p:cNvPr id="8" name="TextBox 7"/>
+          <p:cNvSpPr/>
+          <p:nvPr>
+            <p:ph type="body" idx="3"/>
+          </p:nvPr>
+        </p:nvSpPr>
+        <p:spPr>
+          <a:xfrm>
+            <a:off x="6941820" y="2776728"/>
+            <a:ext cx="4792980" cy="914400"/>
+          </a:xfrm>
+          <a:prstGeom prst="rect">
+            <a:avLst/>
+          </a:prstGeom>
+          <a:noFill/>
+        </p:spPr>
+        <p:txBody>
+          <a:bodyPr wrap="none" lIns="0" rIns="0">
+            <a:noAutofit/>
+          </a:bodyPr>
+          <a:lstStyle/>
+          <a:p>
+            <a:pPr algn="ctr"/>
+            <a:r>
+              <a:rPr sz="6000" b="1" i="0">
+                <a:solidFill>
+                  <a:srgbClr val="0A2240"/>
+                </a:solidFill>
+                <a:latin typeface="Arial"/>
+              </a:rPr>
+              <a:t>6 mo</a:t>
+            </a:r>
+          </a:p>
+        </p:txBody>
+      </p:sp>
+      <p:sp>
+        <p:nvSpPr>
+          <p:cNvPr id="9" name="TextBox 8"/>
+          <p:cNvSpPr/>
+          <p:nvPr>
+            <p:ph type="body" idx="4"/>
+          </p:nvPr>
+        </p:nvSpPr>
+        <p:spPr>
+          <a:xfrm>
+            <a:off x="6484620" y="3965448"/>
+            <a:ext cx="5707380" cy="518159"/>
+          </a:xfrm>
+          <a:prstGeom prst="rect">
+            <a:avLst/>
+          </a:prstGeom>
+          <a:noFill/>
+        </p:spPr>
+        <p:txBody>
+          <a:bodyPr wrap="none" lIns="0" rIns="0">
+            <a:noAutofit/>
+          </a:bodyPr>
+          <a:lstStyle/>
+          <a:p>
+            <a:pPr algn="ctr"/>
+            <a:r>
+              <a:rPr sz="3400" b="0" i="0">
+                <a:solidFill>
+                  <a:srgbClr val="0A2240"/>
+                </a:solidFill>
+                <a:latin typeface="Arial"/>
+              </a:rPr>
+              <a:t>On-prem time-to-launch</a:t>
+            </a:r>
+          </a:p>
+        </p:txBody>
+      </p:sp>
+      <p:sp>
+        <p:nvSpPr>
+          <p:cNvPr id="10" name="TextBox 9"/>
+          <p:cNvSpPr/>
+          <p:nvPr>
+            <p:ph type="body" idx="5"/>
+          </p:nvPr>
+        </p:nvSpPr>
+        <p:spPr>
+          <a:xfrm>
+            <a:off x="5435323" y="3310127"/>
+            <a:ext cx="1321354" cy="640080"/>
+          </a:xfrm>
+          <a:prstGeom prst="rect">
+            <a:avLst/>
+          </a:prstGeom>
+          <a:noFill/>
+        </p:spPr>
+        <p:txBody>
+          <a:bodyPr wrap="none" lIns="0" rIns="0">
+            <a:noAutofit/>
+          </a:bodyPr>
+          <a:lstStyle/>
+          <a:p>
+            <a:pPr algn="ctr"/>
+            <a:r>
+              <a:rPr sz="4200" b="1" i="0">
+                <a:solidFill>
+                  <a:srgbClr val="0A2240"/>
+                </a:solidFill>
+                <a:latin typeface="Arial"/>
+              </a:rPr>
+              <a:t>VS</a:t>
             </a:r>
           </a:p>
         </p:txBody>
@@ -10681,294 +10240,6 @@
 
 <file path=ppt/slideLayouts/slideLayout30.xml><?xml version="1.0" encoding="utf-8"?>
 <p:sldLayout xmlns:a="http://schemas.openxmlformats.org/drawingml/2006/main" xmlns:r="http://schemas.openxmlformats.org/officeDocument/2006/relationships" xmlns:p="http://schemas.openxmlformats.org/presentationml/2006/main" type="blank" preserve="1">
-  <p:cSld name="slidekit · This vs That">
-    <p:bg>
-      <p:bgPr>
-        <a:solidFill>
-          <a:srgbClr val="FFFFFF"/>
-        </a:solidFill>
-        <a:effectLst/>
-      </p:bgPr>
-    </p:bg>
-    <p:spTree>
-      <p:nvGrpSpPr>
-        <p:cNvPr id="1" name=""/>
-        <p:cNvGrpSpPr/>
-        <p:nvPr/>
-      </p:nvGrpSpPr>
-      <p:grpSpPr>
-        <a:xfrm>
-          <a:off x="0" y="0"/>
-          <a:ext cx="0" cy="0"/>
-          <a:chOff x="0" y="0"/>
-          <a:chExt cx="0" cy="0"/>
-        </a:xfrm>
-      </p:grpSpPr>
-      <p:sp>
-        <p:nvSpPr>
-          <p:cNvPr id="4" name="Slide Number Placeholder 3"/>
-          <p:cNvSpPr>
-            <a:spLocks noGrp="1"/>
-          </p:cNvSpPr>
-          <p:nvPr>
-            <p:ph type="sldNum" sz="quarter" idx="12"/>
-          </p:nvPr>
-        </p:nvSpPr>
-        <p:spPr>
-          <a:xfrm>
-            <a:off x="11186160" y="6035040"/>
-            <a:ext cx="548640" cy="365760"/>
-          </a:xfrm>
-        </p:spPr>
-        <p:txBody>
-          <a:bodyPr/>
-          <a:lstStyle/>
-          <a:p>
-            <a:fld id="{C1FF6DA9-008F-8B48-92A6-B652298478BF}" type="slidenum">
-              <a:rPr lang="en-US" smtClean="0"/>
-              <a:t>‹#›</a:t>
-            </a:fld>
-            <a:endParaRPr lang="en-US"/>
-          </a:p>
-        </p:txBody>
-      </p:sp>
-      <p:sp>
-        <p:nvSpPr>
-          <p:cNvPr id="5" name="TextBox 4"/>
-          <p:cNvSpPr/>
-          <p:nvPr>
-            <p:ph type="title"/>
-          </p:nvPr>
-        </p:nvSpPr>
-        <p:spPr>
-          <a:xfrm>
-            <a:off x="457200" y="457200"/>
-            <a:ext cx="11277600" cy="768096"/>
-          </a:xfrm>
-          <a:prstGeom prst="rect">
-            <a:avLst/>
-          </a:prstGeom>
-          <a:noFill/>
-        </p:spPr>
-        <p:txBody>
-          <a:bodyPr wrap="none" lIns="0" rIns="0">
-            <a:noAutofit/>
-          </a:bodyPr>
-          <a:lstStyle/>
-          <a:p>
-            <a:pPr algn="l"/>
-            <a:r>
-              <a:rPr sz="4200" b="1" i="0">
-                <a:solidFill>
-                  <a:srgbClr val="0072CE"/>
-                </a:solidFill>
-                <a:latin typeface="Arial"/>
-              </a:rPr>
-              <a:t>Cloud or On-Prem</a:t>
-            </a:r>
-          </a:p>
-        </p:txBody>
-      </p:sp>
-      <p:sp>
-        <p:nvSpPr>
-          <p:cNvPr id="6" name="TextBox 5"/>
-          <p:cNvSpPr/>
-          <p:nvPr>
-            <p:ph type="body" idx="1"/>
-          </p:nvPr>
-        </p:nvSpPr>
-        <p:spPr>
-          <a:xfrm>
-            <a:off x="457200" y="2776728"/>
-            <a:ext cx="4792980" cy="914400"/>
-          </a:xfrm>
-          <a:prstGeom prst="rect">
-            <a:avLst/>
-          </a:prstGeom>
-          <a:noFill/>
-        </p:spPr>
-        <p:txBody>
-          <a:bodyPr wrap="none" lIns="0" rIns="0">
-            <a:noAutofit/>
-          </a:bodyPr>
-          <a:lstStyle/>
-          <a:p>
-            <a:pPr algn="ctr"/>
-            <a:r>
-              <a:rPr sz="6000" b="1" i="0">
-                <a:solidFill>
-                  <a:srgbClr val="0A2240"/>
-                </a:solidFill>
-                <a:latin typeface="Arial"/>
-              </a:rPr>
-              <a:t>3 wks</a:t>
-            </a:r>
-          </a:p>
-        </p:txBody>
-      </p:sp>
-      <p:sp>
-        <p:nvSpPr>
-          <p:cNvPr id="7" name="TextBox 6"/>
-          <p:cNvSpPr/>
-          <p:nvPr>
-            <p:ph type="body" idx="2"/>
-          </p:nvPr>
-        </p:nvSpPr>
-        <p:spPr>
-          <a:xfrm>
-            <a:off x="0" y="3965448"/>
-            <a:ext cx="5707380" cy="518159"/>
-          </a:xfrm>
-          <a:prstGeom prst="rect">
-            <a:avLst/>
-          </a:prstGeom>
-          <a:noFill/>
-        </p:spPr>
-        <p:txBody>
-          <a:bodyPr wrap="none" lIns="0" rIns="0">
-            <a:noAutofit/>
-          </a:bodyPr>
-          <a:lstStyle/>
-          <a:p>
-            <a:pPr algn="ctr"/>
-            <a:r>
-              <a:rPr sz="3400" b="0" i="0">
-                <a:solidFill>
-                  <a:srgbClr val="0A2240"/>
-                </a:solidFill>
-                <a:latin typeface="Arial"/>
-              </a:rPr>
-              <a:t>Cloud time-to-launch</a:t>
-            </a:r>
-          </a:p>
-        </p:txBody>
-      </p:sp>
-      <p:sp>
-        <p:nvSpPr>
-          <p:cNvPr id="8" name="TextBox 7"/>
-          <p:cNvSpPr/>
-          <p:nvPr>
-            <p:ph type="body" idx="3"/>
-          </p:nvPr>
-        </p:nvSpPr>
-        <p:spPr>
-          <a:xfrm>
-            <a:off x="6941820" y="2776728"/>
-            <a:ext cx="4792980" cy="914400"/>
-          </a:xfrm>
-          <a:prstGeom prst="rect">
-            <a:avLst/>
-          </a:prstGeom>
-          <a:noFill/>
-        </p:spPr>
-        <p:txBody>
-          <a:bodyPr wrap="none" lIns="0" rIns="0">
-            <a:noAutofit/>
-          </a:bodyPr>
-          <a:lstStyle/>
-          <a:p>
-            <a:pPr algn="ctr"/>
-            <a:r>
-              <a:rPr sz="6000" b="1" i="0">
-                <a:solidFill>
-                  <a:srgbClr val="0A2240"/>
-                </a:solidFill>
-                <a:latin typeface="Arial"/>
-              </a:rPr>
-              <a:t>6 mo</a:t>
-            </a:r>
-          </a:p>
-        </p:txBody>
-      </p:sp>
-      <p:sp>
-        <p:nvSpPr>
-          <p:cNvPr id="9" name="TextBox 8"/>
-          <p:cNvSpPr/>
-          <p:nvPr>
-            <p:ph type="body" idx="4"/>
-          </p:nvPr>
-        </p:nvSpPr>
-        <p:spPr>
-          <a:xfrm>
-            <a:off x="6484620" y="3965448"/>
-            <a:ext cx="5707380" cy="518159"/>
-          </a:xfrm>
-          <a:prstGeom prst="rect">
-            <a:avLst/>
-          </a:prstGeom>
-          <a:noFill/>
-        </p:spPr>
-        <p:txBody>
-          <a:bodyPr wrap="none" lIns="0" rIns="0">
-            <a:noAutofit/>
-          </a:bodyPr>
-          <a:lstStyle/>
-          <a:p>
-            <a:pPr algn="ctr"/>
-            <a:r>
-              <a:rPr sz="3400" b="0" i="0">
-                <a:solidFill>
-                  <a:srgbClr val="0A2240"/>
-                </a:solidFill>
-                <a:latin typeface="Arial"/>
-              </a:rPr>
-              <a:t>On-prem time-to-launch</a:t>
-            </a:r>
-          </a:p>
-        </p:txBody>
-      </p:sp>
-      <p:sp>
-        <p:nvSpPr>
-          <p:cNvPr id="10" name="TextBox 9"/>
-          <p:cNvSpPr/>
-          <p:nvPr>
-            <p:ph type="body" idx="5"/>
-          </p:nvPr>
-        </p:nvSpPr>
-        <p:spPr>
-          <a:xfrm>
-            <a:off x="5435323" y="3310127"/>
-            <a:ext cx="1321354" cy="640080"/>
-          </a:xfrm>
-          <a:prstGeom prst="rect">
-            <a:avLst/>
-          </a:prstGeom>
-          <a:noFill/>
-        </p:spPr>
-        <p:txBody>
-          <a:bodyPr wrap="none" lIns="0" rIns="0">
-            <a:noAutofit/>
-          </a:bodyPr>
-          <a:lstStyle/>
-          <a:p>
-            <a:pPr algn="ctr"/>
-            <a:r>
-              <a:rPr sz="4200" b="1" i="0">
-                <a:solidFill>
-                  <a:srgbClr val="5B6B82"/>
-                </a:solidFill>
-                <a:latin typeface="Arial"/>
-              </a:rPr>
-              <a:t>VS</a:t>
-            </a:r>
-          </a:p>
-        </p:txBody>
-      </p:sp>
-    </p:spTree>
-    <p:extLst>
-      <p:ext uri="{BB962C8B-B14F-4D97-AF65-F5344CB8AC3E}">
-        <p14:creationId xmlns:p14="http://schemas.microsoft.com/office/powerpoint/2010/main" val="1212999818"/>
-      </p:ext>
-    </p:extLst>
-  </p:cSld>
-  <p:clrMapOvr>
-    <a:masterClrMapping/>
-  </p:clrMapOvr>
-</p:sldLayout>
-</file>
-
-<file path=ppt/slideLayouts/slideLayout31.xml><?xml version="1.0" encoding="utf-8"?>
-<p:sldLayout xmlns:a="http://schemas.openxmlformats.org/drawingml/2006/main" xmlns:r="http://schemas.openxmlformats.org/officeDocument/2006/relationships" xmlns:p="http://schemas.openxmlformats.org/presentationml/2006/main" type="blank" preserve="1">
   <p:cSld name="slidekit · KPI Grid">
     <p:bg>
       <p:bgPr>
@@ -11491,7 +10762,7 @@
         </p:nvSpPr>
         <p:spPr>
           <a:xfrm>
-            <a:off x="4307840" y="3797808"/>
+            <a:off x="4307840" y="4056888"/>
             <a:ext cx="3576320" cy="640080"/>
           </a:xfrm>
           <a:prstGeom prst="rect">
@@ -11528,7 +10799,7 @@
         </p:nvSpPr>
         <p:spPr>
           <a:xfrm>
-            <a:off x="5559552" y="4492752"/>
+            <a:off x="5559552" y="4751832"/>
             <a:ext cx="1072896" cy="54864"/>
           </a:xfrm>
           <a:prstGeom prst="rect">
@@ -11560,16 +10831,16 @@
         </p:nvSpPr>
         <p:spPr>
           <a:xfrm>
-            <a:off x="4307840" y="4602480"/>
-            <a:ext cx="3576320" cy="1127760"/>
-          </a:xfrm>
-          <a:prstGeom prst="rect">
-            <a:avLst/>
-          </a:prstGeom>
-          <a:noFill/>
-        </p:spPr>
-        <p:txBody>
-          <a:bodyPr wrap="square" lIns="0" rIns="0">
+            <a:off x="3943896" y="4861560"/>
+            <a:ext cx="4304208" cy="609600"/>
+          </a:xfrm>
+          <a:prstGeom prst="rect">
+            <a:avLst/>
+          </a:prstGeom>
+          <a:noFill/>
+        </p:spPr>
+        <p:txBody>
+          <a:bodyPr wrap="none" lIns="0" rIns="0">
             <a:noAutofit/>
           </a:bodyPr>
           <a:lstStyle/>
@@ -11582,7 +10853,7 @@
                 </a:solidFill>
                 <a:latin typeface="Arial"/>
               </a:rPr>
-              <a:t>Avg. time to value</a:t>
+              <a:t>Time to value</a:t>
             </a:r>
           </a:p>
         </p:txBody>
@@ -11706,7 +10977,7 @@
 </p:sldLayout>
 </file>
 
-<file path=ppt/slideLayouts/slideLayout32.xml><?xml version="1.0" encoding="utf-8"?>
+<file path=ppt/slideLayouts/slideLayout31.xml><?xml version="1.0" encoding="utf-8"?>
 <p:sldLayout xmlns:a="http://schemas.openxmlformats.org/drawingml/2006/main" xmlns:r="http://schemas.openxmlformats.org/officeDocument/2006/relationships" xmlns:p="http://schemas.openxmlformats.org/presentationml/2006/main" type="blank" preserve="1">
   <p:cSld name="slidekit · Chart With Insight">
     <p:bg>
@@ -11893,7 +11164,7 @@
             <a:r>
               <a:rPr sz="2500" b="0" i="0">
                 <a:solidFill>
-                  <a:srgbClr val="5B6B82"/>
+                  <a:srgbClr val="0A2240"/>
                 </a:solidFill>
                 <a:latin typeface="Arial"/>
               </a:rPr>
@@ -11999,7 +11270,7 @@
             <a:r>
               <a:rPr sz="2500" b="0" i="0">
                 <a:solidFill>
-                  <a:srgbClr val="5B6B82"/>
+                  <a:srgbClr val="0A2240"/>
                 </a:solidFill>
                 <a:latin typeface="Arial"/>
               </a:rPr>
@@ -12105,7 +11376,7 @@
             <a:r>
               <a:rPr sz="2500" b="0" i="0">
                 <a:solidFill>
-                  <a:srgbClr val="5B6B82"/>
+                  <a:srgbClr val="0A2240"/>
                 </a:solidFill>
                 <a:latin typeface="Arial"/>
               </a:rPr>
@@ -12211,7 +11482,7 @@
             <a:r>
               <a:rPr sz="2500" b="0" i="0">
                 <a:solidFill>
-                  <a:srgbClr val="5B6B82"/>
+                  <a:srgbClr val="0A2240"/>
                 </a:solidFill>
                 <a:latin typeface="Arial"/>
               </a:rPr>
@@ -12230,8 +11501,8 @@
         </p:nvSpPr>
         <p:spPr>
           <a:xfrm>
-            <a:off x="7498080" y="1770888"/>
-            <a:ext cx="128016" cy="3718560"/>
+            <a:off x="7498080" y="3325368"/>
+            <a:ext cx="128016" cy="609600"/>
           </a:xfrm>
           <a:prstGeom prst="rect">
             <a:avLst/>
@@ -12262,16 +11533,16 @@
         </p:nvSpPr>
         <p:spPr>
           <a:xfrm>
-            <a:off x="8037576" y="1770888"/>
-            <a:ext cx="3697224" cy="3718560"/>
-          </a:xfrm>
-          <a:prstGeom prst="rect">
-            <a:avLst/>
-          </a:prstGeom>
-          <a:noFill/>
-        </p:spPr>
-        <p:txBody>
-          <a:bodyPr wrap="square" lIns="0" rIns="0">
+            <a:off x="8037576" y="3325368"/>
+            <a:ext cx="4154424" cy="609600"/>
+          </a:xfrm>
+          <a:prstGeom prst="rect">
+            <a:avLst/>
+          </a:prstGeom>
+          <a:noFill/>
+        </p:spPr>
+        <p:txBody>
+          <a:bodyPr wrap="none" lIns="0" rIns="0">
             <a:noAutofit/>
           </a:bodyPr>
           <a:lstStyle/>
@@ -12284,7 +11555,7 @@
                 </a:solidFill>
                 <a:latin typeface="Arial"/>
               </a:rPr>
-              <a:t>Activations nearly quadrupled once self-serve onboarding shipped in February.</a:t>
+              <a:t>Activations 4x.</a:t>
             </a:r>
           </a:p>
         </p:txBody>
@@ -12302,7 +11573,7 @@
 </p:sldLayout>
 </file>
 
-<file path=ppt/slideLayouts/slideLayout33.xml><?xml version="1.0" encoding="utf-8"?>
+<file path=ppt/slideLayouts/slideLayout32.xml><?xml version="1.0" encoding="utf-8"?>
 <p:sldLayout xmlns:a="http://schemas.openxmlformats.org/drawingml/2006/main" xmlns:r="http://schemas.openxmlformats.org/officeDocument/2006/relationships" xmlns:p="http://schemas.openxmlformats.org/presentationml/2006/main" type="blank" preserve="1">
   <p:cSld name="slidekit · Table">
     <p:bg>
@@ -12420,7 +11691,7 @@
             <a:r>
               <a:rPr sz="3400" b="1" i="0">
                 <a:solidFill>
-                  <a:srgbClr val="123A6B"/>
+                  <a:srgbClr val="0072CE"/>
                 </a:solidFill>
                 <a:latin typeface="Arial"/>
               </a:rPr>
@@ -12457,7 +11728,7 @@
             <a:r>
               <a:rPr sz="3400" b="1" i="0">
                 <a:solidFill>
-                  <a:srgbClr val="123A6B"/>
+                  <a:srgbClr val="0072CE"/>
                 </a:solidFill>
                 <a:latin typeface="Arial"/>
               </a:rPr>
@@ -12494,7 +11765,7 @@
             <a:r>
               <a:rPr sz="3400" b="1" i="0">
                 <a:solidFill>
-                  <a:srgbClr val="123A6B"/>
+                  <a:srgbClr val="0072CE"/>
                 </a:solidFill>
                 <a:latin typeface="Arial"/>
               </a:rPr>
@@ -12992,7 +12263,7 @@
 </p:sldLayout>
 </file>
 
-<file path=ppt/slideLayouts/slideLayout34.xml><?xml version="1.0" encoding="utf-8"?>
+<file path=ppt/slideLayouts/slideLayout33.xml><?xml version="1.0" encoding="utf-8"?>
 <p:sldLayout xmlns:a="http://schemas.openxmlformats.org/drawingml/2006/main" xmlns:r="http://schemas.openxmlformats.org/officeDocument/2006/relationships" xmlns:p="http://schemas.openxmlformats.org/presentationml/2006/main" type="blank" preserve="1">
   <p:cSld name="slidekit · Metric Comparison">
     <p:bg>
@@ -13092,7 +12363,7 @@
         </p:nvSpPr>
         <p:spPr>
           <a:xfrm>
-            <a:off x="457200" y="2075688"/>
+            <a:off x="457200" y="2334768"/>
             <a:ext cx="3576320" cy="914400"/>
           </a:xfrm>
           <a:prstGeom prst="rect">
@@ -13129,16 +12400,16 @@
         </p:nvSpPr>
         <p:spPr>
           <a:xfrm>
-            <a:off x="457200" y="3264408"/>
-            <a:ext cx="3576320" cy="1127760"/>
-          </a:xfrm>
-          <a:prstGeom prst="rect">
-            <a:avLst/>
-          </a:prstGeom>
-          <a:noFill/>
-        </p:spPr>
-        <p:txBody>
-          <a:bodyPr wrap="square" lIns="0" rIns="0">
+            <a:off x="457200" y="3523488"/>
+            <a:ext cx="3576320" cy="609600"/>
+          </a:xfrm>
+          <a:prstGeom prst="rect">
+            <a:avLst/>
+          </a:prstGeom>
+          <a:noFill/>
+        </p:spPr>
+        <p:txBody>
+          <a:bodyPr wrap="none" lIns="0" rIns="0">
             <a:noAutofit/>
           </a:bodyPr>
           <a:lstStyle/>
@@ -13151,7 +12422,7 @@
                 </a:solidFill>
                 <a:latin typeface="Arial"/>
               </a:rPr>
-              <a:t>Annual recurring revenue</a:t>
+              <a:t>Revenue</a:t>
             </a:r>
           </a:p>
         </p:txBody>
@@ -13166,7 +12437,7 @@
         </p:nvSpPr>
         <p:spPr>
           <a:xfrm>
-            <a:off x="1522569" y="4666488"/>
+            <a:off x="1522569" y="4407408"/>
             <a:ext cx="1445581" cy="518159"/>
           </a:xfrm>
           <a:prstGeom prst="rect">
@@ -13198,7 +12469,7 @@
         </p:nvSpPr>
         <p:spPr>
           <a:xfrm>
-            <a:off x="1260802" y="4666488"/>
+            <a:off x="1260802" y="4407408"/>
             <a:ext cx="1969115" cy="518159"/>
           </a:xfrm>
           <a:prstGeom prst="rect">
@@ -13235,7 +12506,7 @@
         </p:nvSpPr>
         <p:spPr>
           <a:xfrm>
-            <a:off x="4307840" y="2075688"/>
+            <a:off x="4307840" y="2334768"/>
             <a:ext cx="3576320" cy="914400"/>
           </a:xfrm>
           <a:prstGeom prst="rect">
@@ -13272,8 +12543,8 @@
         </p:nvSpPr>
         <p:spPr>
           <a:xfrm>
-            <a:off x="3834934" y="3264408"/>
-            <a:ext cx="4522132" cy="1127760"/>
+            <a:off x="3834934" y="3523488"/>
+            <a:ext cx="4522132" cy="609600"/>
           </a:xfrm>
           <a:prstGeom prst="rect">
             <a:avLst/>
@@ -13309,7 +12580,7 @@
         </p:nvSpPr>
         <p:spPr>
           <a:xfrm>
-            <a:off x="5175547" y="4666488"/>
+            <a:off x="5175547" y="4407408"/>
             <a:ext cx="1840906" cy="518159"/>
           </a:xfrm>
           <a:prstGeom prst="rect">
@@ -13341,7 +12612,7 @@
         </p:nvSpPr>
         <p:spPr>
           <a:xfrm>
-            <a:off x="4795183" y="4666488"/>
+            <a:off x="4795183" y="4407408"/>
             <a:ext cx="2601634" cy="518159"/>
           </a:xfrm>
           <a:prstGeom prst="rect">
@@ -13378,7 +12649,7 @@
         </p:nvSpPr>
         <p:spPr>
           <a:xfrm>
-            <a:off x="8158480" y="2075688"/>
+            <a:off x="8158480" y="2334768"/>
             <a:ext cx="3576320" cy="914400"/>
           </a:xfrm>
           <a:prstGeom prst="rect">
@@ -13415,16 +12686,16 @@
         </p:nvSpPr>
         <p:spPr>
           <a:xfrm>
-            <a:off x="8158480" y="3264408"/>
-            <a:ext cx="3576320" cy="1127760"/>
-          </a:xfrm>
-          <a:prstGeom prst="rect">
-            <a:avLst/>
-          </a:prstGeom>
-          <a:noFill/>
-        </p:spPr>
-        <p:txBody>
-          <a:bodyPr wrap="square" lIns="0" rIns="0">
+            <a:off x="7701280" y="3523488"/>
+            <a:ext cx="4490720" cy="609600"/>
+          </a:xfrm>
+          <a:prstGeom prst="rect">
+            <a:avLst/>
+          </a:prstGeom>
+          <a:noFill/>
+        </p:spPr>
+        <p:txBody>
+          <a:bodyPr wrap="none" lIns="0" rIns="0">
             <a:noAutofit/>
           </a:bodyPr>
           <a:lstStyle/>
@@ -13437,7 +12708,7 @@
                 </a:solidFill>
                 <a:latin typeface="Arial"/>
               </a:rPr>
-              <a:t>Net promoter score</a:t>
+              <a:t>Promoter score</a:t>
             </a:r>
           </a:p>
         </p:txBody>
@@ -13452,7 +12723,7 @@
         </p:nvSpPr>
         <p:spPr>
           <a:xfrm>
-            <a:off x="9427731" y="4666488"/>
+            <a:off x="9427731" y="4407408"/>
             <a:ext cx="1037817" cy="518159"/>
           </a:xfrm>
           <a:prstGeom prst="rect">
@@ -13484,7 +12755,7 @@
         </p:nvSpPr>
         <p:spPr>
           <a:xfrm>
-            <a:off x="9288294" y="4666488"/>
+            <a:off x="9288294" y="4407408"/>
             <a:ext cx="1316691" cy="518159"/>
           </a:xfrm>
           <a:prstGeom prst="rect">
@@ -13524,7 +12795,7 @@
 </p:sldLayout>
 </file>
 
-<file path=ppt/slideLayouts/slideLayout35.xml><?xml version="1.0" encoding="utf-8"?>
+<file path=ppt/slideLayouts/slideLayout34.xml><?xml version="1.0" encoding="utf-8"?>
 <p:sldLayout xmlns:a="http://schemas.openxmlformats.org/drawingml/2006/main" xmlns:r="http://schemas.openxmlformats.org/officeDocument/2006/relationships" xmlns:p="http://schemas.openxmlformats.org/presentationml/2006/main" type="blank" preserve="1">
   <p:cSld name="slidekit · Process Steps">
     <p:bg>
@@ -13642,7 +12913,7 @@
             <a:r>
               <a:rPr sz="4200" b="1" i="0">
                 <a:solidFill>
-                  <a:srgbClr val="123A6B"/>
+                  <a:srgbClr val="0072CE"/>
                 </a:solidFill>
                 <a:latin typeface="Arial"/>
               </a:rPr>
@@ -13662,13 +12933,13 @@
         <p:spPr>
           <a:xfrm>
             <a:off x="457200" y="2194560"/>
-            <a:ext cx="784098" cy="54864"/>
+            <a:ext cx="593303" cy="54864"/>
           </a:xfrm>
           <a:prstGeom prst="rect">
             <a:avLst/>
           </a:prstGeom>
           <a:solidFill>
-            <a:srgbClr val="123A6B"/>
+            <a:srgbClr val="0072CE"/>
           </a:solidFill>
           <a:ln>
             <a:noFill/>
@@ -13711,7 +12982,7 @@
             <a:r>
               <a:rPr sz="3400" b="1" i="0">
                 <a:solidFill>
-                  <a:srgbClr val="123A6B"/>
+                  <a:srgbClr val="0072CE"/>
                 </a:solidFill>
                 <a:latin typeface="Arial"/>
               </a:rPr>
@@ -13785,7 +13056,7 @@
             <a:r>
               <a:rPr sz="4200" b="1" i="0">
                 <a:solidFill>
-                  <a:srgbClr val="123A6B"/>
+                  <a:srgbClr val="0072CE"/>
                 </a:solidFill>
                 <a:latin typeface="Arial"/>
               </a:rPr>
@@ -13805,13 +13076,13 @@
         <p:spPr>
           <a:xfrm>
             <a:off x="3345180" y="2194560"/>
-            <a:ext cx="784098" cy="54864"/>
+            <a:ext cx="593303" cy="54864"/>
           </a:xfrm>
           <a:prstGeom prst="rect">
             <a:avLst/>
           </a:prstGeom>
           <a:solidFill>
-            <a:srgbClr val="123A6B"/>
+            <a:srgbClr val="0072CE"/>
           </a:solidFill>
           <a:ln>
             <a:noFill/>
@@ -13854,7 +13125,7 @@
             <a:r>
               <a:rPr sz="3400" b="1" i="0">
                 <a:solidFill>
-                  <a:srgbClr val="123A6B"/>
+                  <a:srgbClr val="0072CE"/>
                 </a:solidFill>
                 <a:latin typeface="Arial"/>
               </a:rPr>
@@ -13928,7 +13199,7 @@
             <a:r>
               <a:rPr sz="4200" b="1" i="0">
                 <a:solidFill>
-                  <a:srgbClr val="123A6B"/>
+                  <a:srgbClr val="0072CE"/>
                 </a:solidFill>
                 <a:latin typeface="Arial"/>
               </a:rPr>
@@ -13948,13 +13219,13 @@
         <p:spPr>
           <a:xfrm>
             <a:off x="6233160" y="2194560"/>
-            <a:ext cx="784098" cy="54864"/>
+            <a:ext cx="593303" cy="54864"/>
           </a:xfrm>
           <a:prstGeom prst="rect">
             <a:avLst/>
           </a:prstGeom>
           <a:solidFill>
-            <a:srgbClr val="123A6B"/>
+            <a:srgbClr val="0072CE"/>
           </a:solidFill>
           <a:ln>
             <a:noFill/>
@@ -13997,7 +13268,7 @@
             <a:r>
               <a:rPr sz="3400" b="1" i="0">
                 <a:solidFill>
-                  <a:srgbClr val="123A6B"/>
+                  <a:srgbClr val="0072CE"/>
                 </a:solidFill>
                 <a:latin typeface="Arial"/>
               </a:rPr>
@@ -14071,7 +13342,7 @@
             <a:r>
               <a:rPr sz="4200" b="1" i="0">
                 <a:solidFill>
-                  <a:srgbClr val="123A6B"/>
+                  <a:srgbClr val="0072CE"/>
                 </a:solidFill>
                 <a:latin typeface="Arial"/>
               </a:rPr>
@@ -14091,13 +13362,13 @@
         <p:spPr>
           <a:xfrm>
             <a:off x="9121140" y="2194560"/>
-            <a:ext cx="784098" cy="54864"/>
+            <a:ext cx="593303" cy="54864"/>
           </a:xfrm>
           <a:prstGeom prst="rect">
             <a:avLst/>
           </a:prstGeom>
           <a:solidFill>
-            <a:srgbClr val="123A6B"/>
+            <a:srgbClr val="0072CE"/>
           </a:solidFill>
           <a:ln>
             <a:noFill/>
@@ -14140,7 +13411,7 @@
             <a:r>
               <a:rPr sz="3400" b="1" i="0">
                 <a:solidFill>
-                  <a:srgbClr val="123A6B"/>
+                  <a:srgbClr val="0072CE"/>
                 </a:solidFill>
                 <a:latin typeface="Arial"/>
               </a:rPr>
@@ -14199,7 +13470,7 @@
 </p:sldLayout>
 </file>
 
-<file path=ppt/slideLayouts/slideLayout36.xml><?xml version="1.0" encoding="utf-8"?>
+<file path=ppt/slideLayouts/slideLayout35.xml><?xml version="1.0" encoding="utf-8"?>
 <p:sldLayout xmlns:a="http://schemas.openxmlformats.org/drawingml/2006/main" xmlns:r="http://schemas.openxmlformats.org/officeDocument/2006/relationships" xmlns:p="http://schemas.openxmlformats.org/presentationml/2006/main" type="blank" preserve="1">
   <p:cSld name="slidekit · Roadmap">
     <p:bg>
@@ -14731,7 +14002,7 @@
 </p:sldLayout>
 </file>
 
-<file path=ppt/slideLayouts/slideLayout37.xml><?xml version="1.0" encoding="utf-8"?>
+<file path=ppt/slideLayouts/slideLayout36.xml><?xml version="1.0" encoding="utf-8"?>
 <p:sldLayout xmlns:a="http://schemas.openxmlformats.org/drawingml/2006/main" xmlns:r="http://schemas.openxmlformats.org/officeDocument/2006/relationships" xmlns:p="http://schemas.openxmlformats.org/presentationml/2006/main" type="blank" preserve="1">
   <p:cSld name="slidekit · Funnel">
     <p:bg>
@@ -15110,7 +14381,7 @@
 </p:sldLayout>
 </file>
 
-<file path=ppt/slideLayouts/slideLayout38.xml><?xml version="1.0" encoding="utf-8"?>
+<file path=ppt/slideLayouts/slideLayout37.xml><?xml version="1.0" encoding="utf-8"?>
 <p:sldLayout xmlns:a="http://schemas.openxmlformats.org/drawingml/2006/main" xmlns:r="http://schemas.openxmlformats.org/officeDocument/2006/relationships" xmlns:p="http://schemas.openxmlformats.org/presentationml/2006/main" type="blank" preserve="1">
   <p:cSld name="slidekit · Nested Circles">
     <p:bg>
@@ -15217,7 +14488,7 @@
             <a:avLst/>
           </a:prstGeom>
           <a:solidFill>
-            <a:srgbClr val="5B6B82"/>
+            <a:srgbClr val="0A2240"/>
           </a:solidFill>
           <a:ln>
             <a:noFill/>
@@ -15281,7 +14552,7 @@
             <a:avLst/>
           </a:prstGeom>
           <a:solidFill>
-            <a:srgbClr val="123A6B"/>
+            <a:srgbClr val="0A2240"/>
           </a:solidFill>
           <a:ln>
             <a:noFill/>
@@ -15531,7 +14802,7 @@
 </p:sldLayout>
 </file>
 
-<file path=ppt/slideLayouts/slideLayout39.xml><?xml version="1.0" encoding="utf-8"?>
+<file path=ppt/slideLayouts/slideLayout38.xml><?xml version="1.0" encoding="utf-8"?>
 <p:sldLayout xmlns:a="http://schemas.openxmlformats.org/drawingml/2006/main" xmlns:r="http://schemas.openxmlformats.org/officeDocument/2006/relationships" xmlns:p="http://schemas.openxmlformats.org/presentationml/2006/main" type="blank" preserve="1">
   <p:cSld name="slidekit · Pyramid">
     <p:bg>
@@ -15638,7 +14909,7 @@
             <a:avLst/>
           </a:prstGeom>
           <a:solidFill>
-            <a:srgbClr val="123A6B"/>
+            <a:srgbClr val="0072CE"/>
           </a:solidFill>
           <a:ln>
             <a:noFill/>
@@ -15776,7 +15047,7 @@
             <a:avLst/>
           </a:prstGeom>
           <a:solidFill>
-            <a:srgbClr val="123A6B"/>
+            <a:srgbClr val="0072CE"/>
           </a:solidFill>
           <a:ln>
             <a:noFill/>
@@ -15893,6 +15164,533 @@
                 <a:latin typeface="Arial"/>
               </a:rPr>
               <a:t>Tactics</a:t>
+            </a:r>
+          </a:p>
+        </p:txBody>
+      </p:sp>
+    </p:spTree>
+    <p:extLst>
+      <p:ext uri="{BB962C8B-B14F-4D97-AF65-F5344CB8AC3E}">
+        <p14:creationId xmlns:p14="http://schemas.microsoft.com/office/powerpoint/2010/main" val="1212999818"/>
+      </p:ext>
+    </p:extLst>
+  </p:cSld>
+  <p:clrMapOvr>
+    <a:masterClrMapping/>
+  </p:clrMapOvr>
+</p:sldLayout>
+</file>
+
+<file path=ppt/slideLayouts/slideLayout39.xml><?xml version="1.0" encoding="utf-8"?>
+<p:sldLayout xmlns:a="http://schemas.openxmlformats.org/drawingml/2006/main" xmlns:r="http://schemas.openxmlformats.org/officeDocument/2006/relationships" xmlns:p="http://schemas.openxmlformats.org/presentationml/2006/main" type="blank" preserve="1">
+  <p:cSld name="slidekit · SWOT">
+    <p:bg>
+      <p:bgPr>
+        <a:solidFill>
+          <a:srgbClr val="FFFFFF"/>
+        </a:solidFill>
+        <a:effectLst/>
+      </p:bgPr>
+    </p:bg>
+    <p:spTree>
+      <p:nvGrpSpPr>
+        <p:cNvPr id="1" name=""/>
+        <p:cNvGrpSpPr/>
+        <p:nvPr/>
+      </p:nvGrpSpPr>
+      <p:grpSpPr>
+        <a:xfrm>
+          <a:off x="0" y="0"/>
+          <a:ext cx="0" cy="0"/>
+          <a:chOff x="0" y="0"/>
+          <a:chExt cx="0" cy="0"/>
+        </a:xfrm>
+      </p:grpSpPr>
+      <p:sp>
+        <p:nvSpPr>
+          <p:cNvPr id="4" name="Slide Number Placeholder 3"/>
+          <p:cNvSpPr>
+            <a:spLocks noGrp="1"/>
+          </p:cNvSpPr>
+          <p:nvPr>
+            <p:ph type="sldNum" sz="quarter" idx="12"/>
+          </p:nvPr>
+        </p:nvSpPr>
+        <p:spPr>
+          <a:xfrm>
+            <a:off x="11186160" y="6035040"/>
+            <a:ext cx="548640" cy="365760"/>
+          </a:xfrm>
+        </p:spPr>
+        <p:txBody>
+          <a:bodyPr/>
+          <a:lstStyle/>
+          <a:p>
+            <a:fld id="{C1FF6DA9-008F-8B48-92A6-B652298478BF}" type="slidenum">
+              <a:rPr lang="en-US" smtClean="0"/>
+              <a:t>‹#›</a:t>
+            </a:fld>
+            <a:endParaRPr lang="en-US"/>
+          </a:p>
+        </p:txBody>
+      </p:sp>
+      <p:sp>
+        <p:nvSpPr>
+          <p:cNvPr id="5" name="TextBox 4"/>
+          <p:cNvSpPr/>
+          <p:nvPr>
+            <p:ph type="title"/>
+          </p:nvPr>
+        </p:nvSpPr>
+        <p:spPr>
+          <a:xfrm>
+            <a:off x="457200" y="457200"/>
+            <a:ext cx="11277600" cy="768096"/>
+          </a:xfrm>
+          <a:prstGeom prst="rect">
+            <a:avLst/>
+          </a:prstGeom>
+          <a:noFill/>
+        </p:spPr>
+        <p:txBody>
+          <a:bodyPr wrap="none" lIns="0" rIns="0">
+            <a:noAutofit/>
+          </a:bodyPr>
+          <a:lstStyle/>
+          <a:p>
+            <a:pPr algn="l"/>
+            <a:r>
+              <a:rPr sz="4200" b="1" i="0">
+                <a:solidFill>
+                  <a:srgbClr val="0072CE"/>
+                </a:solidFill>
+                <a:latin typeface="Arial"/>
+              </a:rPr>
+              <a:t>SWOT Analysis</a:t>
+            </a:r>
+          </a:p>
+        </p:txBody>
+      </p:sp>
+      <p:sp>
+        <p:nvSpPr>
+          <p:cNvPr id="6" name="TextBox 5"/>
+          <p:cNvSpPr/>
+          <p:nvPr>
+            <p:ph type="body" idx="1"/>
+          </p:nvPr>
+        </p:nvSpPr>
+        <p:spPr>
+          <a:xfrm>
+            <a:off x="457200" y="1499616"/>
+            <a:ext cx="5501640" cy="621791"/>
+          </a:xfrm>
+          <a:prstGeom prst="rect">
+            <a:avLst/>
+          </a:prstGeom>
+          <a:noFill/>
+        </p:spPr>
+        <p:txBody>
+          <a:bodyPr wrap="none" lIns="0" rIns="0">
+            <a:noAutofit/>
+          </a:bodyPr>
+          <a:lstStyle/>
+          <a:p>
+            <a:pPr algn="l"/>
+            <a:r>
+              <a:rPr sz="3400" b="1" i="0">
+                <a:solidFill>
+                  <a:srgbClr val="0072CE"/>
+                </a:solidFill>
+                <a:latin typeface="Arial"/>
+              </a:rPr>
+              <a:t>Strengths</a:t>
+            </a:r>
+          </a:p>
+        </p:txBody>
+      </p:sp>
+      <p:sp>
+        <p:nvSpPr>
+          <p:cNvPr id="7" name="Rectangle 6"/>
+          <p:cNvSpPr/>
+          <p:nvPr>
+            <p:ph type="body" idx="2"/>
+          </p:nvPr>
+        </p:nvSpPr>
+        <p:spPr>
+          <a:xfrm>
+            <a:off x="457200" y="2176271"/>
+            <a:ext cx="2015207" cy="54864"/>
+          </a:xfrm>
+          <a:prstGeom prst="rect">
+            <a:avLst/>
+          </a:prstGeom>
+          <a:solidFill>
+            <a:srgbClr val="0072CE"/>
+          </a:solidFill>
+          <a:ln>
+            <a:noFill/>
+          </a:ln>
+          <a:effectLst/>
+        </p:spPr>
+        <p:txBody>
+          <a:bodyPr rtlCol="0" anchor="ctr"/>
+          <a:lstStyle/>
+          <a:p>
+            <a:pPr algn="ctr"/>
+          </a:p>
+        </p:txBody>
+      </p:sp>
+      <p:sp>
+        <p:nvSpPr>
+          <p:cNvPr id="8" name="TextBox 7"/>
+          <p:cNvSpPr/>
+          <p:nvPr>
+            <p:ph type="body" idx="3"/>
+          </p:nvPr>
+        </p:nvSpPr>
+        <p:spPr>
+          <a:xfrm>
+            <a:off x="457200" y="2395727"/>
+            <a:ext cx="7863523" cy="609600"/>
+          </a:xfrm>
+          <a:prstGeom prst="rect">
+            <a:avLst/>
+          </a:prstGeom>
+          <a:noFill/>
+        </p:spPr>
+        <p:txBody>
+          <a:bodyPr wrap="none" lIns="0" rIns="0">
+            <a:noAutofit/>
+          </a:bodyPr>
+          <a:lstStyle/>
+          <a:p>
+            <a:pPr algn="l"/>
+            <a:r>
+              <a:rPr sz="3400" b="0" i="0">
+                <a:solidFill>
+                  <a:srgbClr val="0A2240"/>
+                </a:solidFill>
+                <a:latin typeface="Arial"/>
+              </a:rPr>
+              <a:t>Strong brand, loyal users</a:t>
+            </a:r>
+          </a:p>
+        </p:txBody>
+      </p:sp>
+      <p:sp>
+        <p:nvSpPr>
+          <p:cNvPr id="9" name="TextBox 8"/>
+          <p:cNvSpPr/>
+          <p:nvPr>
+            <p:ph type="body" idx="4"/>
+          </p:nvPr>
+        </p:nvSpPr>
+        <p:spPr>
+          <a:xfrm>
+            <a:off x="6233160" y="1499616"/>
+            <a:ext cx="5501640" cy="621791"/>
+          </a:xfrm>
+          <a:prstGeom prst="rect">
+            <a:avLst/>
+          </a:prstGeom>
+          <a:noFill/>
+        </p:spPr>
+        <p:txBody>
+          <a:bodyPr wrap="none" lIns="0" rIns="0">
+            <a:noAutofit/>
+          </a:bodyPr>
+          <a:lstStyle/>
+          <a:p>
+            <a:pPr algn="l"/>
+            <a:r>
+              <a:rPr sz="3400" b="1" i="0">
+                <a:solidFill>
+                  <a:srgbClr val="0A2240"/>
+                </a:solidFill>
+                <a:latin typeface="Arial"/>
+              </a:rPr>
+              <a:t>Weaknesses</a:t>
+            </a:r>
+          </a:p>
+        </p:txBody>
+      </p:sp>
+      <p:sp>
+        <p:nvSpPr>
+          <p:cNvPr id="10" name="Rectangle 9"/>
+          <p:cNvSpPr/>
+          <p:nvPr>
+            <p:ph type="body" idx="5"/>
+          </p:nvPr>
+        </p:nvSpPr>
+        <p:spPr>
+          <a:xfrm>
+            <a:off x="6233160" y="2176271"/>
+            <a:ext cx="2584686" cy="54864"/>
+          </a:xfrm>
+          <a:prstGeom prst="rect">
+            <a:avLst/>
+          </a:prstGeom>
+          <a:solidFill>
+            <a:srgbClr val="0A2240"/>
+          </a:solidFill>
+          <a:ln>
+            <a:noFill/>
+          </a:ln>
+          <a:effectLst/>
+        </p:spPr>
+        <p:txBody>
+          <a:bodyPr rtlCol="0" anchor="ctr"/>
+          <a:lstStyle/>
+          <a:p>
+            <a:pPr algn="ctr"/>
+          </a:p>
+        </p:txBody>
+      </p:sp>
+      <p:sp>
+        <p:nvSpPr>
+          <p:cNvPr id="11" name="TextBox 10"/>
+          <p:cNvSpPr/>
+          <p:nvPr>
+            <p:ph type="body" idx="6"/>
+          </p:nvPr>
+        </p:nvSpPr>
+        <p:spPr>
+          <a:xfrm>
+            <a:off x="6233160" y="2395727"/>
+            <a:ext cx="5958840" cy="609600"/>
+          </a:xfrm>
+          <a:prstGeom prst="rect">
+            <a:avLst/>
+          </a:prstGeom>
+          <a:noFill/>
+        </p:spPr>
+        <p:txBody>
+          <a:bodyPr wrap="none" lIns="0" rIns="0">
+            <a:noAutofit/>
+          </a:bodyPr>
+          <a:lstStyle/>
+          <a:p>
+            <a:pPr algn="l"/>
+            <a:r>
+              <a:rPr sz="3400" b="0" i="0">
+                <a:solidFill>
+                  <a:srgbClr val="0A2240"/>
+                </a:solidFill>
+                <a:latin typeface="Arial"/>
+              </a:rPr>
+              <a:t>Thin margins, small team</a:t>
+            </a:r>
+          </a:p>
+        </p:txBody>
+      </p:sp>
+      <p:sp>
+        <p:nvSpPr>
+          <p:cNvPr id="12" name="TextBox 11"/>
+          <p:cNvSpPr/>
+          <p:nvPr>
+            <p:ph type="body" idx="7"/>
+          </p:nvPr>
+        </p:nvSpPr>
+        <p:spPr>
+          <a:xfrm>
+            <a:off x="457200" y="3767328"/>
+            <a:ext cx="5501640" cy="621791"/>
+          </a:xfrm>
+          <a:prstGeom prst="rect">
+            <a:avLst/>
+          </a:prstGeom>
+          <a:noFill/>
+        </p:spPr>
+        <p:txBody>
+          <a:bodyPr wrap="none" lIns="0" rIns="0">
+            <a:noAutofit/>
+          </a:bodyPr>
+          <a:lstStyle/>
+          <a:p>
+            <a:pPr algn="l"/>
+            <a:r>
+              <a:rPr sz="3400" b="1" i="0">
+                <a:solidFill>
+                  <a:srgbClr val="0072CE"/>
+                </a:solidFill>
+                <a:latin typeface="Arial"/>
+              </a:rPr>
+              <a:t>Opportunities</a:t>
+            </a:r>
+          </a:p>
+        </p:txBody>
+      </p:sp>
+      <p:sp>
+        <p:nvSpPr>
+          <p:cNvPr id="13" name="Rectangle 12"/>
+          <p:cNvSpPr/>
+          <p:nvPr>
+            <p:ph type="body" idx="8"/>
+          </p:nvPr>
+        </p:nvSpPr>
+        <p:spPr>
+          <a:xfrm>
+            <a:off x="457200" y="4443983"/>
+            <a:ext cx="2830525" cy="54864"/>
+          </a:xfrm>
+          <a:prstGeom prst="rect">
+            <a:avLst/>
+          </a:prstGeom>
+          <a:solidFill>
+            <a:srgbClr val="0072CE"/>
+          </a:solidFill>
+          <a:ln>
+            <a:noFill/>
+          </a:ln>
+          <a:effectLst/>
+        </p:spPr>
+        <p:txBody>
+          <a:bodyPr rtlCol="0" anchor="ctr"/>
+          <a:lstStyle/>
+          <a:p>
+            <a:pPr algn="ctr"/>
+          </a:p>
+        </p:txBody>
+      </p:sp>
+      <p:sp>
+        <p:nvSpPr>
+          <p:cNvPr id="14" name="TextBox 13"/>
+          <p:cNvSpPr/>
+          <p:nvPr>
+            <p:ph type="body" idx="9"/>
+          </p:nvPr>
+        </p:nvSpPr>
+        <p:spPr>
+          <a:xfrm>
+            <a:off x="457200" y="4663439"/>
+            <a:ext cx="8015326" cy="609600"/>
+          </a:xfrm>
+          <a:prstGeom prst="rect">
+            <a:avLst/>
+          </a:prstGeom>
+          <a:noFill/>
+        </p:spPr>
+        <p:txBody>
+          <a:bodyPr wrap="none" lIns="0" rIns="0">
+            <a:noAutofit/>
+          </a:bodyPr>
+          <a:lstStyle/>
+          <a:p>
+            <a:pPr algn="l"/>
+            <a:r>
+              <a:rPr sz="3400" b="0" i="0">
+                <a:solidFill>
+                  <a:srgbClr val="0A2240"/>
+                </a:solidFill>
+                <a:latin typeface="Arial"/>
+              </a:rPr>
+              <a:t>New markets via partners</a:t>
+            </a:r>
+          </a:p>
+        </p:txBody>
+      </p:sp>
+      <p:sp>
+        <p:nvSpPr>
+          <p:cNvPr id="15" name="TextBox 14"/>
+          <p:cNvSpPr/>
+          <p:nvPr>
+            <p:ph type="body" idx="13"/>
+          </p:nvPr>
+        </p:nvSpPr>
+        <p:spPr>
+          <a:xfrm>
+            <a:off x="6233160" y="3767328"/>
+            <a:ext cx="5501640" cy="621791"/>
+          </a:xfrm>
+          <a:prstGeom prst="rect">
+            <a:avLst/>
+          </a:prstGeom>
+          <a:noFill/>
+        </p:spPr>
+        <p:txBody>
+          <a:bodyPr wrap="none" lIns="0" rIns="0">
+            <a:noAutofit/>
+          </a:bodyPr>
+          <a:lstStyle/>
+          <a:p>
+            <a:pPr algn="l"/>
+            <a:r>
+              <a:rPr sz="3400" b="1" i="0">
+                <a:solidFill>
+                  <a:srgbClr val="0A2240"/>
+                </a:solidFill>
+                <a:latin typeface="Arial"/>
+              </a:rPr>
+              <a:t>Threats</a:t>
+            </a:r>
+          </a:p>
+        </p:txBody>
+      </p:sp>
+      <p:sp>
+        <p:nvSpPr>
+          <p:cNvPr id="16" name="Rectangle 15"/>
+          <p:cNvSpPr/>
+          <p:nvPr>
+            <p:ph type="body" idx="14"/>
+          </p:nvPr>
+        </p:nvSpPr>
+        <p:spPr>
+          <a:xfrm>
+            <a:off x="6233160" y="4443983"/>
+            <a:ext cx="1559793" cy="54864"/>
+          </a:xfrm>
+          <a:prstGeom prst="rect">
+            <a:avLst/>
+          </a:prstGeom>
+          <a:solidFill>
+            <a:srgbClr val="0A2240"/>
+          </a:solidFill>
+          <a:ln>
+            <a:noFill/>
+          </a:ln>
+          <a:effectLst/>
+        </p:spPr>
+        <p:txBody>
+          <a:bodyPr rtlCol="0" anchor="ctr"/>
+          <a:lstStyle/>
+          <a:p>
+            <a:pPr algn="ctr"/>
+          </a:p>
+        </p:txBody>
+      </p:sp>
+      <p:sp>
+        <p:nvSpPr>
+          <p:cNvPr id="17" name="TextBox 16"/>
+          <p:cNvSpPr/>
+          <p:nvPr>
+            <p:ph type="body" idx="15"/>
+          </p:nvPr>
+        </p:nvSpPr>
+        <p:spPr>
+          <a:xfrm>
+            <a:off x="6233160" y="4663439"/>
+            <a:ext cx="5958840" cy="609600"/>
+          </a:xfrm>
+          <a:prstGeom prst="rect">
+            <a:avLst/>
+          </a:prstGeom>
+          <a:noFill/>
+        </p:spPr>
+        <p:txBody>
+          <a:bodyPr wrap="none" lIns="0" rIns="0">
+            <a:noAutofit/>
+          </a:bodyPr>
+          <a:lstStyle/>
+          <a:p>
+            <a:pPr algn="l"/>
+            <a:r>
+              <a:rPr sz="3400" b="0" i="0">
+                <a:solidFill>
+                  <a:srgbClr val="0A2240"/>
+                </a:solidFill>
+                <a:latin typeface="Arial"/>
+              </a:rPr>
+              <a:t>New entrants cut prices</a:t>
             </a:r>
           </a:p>
         </p:txBody>
@@ -16199,533 +15997,6 @@
 </file>
 
 <file path=ppt/slideLayouts/slideLayout40.xml><?xml version="1.0" encoding="utf-8"?>
-<p:sldLayout xmlns:a="http://schemas.openxmlformats.org/drawingml/2006/main" xmlns:r="http://schemas.openxmlformats.org/officeDocument/2006/relationships" xmlns:p="http://schemas.openxmlformats.org/presentationml/2006/main" type="blank" preserve="1">
-  <p:cSld name="slidekit · SWOT">
-    <p:bg>
-      <p:bgPr>
-        <a:solidFill>
-          <a:srgbClr val="FFFFFF"/>
-        </a:solidFill>
-        <a:effectLst/>
-      </p:bgPr>
-    </p:bg>
-    <p:spTree>
-      <p:nvGrpSpPr>
-        <p:cNvPr id="1" name=""/>
-        <p:cNvGrpSpPr/>
-        <p:nvPr/>
-      </p:nvGrpSpPr>
-      <p:grpSpPr>
-        <a:xfrm>
-          <a:off x="0" y="0"/>
-          <a:ext cx="0" cy="0"/>
-          <a:chOff x="0" y="0"/>
-          <a:chExt cx="0" cy="0"/>
-        </a:xfrm>
-      </p:grpSpPr>
-      <p:sp>
-        <p:nvSpPr>
-          <p:cNvPr id="4" name="Slide Number Placeholder 3"/>
-          <p:cNvSpPr>
-            <a:spLocks noGrp="1"/>
-          </p:cNvSpPr>
-          <p:nvPr>
-            <p:ph type="sldNum" sz="quarter" idx="12"/>
-          </p:nvPr>
-        </p:nvSpPr>
-        <p:spPr>
-          <a:xfrm>
-            <a:off x="11186160" y="6035040"/>
-            <a:ext cx="548640" cy="365760"/>
-          </a:xfrm>
-        </p:spPr>
-        <p:txBody>
-          <a:bodyPr/>
-          <a:lstStyle/>
-          <a:p>
-            <a:fld id="{C1FF6DA9-008F-8B48-92A6-B652298478BF}" type="slidenum">
-              <a:rPr lang="en-US" smtClean="0"/>
-              <a:t>‹#›</a:t>
-            </a:fld>
-            <a:endParaRPr lang="en-US"/>
-          </a:p>
-        </p:txBody>
-      </p:sp>
-      <p:sp>
-        <p:nvSpPr>
-          <p:cNvPr id="5" name="TextBox 4"/>
-          <p:cNvSpPr/>
-          <p:nvPr>
-            <p:ph type="title"/>
-          </p:nvPr>
-        </p:nvSpPr>
-        <p:spPr>
-          <a:xfrm>
-            <a:off x="457200" y="457200"/>
-            <a:ext cx="11277600" cy="768096"/>
-          </a:xfrm>
-          <a:prstGeom prst="rect">
-            <a:avLst/>
-          </a:prstGeom>
-          <a:noFill/>
-        </p:spPr>
-        <p:txBody>
-          <a:bodyPr wrap="none" lIns="0" rIns="0">
-            <a:noAutofit/>
-          </a:bodyPr>
-          <a:lstStyle/>
-          <a:p>
-            <a:pPr algn="l"/>
-            <a:r>
-              <a:rPr sz="4200" b="1" i="0">
-                <a:solidFill>
-                  <a:srgbClr val="0072CE"/>
-                </a:solidFill>
-                <a:latin typeface="Arial"/>
-              </a:rPr>
-              <a:t>SWOT Analysis</a:t>
-            </a:r>
-          </a:p>
-        </p:txBody>
-      </p:sp>
-      <p:sp>
-        <p:nvSpPr>
-          <p:cNvPr id="6" name="TextBox 5"/>
-          <p:cNvSpPr/>
-          <p:nvPr>
-            <p:ph type="body" idx="1"/>
-          </p:nvPr>
-        </p:nvSpPr>
-        <p:spPr>
-          <a:xfrm>
-            <a:off x="457200" y="1499616"/>
-            <a:ext cx="5501640" cy="621791"/>
-          </a:xfrm>
-          <a:prstGeom prst="rect">
-            <a:avLst/>
-          </a:prstGeom>
-          <a:noFill/>
-        </p:spPr>
-        <p:txBody>
-          <a:bodyPr wrap="none" lIns="0" rIns="0">
-            <a:noAutofit/>
-          </a:bodyPr>
-          <a:lstStyle/>
-          <a:p>
-            <a:pPr algn="l"/>
-            <a:r>
-              <a:rPr sz="3400" b="1" i="0">
-                <a:solidFill>
-                  <a:srgbClr val="0072CE"/>
-                </a:solidFill>
-                <a:latin typeface="Arial"/>
-              </a:rPr>
-              <a:t>Strengths</a:t>
-            </a:r>
-          </a:p>
-        </p:txBody>
-      </p:sp>
-      <p:sp>
-        <p:nvSpPr>
-          <p:cNvPr id="7" name="Rectangle 6"/>
-          <p:cNvSpPr/>
-          <p:nvPr>
-            <p:ph type="body" idx="2"/>
-          </p:nvPr>
-        </p:nvSpPr>
-        <p:spPr>
-          <a:xfrm>
-            <a:off x="457200" y="2176271"/>
-            <a:ext cx="1650492" cy="54864"/>
-          </a:xfrm>
-          <a:prstGeom prst="rect">
-            <a:avLst/>
-          </a:prstGeom>
-          <a:solidFill>
-            <a:srgbClr val="0072CE"/>
-          </a:solidFill>
-          <a:ln>
-            <a:noFill/>
-          </a:ln>
-          <a:effectLst/>
-        </p:spPr>
-        <p:txBody>
-          <a:bodyPr rtlCol="0" anchor="ctr"/>
-          <a:lstStyle/>
-          <a:p>
-            <a:pPr algn="ctr"/>
-          </a:p>
-        </p:txBody>
-      </p:sp>
-      <p:sp>
-        <p:nvSpPr>
-          <p:cNvPr id="8" name="TextBox 7"/>
-          <p:cNvSpPr/>
-          <p:nvPr>
-            <p:ph type="body" idx="3"/>
-          </p:nvPr>
-        </p:nvSpPr>
-        <p:spPr>
-          <a:xfrm>
-            <a:off x="457200" y="2395727"/>
-            <a:ext cx="5501640" cy="1097281"/>
-          </a:xfrm>
-          <a:prstGeom prst="rect">
-            <a:avLst/>
-          </a:prstGeom>
-          <a:noFill/>
-        </p:spPr>
-        <p:txBody>
-          <a:bodyPr wrap="square" lIns="0" rIns="0">
-            <a:noAutofit/>
-          </a:bodyPr>
-          <a:lstStyle/>
-          <a:p>
-            <a:pPr algn="l"/>
-            <a:r>
-              <a:rPr sz="3400" b="0" i="0">
-                <a:solidFill>
-                  <a:srgbClr val="0A2240"/>
-                </a:solidFill>
-                <a:latin typeface="Arial"/>
-              </a:rPr>
-              <a:t>A strong brand with loyal users</a:t>
-            </a:r>
-          </a:p>
-        </p:txBody>
-      </p:sp>
-      <p:sp>
-        <p:nvSpPr>
-          <p:cNvPr id="9" name="TextBox 8"/>
-          <p:cNvSpPr/>
-          <p:nvPr>
-            <p:ph type="body" idx="4"/>
-          </p:nvPr>
-        </p:nvSpPr>
-        <p:spPr>
-          <a:xfrm>
-            <a:off x="6233160" y="1499616"/>
-            <a:ext cx="5501640" cy="621791"/>
-          </a:xfrm>
-          <a:prstGeom prst="rect">
-            <a:avLst/>
-          </a:prstGeom>
-          <a:noFill/>
-        </p:spPr>
-        <p:txBody>
-          <a:bodyPr wrap="none" lIns="0" rIns="0">
-            <a:noAutofit/>
-          </a:bodyPr>
-          <a:lstStyle/>
-          <a:p>
-            <a:pPr algn="l"/>
-            <a:r>
-              <a:rPr sz="3400" b="1" i="0">
-                <a:solidFill>
-                  <a:srgbClr val="5B6B82"/>
-                </a:solidFill>
-                <a:latin typeface="Arial"/>
-              </a:rPr>
-              <a:t>Weaknesses</a:t>
-            </a:r>
-          </a:p>
-        </p:txBody>
-      </p:sp>
-      <p:sp>
-        <p:nvSpPr>
-          <p:cNvPr id="10" name="Rectangle 9"/>
-          <p:cNvSpPr/>
-          <p:nvPr>
-            <p:ph type="body" idx="5"/>
-          </p:nvPr>
-        </p:nvSpPr>
-        <p:spPr>
-          <a:xfrm>
-            <a:off x="6233160" y="2176271"/>
-            <a:ext cx="1650492" cy="54864"/>
-          </a:xfrm>
-          <a:prstGeom prst="rect">
-            <a:avLst/>
-          </a:prstGeom>
-          <a:solidFill>
-            <a:srgbClr val="5B6B82"/>
-          </a:solidFill>
-          <a:ln>
-            <a:noFill/>
-          </a:ln>
-          <a:effectLst/>
-        </p:spPr>
-        <p:txBody>
-          <a:bodyPr rtlCol="0" anchor="ctr"/>
-          <a:lstStyle/>
-          <a:p>
-            <a:pPr algn="ctr"/>
-          </a:p>
-        </p:txBody>
-      </p:sp>
-      <p:sp>
-        <p:nvSpPr>
-          <p:cNvPr id="11" name="TextBox 10"/>
-          <p:cNvSpPr/>
-          <p:nvPr>
-            <p:ph type="body" idx="6"/>
-          </p:nvPr>
-        </p:nvSpPr>
-        <p:spPr>
-          <a:xfrm>
-            <a:off x="6233160" y="2395727"/>
-            <a:ext cx="5501640" cy="1097281"/>
-          </a:xfrm>
-          <a:prstGeom prst="rect">
-            <a:avLst/>
-          </a:prstGeom>
-          <a:noFill/>
-        </p:spPr>
-        <p:txBody>
-          <a:bodyPr wrap="square" lIns="0" rIns="0">
-            <a:noAutofit/>
-          </a:bodyPr>
-          <a:lstStyle/>
-          <a:p>
-            <a:pPr algn="l"/>
-            <a:r>
-              <a:rPr sz="3400" b="0" i="0">
-                <a:solidFill>
-                  <a:srgbClr val="0A2240"/>
-                </a:solidFill>
-                <a:latin typeface="Arial"/>
-              </a:rPr>
-              <a:t>Thin margins and a small team</a:t>
-            </a:r>
-          </a:p>
-        </p:txBody>
-      </p:sp>
-      <p:sp>
-        <p:nvSpPr>
-          <p:cNvPr id="12" name="TextBox 11"/>
-          <p:cNvSpPr/>
-          <p:nvPr>
-            <p:ph type="body" idx="7"/>
-          </p:nvPr>
-        </p:nvSpPr>
-        <p:spPr>
-          <a:xfrm>
-            <a:off x="457200" y="3767328"/>
-            <a:ext cx="5501640" cy="621791"/>
-          </a:xfrm>
-          <a:prstGeom prst="rect">
-            <a:avLst/>
-          </a:prstGeom>
-          <a:noFill/>
-        </p:spPr>
-        <p:txBody>
-          <a:bodyPr wrap="none" lIns="0" rIns="0">
-            <a:noAutofit/>
-          </a:bodyPr>
-          <a:lstStyle/>
-          <a:p>
-            <a:pPr algn="l"/>
-            <a:r>
-              <a:rPr sz="3400" b="1" i="0">
-                <a:solidFill>
-                  <a:srgbClr val="0072CE"/>
-                </a:solidFill>
-                <a:latin typeface="Arial"/>
-              </a:rPr>
-              <a:t>Opportunities</a:t>
-            </a:r>
-          </a:p>
-        </p:txBody>
-      </p:sp>
-      <p:sp>
-        <p:nvSpPr>
-          <p:cNvPr id="13" name="Rectangle 12"/>
-          <p:cNvSpPr/>
-          <p:nvPr>
-            <p:ph type="body" idx="8"/>
-          </p:nvPr>
-        </p:nvSpPr>
-        <p:spPr>
-          <a:xfrm>
-            <a:off x="457200" y="4443983"/>
-            <a:ext cx="1650492" cy="54864"/>
-          </a:xfrm>
-          <a:prstGeom prst="rect">
-            <a:avLst/>
-          </a:prstGeom>
-          <a:solidFill>
-            <a:srgbClr val="0072CE"/>
-          </a:solidFill>
-          <a:ln>
-            <a:noFill/>
-          </a:ln>
-          <a:effectLst/>
-        </p:spPr>
-        <p:txBody>
-          <a:bodyPr rtlCol="0" anchor="ctr"/>
-          <a:lstStyle/>
-          <a:p>
-            <a:pPr algn="ctr"/>
-          </a:p>
-        </p:txBody>
-      </p:sp>
-      <p:sp>
-        <p:nvSpPr>
-          <p:cNvPr id="14" name="TextBox 13"/>
-          <p:cNvSpPr/>
-          <p:nvPr>
-            <p:ph type="body" idx="9"/>
-          </p:nvPr>
-        </p:nvSpPr>
-        <p:spPr>
-          <a:xfrm>
-            <a:off x="457200" y="4663439"/>
-            <a:ext cx="5501640" cy="1097281"/>
-          </a:xfrm>
-          <a:prstGeom prst="rect">
-            <a:avLst/>
-          </a:prstGeom>
-          <a:noFill/>
-        </p:spPr>
-        <p:txBody>
-          <a:bodyPr wrap="square" lIns="0" rIns="0">
-            <a:noAutofit/>
-          </a:bodyPr>
-          <a:lstStyle/>
-          <a:p>
-            <a:pPr algn="l"/>
-            <a:r>
-              <a:rPr sz="3400" b="0" i="0">
-                <a:solidFill>
-                  <a:srgbClr val="0A2240"/>
-                </a:solidFill>
-                <a:latin typeface="Arial"/>
-              </a:rPr>
-              <a:t>New markets through partnerships</a:t>
-            </a:r>
-          </a:p>
-        </p:txBody>
-      </p:sp>
-      <p:sp>
-        <p:nvSpPr>
-          <p:cNvPr id="15" name="TextBox 14"/>
-          <p:cNvSpPr/>
-          <p:nvPr>
-            <p:ph type="body" idx="13"/>
-          </p:nvPr>
-        </p:nvSpPr>
-        <p:spPr>
-          <a:xfrm>
-            <a:off x="6233160" y="3767328"/>
-            <a:ext cx="5501640" cy="621791"/>
-          </a:xfrm>
-          <a:prstGeom prst="rect">
-            <a:avLst/>
-          </a:prstGeom>
-          <a:noFill/>
-        </p:spPr>
-        <p:txBody>
-          <a:bodyPr wrap="none" lIns="0" rIns="0">
-            <a:noAutofit/>
-          </a:bodyPr>
-          <a:lstStyle/>
-          <a:p>
-            <a:pPr algn="l"/>
-            <a:r>
-              <a:rPr sz="3400" b="1" i="0">
-                <a:solidFill>
-                  <a:srgbClr val="5B6B82"/>
-                </a:solidFill>
-                <a:latin typeface="Arial"/>
-              </a:rPr>
-              <a:t>Threats</a:t>
-            </a:r>
-          </a:p>
-        </p:txBody>
-      </p:sp>
-      <p:sp>
-        <p:nvSpPr>
-          <p:cNvPr id="16" name="Rectangle 15"/>
-          <p:cNvSpPr/>
-          <p:nvPr>
-            <p:ph type="body" idx="14"/>
-          </p:nvPr>
-        </p:nvSpPr>
-        <p:spPr>
-          <a:xfrm>
-            <a:off x="6233160" y="4443983"/>
-            <a:ext cx="1650492" cy="54864"/>
-          </a:xfrm>
-          <a:prstGeom prst="rect">
-            <a:avLst/>
-          </a:prstGeom>
-          <a:solidFill>
-            <a:srgbClr val="5B6B82"/>
-          </a:solidFill>
-          <a:ln>
-            <a:noFill/>
-          </a:ln>
-          <a:effectLst/>
-        </p:spPr>
-        <p:txBody>
-          <a:bodyPr rtlCol="0" anchor="ctr"/>
-          <a:lstStyle/>
-          <a:p>
-            <a:pPr algn="ctr"/>
-          </a:p>
-        </p:txBody>
-      </p:sp>
-      <p:sp>
-        <p:nvSpPr>
-          <p:cNvPr id="17" name="TextBox 16"/>
-          <p:cNvSpPr/>
-          <p:nvPr>
-            <p:ph type="body" idx="15"/>
-          </p:nvPr>
-        </p:nvSpPr>
-        <p:spPr>
-          <a:xfrm>
-            <a:off x="6233160" y="4663439"/>
-            <a:ext cx="5501640" cy="1097281"/>
-          </a:xfrm>
-          <a:prstGeom prst="rect">
-            <a:avLst/>
-          </a:prstGeom>
-          <a:noFill/>
-        </p:spPr>
-        <p:txBody>
-          <a:bodyPr wrap="square" lIns="0" rIns="0">
-            <a:noAutofit/>
-          </a:bodyPr>
-          <a:lstStyle/>
-          <a:p>
-            <a:pPr algn="l"/>
-            <a:r>
-              <a:rPr sz="3400" b="0" i="0">
-                <a:solidFill>
-                  <a:srgbClr val="0A2240"/>
-                </a:solidFill>
-                <a:latin typeface="Arial"/>
-              </a:rPr>
-              <a:t>New entrants driving price pressure</a:t>
-            </a:r>
-          </a:p>
-        </p:txBody>
-      </p:sp>
-    </p:spTree>
-    <p:extLst>
-      <p:ext uri="{BB962C8B-B14F-4D97-AF65-F5344CB8AC3E}">
-        <p14:creationId xmlns:p14="http://schemas.microsoft.com/office/powerpoint/2010/main" val="1212999818"/>
-      </p:ext>
-    </p:extLst>
-  </p:cSld>
-  <p:clrMapOvr>
-    <a:masterClrMapping/>
-  </p:clrMapOvr>
-</p:sldLayout>
-</file>
-
-<file path=ppt/slideLayouts/slideLayout41.xml><?xml version="1.0" encoding="utf-8"?>
 <p:sldLayout xmlns:a="http://schemas.openxmlformats.org/drawingml/2006/main" xmlns:r="http://schemas.openxmlformats.org/officeDocument/2006/relationships" xmlns:p="http://schemas.openxmlformats.org/presentationml/2006/main" type="blank" preserve="1">
   <p:cSld name="slidekit · Comparison Matrix">
     <p:bg>
@@ -18929,7 +18200,6 @@
     <p:sldLayoutId id="2147483738" r:id="rId39"/>
     <p:sldLayoutId id="2147483739" r:id="rId40"/>
     <p:sldLayoutId id="2147483740" r:id="rId41"/>
-    <p:sldLayoutId id="2147483741" r:id="rId42"/>
   </p:sldLayoutIdLst>
   <p:txStyles>
     <p:titleStyle>
@@ -19466,7 +18736,7 @@
             <a:fld id="{4B0E1F8A-6C1D-4E2A-9F3B-7A5C8D2E1F60}" type="slidenum">
               <a:rPr sz="1600" b="0" i="0">
                 <a:solidFill>
-                  <a:srgbClr val="5B6B82"/>
+                  <a:srgbClr val="0A2240"/>
                 </a:solidFill>
                 <a:latin typeface="Arial"/>
               </a:rPr>
@@ -19562,7 +18832,7 @@
             <a:r>
               <a:rPr sz="3400" b="1" i="0">
                 <a:solidFill>
-                  <a:srgbClr val="123A6B"/>
+                  <a:srgbClr val="0072CE"/>
                 </a:solidFill>
                 <a:latin typeface="Arial"/>
               </a:rPr>
@@ -19597,7 +18867,7 @@
             <a:r>
               <a:rPr sz="3400" b="1" i="0">
                 <a:solidFill>
-                  <a:srgbClr val="123A6B"/>
+                  <a:srgbClr val="0072CE"/>
                 </a:solidFill>
                 <a:latin typeface="Arial"/>
               </a:rPr>
@@ -19958,7 +19228,7 @@
             <a:fld id="{4B0E1F8A-6C1D-4E2A-9F3B-7A5C8D2E1F60}" type="slidenum">
               <a:rPr sz="1600" b="0" i="0">
                 <a:solidFill>
-                  <a:srgbClr val="5B6B82"/>
+                  <a:srgbClr val="0A2240"/>
                 </a:solidFill>
                 <a:latin typeface="Arial"/>
               </a:rPr>
@@ -20135,7 +19405,7 @@
             <a:fld id="{4B0E1F8A-6C1D-4E2A-9F3B-7A5C8D2E1F60}" type="slidenum">
               <a:rPr sz="1600" b="0" i="0">
                 <a:solidFill>
-                  <a:srgbClr val="5B6B82"/>
+                  <a:srgbClr val="0A2240"/>
                 </a:solidFill>
                 <a:latin typeface="Arial"/>
               </a:rPr>
@@ -20231,7 +19501,7 @@
             <a:r>
               <a:rPr sz="3400" b="1" i="0">
                 <a:solidFill>
-                  <a:srgbClr val="5B6B82"/>
+                  <a:srgbClr val="0A2240"/>
                 </a:solidFill>
                 <a:latin typeface="Arial"/>
               </a:rPr>
@@ -20248,14 +19518,14 @@
         </p:nvSpPr>
         <p:spPr>
           <a:xfrm>
-            <a:off x="548640" y="2176271"/>
-            <a:ext cx="1650492" cy="54864"/>
+            <a:off x="457200" y="2176271"/>
+            <a:ext cx="1463861" cy="54864"/>
           </a:xfrm>
           <a:prstGeom prst="rect">
             <a:avLst/>
           </a:prstGeom>
           <a:solidFill>
-            <a:srgbClr val="5B6B82"/>
+            <a:srgbClr val="0A2240"/>
           </a:solidFill>
           <a:ln>
             <a:noFill/>
@@ -20327,8 +19597,8 @@
         </p:nvSpPr>
         <p:spPr>
           <a:xfrm>
-            <a:off x="6324600" y="2176271"/>
-            <a:ext cx="1650492" cy="54864"/>
+            <a:off x="6233160" y="2176271"/>
+            <a:ext cx="1295611" cy="54864"/>
           </a:xfrm>
           <a:prstGeom prst="rect">
             <a:avLst/>
@@ -20601,7 +19871,7 @@
             <a:fld id="{4B0E1F8A-6C1D-4E2A-9F3B-7A5C8D2E1F60}" type="slidenum">
               <a:rPr sz="1600" b="0" i="0">
                 <a:solidFill>
-                  <a:srgbClr val="5B6B82"/>
+                  <a:srgbClr val="0A2240"/>
                 </a:solidFill>
                 <a:latin typeface="Arial"/>
               </a:rPr>
@@ -20697,7 +19967,7 @@
             <a:r>
               <a:rPr sz="4200" b="1" i="0">
                 <a:solidFill>
-                  <a:srgbClr val="123A6B"/>
+                  <a:srgbClr val="0072CE"/>
                 </a:solidFill>
                 <a:latin typeface="Arial"/>
               </a:rPr>
@@ -20732,7 +20002,7 @@
             <a:r>
               <a:rPr sz="4200" b="1" i="0">
                 <a:solidFill>
-                  <a:srgbClr val="123A6B"/>
+                  <a:srgbClr val="0072CE"/>
                 </a:solidFill>
                 <a:latin typeface="Arial"/>
               </a:rPr>
@@ -20802,7 +20072,7 @@
             <a:r>
               <a:rPr sz="4200" b="1" i="0">
                 <a:solidFill>
-                  <a:srgbClr val="123A6B"/>
+                  <a:srgbClr val="0072CE"/>
                 </a:solidFill>
                 <a:latin typeface="Arial"/>
               </a:rPr>
@@ -20837,7 +20107,7 @@
             <a:r>
               <a:rPr sz="4200" b="1" i="0">
                 <a:solidFill>
-                  <a:srgbClr val="123A6B"/>
+                  <a:srgbClr val="0072CE"/>
                 </a:solidFill>
                 <a:latin typeface="Arial"/>
               </a:rPr>
@@ -20907,7 +20177,7 @@
             <a:r>
               <a:rPr sz="4200" b="1" i="0">
                 <a:solidFill>
-                  <a:srgbClr val="123A6B"/>
+                  <a:srgbClr val="0072CE"/>
                 </a:solidFill>
                 <a:latin typeface="Arial"/>
               </a:rPr>
@@ -20942,7 +20212,7 @@
             <a:r>
               <a:rPr sz="4200" b="1" i="0">
                 <a:solidFill>
-                  <a:srgbClr val="123A6B"/>
+                  <a:srgbClr val="0072CE"/>
                 </a:solidFill>
                 <a:latin typeface="Arial"/>
               </a:rPr>
@@ -21014,7 +20284,7 @@
             <a:fld id="{4B0E1F8A-6C1D-4E2A-9F3B-7A5C8D2E1F60}" type="slidenum">
               <a:rPr sz="1600" b="0" i="0">
                 <a:solidFill>
-                  <a:srgbClr val="5B6B82"/>
+                  <a:srgbClr val="0A2240"/>
                 </a:solidFill>
                 <a:latin typeface="Arial"/>
               </a:rPr>
@@ -21110,7 +20380,7 @@
             <a:r>
               <a:rPr sz="3400" b="1" i="0">
                 <a:solidFill>
-                  <a:srgbClr val="123A6B"/>
+                  <a:srgbClr val="0072CE"/>
                 </a:solidFill>
                 <a:latin typeface="Arial"/>
               </a:rPr>
@@ -21145,7 +20415,7 @@
             <a:r>
               <a:rPr sz="3400" b="1" i="0">
                 <a:solidFill>
-                  <a:srgbClr val="123A6B"/>
+                  <a:srgbClr val="0072CE"/>
                 </a:solidFill>
                 <a:latin typeface="Arial"/>
               </a:rPr>
@@ -21392,7 +20662,7 @@
             <a:fld id="{4B0E1F8A-6C1D-4E2A-9F3B-7A5C8D2E1F60}" type="slidenum">
               <a:rPr sz="1600" b="0" i="0">
                 <a:solidFill>
-                  <a:srgbClr val="5B6B82"/>
+                  <a:srgbClr val="0A2240"/>
                 </a:solidFill>
                 <a:latin typeface="Arial"/>
               </a:rPr>
@@ -21595,7 +20865,7 @@
             <a:fld id="{4B0E1F8A-6C1D-4E2A-9F3B-7A5C8D2E1F60}" type="slidenum">
               <a:rPr sz="1600" b="0" i="0">
                 <a:solidFill>
-                  <a:srgbClr val="5B6B82"/>
+                  <a:srgbClr val="0A2240"/>
                 </a:solidFill>
                 <a:latin typeface="Arial"/>
               </a:rPr>
@@ -21735,7 +21005,7 @@
             <a:r>
               <a:rPr sz="3400" b="0" i="0">
                 <a:solidFill>
-                  <a:srgbClr val="5B6B82"/>
+                  <a:srgbClr val="0A2240"/>
                 </a:solidFill>
                 <a:latin typeface="Arial"/>
               </a:rPr>
@@ -21772,7 +21042,7 @@
             <a:fld id="{4B0E1F8A-6C1D-4E2A-9F3B-7A5C8D2E1F60}" type="slidenum">
               <a:rPr sz="1600" b="0" i="0">
                 <a:solidFill>
-                  <a:srgbClr val="5B6B82"/>
+                  <a:srgbClr val="0A2240"/>
                 </a:solidFill>
                 <a:latin typeface="Arial"/>
               </a:rPr>
@@ -21851,7 +21121,7 @@
         <p:spPr>
           <a:xfrm>
             <a:off x="457200" y="1499616"/>
-            <a:ext cx="2613660" cy="518159"/>
+            <a:ext cx="1680011" cy="518159"/>
           </a:xfrm>
           <a:prstGeom prst="rect">
             <a:avLst/>
@@ -21868,11 +21138,11 @@
             <a:r>
               <a:rPr sz="3400" b="1" i="0">
                 <a:solidFill>
-                  <a:srgbClr val="0A2240"/>
-                </a:solidFill>
-                <a:latin typeface="Arial"/>
-              </a:rPr>
-              <a:t>Owner</a:t>
+                  <a:srgbClr val="0072CE"/>
+                </a:solidFill>
+                <a:latin typeface="Arial"/>
+              </a:rPr>
+              <a:t>Role</a:t>
             </a:r>
           </a:p>
         </p:txBody>
@@ -21885,65 +21155,74 @@
         </p:nvSpPr>
         <p:spPr>
           <a:xfrm>
-            <a:off x="457200" y="2154935"/>
-            <a:ext cx="2613660" cy="3605785"/>
-          </a:xfrm>
-          <a:prstGeom prst="rect">
-            <a:avLst/>
-          </a:prstGeom>
-          <a:noFill/>
-        </p:spPr>
-        <p:txBody>
-          <a:bodyPr wrap="square" lIns="0" rIns="0">
-            <a:noAutofit/>
-          </a:bodyPr>
-          <a:lstStyle/>
-          <a:p>
-            <a:pPr algn="l"/>
-            <a:r>
-              <a:rPr sz="3400" b="0" i="0">
-                <a:solidFill>
-                  <a:srgbClr val="0A2240"/>
-                </a:solidFill>
-                <a:latin typeface="Arial"/>
-              </a:rPr>
-              <a:t>Holds the problem</a:t>
-            </a:r>
-          </a:p>
-        </p:txBody>
-      </p:sp>
-      <p:sp>
-        <p:nvSpPr>
-          <p:cNvPr id="5" name="TextBox 4"/>
-          <p:cNvSpPr txBox="1"/>
+            <a:off x="2643386" y="1499616"/>
+            <a:ext cx="5238058" cy="518159"/>
+          </a:xfrm>
+          <a:prstGeom prst="rect">
+            <a:avLst/>
+          </a:prstGeom>
+          <a:noFill/>
+        </p:spPr>
+        <p:txBody>
+          <a:bodyPr wrap="none" lIns="0" rIns="0">
+            <a:noAutofit/>
+          </a:bodyPr>
+          <a:lstStyle/>
+          <a:p>
+            <a:pPr algn="l"/>
+            <a:r>
+              <a:rPr sz="3400" b="1" i="0">
+                <a:solidFill>
+                  <a:srgbClr val="0072CE"/>
+                </a:solidFill>
+                <a:latin typeface="Arial"/>
+              </a:rPr>
+              <a:t>What they do</a:t>
+            </a:r>
+          </a:p>
+        </p:txBody>
+      </p:sp>
+      <p:sp>
+        <p:nvSpPr>
+          <p:cNvPr id="5" name="Rectangle 4"/>
+          <p:cNvSpPr/>
           <p:nvPr/>
         </p:nvSpPr>
         <p:spPr>
           <a:xfrm>
-            <a:off x="3345180" y="1499616"/>
-            <a:ext cx="2613660" cy="518159"/>
-          </a:xfrm>
-          <a:prstGeom prst="rect">
-            <a:avLst/>
-          </a:prstGeom>
-          <a:noFill/>
-        </p:spPr>
-        <p:txBody>
-          <a:bodyPr wrap="none" lIns="0" rIns="0">
-            <a:noAutofit/>
-          </a:bodyPr>
-          <a:lstStyle/>
-          <a:p>
-            <a:pPr algn="l"/>
-            <a:r>
-              <a:rPr sz="3400" b="1" i="0">
-                <a:solidFill>
-                  <a:srgbClr val="0A2240"/>
-                </a:solidFill>
-                <a:latin typeface="Arial"/>
-              </a:rPr>
-              <a:t>Tester</a:t>
-            </a:r>
+            <a:off x="457200" y="2072639"/>
+            <a:ext cx="7424244" cy="54864"/>
+          </a:xfrm>
+          <a:prstGeom prst="rect">
+            <a:avLst/>
+          </a:prstGeom>
+          <a:solidFill>
+            <a:srgbClr val="0072CE"/>
+          </a:solidFill>
+          <a:ln>
+            <a:noFill/>
+          </a:ln>
+          <a:effectLst/>
+        </p:spPr>
+        <p:style>
+          <a:lnRef idx="1">
+            <a:schemeClr val="accent1"/>
+          </a:lnRef>
+          <a:fillRef idx="3">
+            <a:schemeClr val="accent1"/>
+          </a:fillRef>
+          <a:effectRef idx="2">
+            <a:schemeClr val="accent1"/>
+          </a:effectRef>
+          <a:fontRef idx="minor">
+            <a:schemeClr val="lt1"/>
+          </a:fontRef>
+        </p:style>
+        <p:txBody>
+          <a:bodyPr rtlCol="0" anchor="ctr"/>
+          <a:lstStyle/>
+          <a:p>
+            <a:pPr algn="ctr"/>
           </a:p>
         </p:txBody>
       </p:sp>
@@ -21955,16 +21234,16 @@
         </p:nvSpPr>
         <p:spPr>
           <a:xfrm>
-            <a:off x="3345180" y="2154935"/>
-            <a:ext cx="2613660" cy="3605785"/>
-          </a:xfrm>
-          <a:prstGeom prst="rect">
-            <a:avLst/>
-          </a:prstGeom>
-          <a:noFill/>
-        </p:spPr>
-        <p:txBody>
-          <a:bodyPr wrap="square" lIns="0" rIns="0">
+            <a:off x="457200" y="2401823"/>
+            <a:ext cx="2217737" cy="633984"/>
+          </a:xfrm>
+          <a:prstGeom prst="rect">
+            <a:avLst/>
+          </a:prstGeom>
+          <a:noFill/>
+        </p:spPr>
+        <p:txBody>
+          <a:bodyPr wrap="none" lIns="0" rIns="0">
             <a:noAutofit/>
           </a:bodyPr>
           <a:lstStyle/>
@@ -21977,7 +21256,7 @@
                 </a:solidFill>
                 <a:latin typeface="Arial"/>
               </a:rPr>
-              <a:t>Breaks it on purpose</a:t>
+              <a:t>Owner</a:t>
             </a:r>
           </a:p>
         </p:txBody>
@@ -21990,29 +21269,29 @@
         </p:nvSpPr>
         <p:spPr>
           <a:xfrm>
-            <a:off x="6233160" y="1499616"/>
-            <a:ext cx="2613660" cy="518159"/>
-          </a:xfrm>
-          <a:prstGeom prst="rect">
-            <a:avLst/>
-          </a:prstGeom>
-          <a:noFill/>
-        </p:spPr>
-        <p:txBody>
-          <a:bodyPr wrap="none" lIns="0" rIns="0">
-            <a:noAutofit/>
-          </a:bodyPr>
-          <a:lstStyle/>
-          <a:p>
-            <a:pPr algn="l"/>
-            <a:r>
-              <a:rPr sz="3400" b="1" i="0">
+            <a:off x="2643386" y="2401823"/>
+            <a:ext cx="5789532" cy="633984"/>
+          </a:xfrm>
+          <a:prstGeom prst="rect">
+            <a:avLst/>
+          </a:prstGeom>
+          <a:noFill/>
+        </p:spPr>
+        <p:txBody>
+          <a:bodyPr wrap="none" lIns="0" rIns="0">
+            <a:noAutofit/>
+          </a:bodyPr>
+          <a:lstStyle/>
+          <a:p>
+            <a:pPr algn="l"/>
+            <a:r>
+              <a:rPr sz="3400" b="0" i="0">
                 <a:solidFill>
                   <a:srgbClr val="0A2240"/>
                 </a:solidFill>
                 <a:latin typeface="Arial"/>
               </a:rPr>
-              <a:t>Scribe</a:t>
+              <a:t>Holds the problem</a:t>
             </a:r>
           </a:p>
         </p:txBody>
@@ -22025,16 +21304,16 @@
         </p:nvSpPr>
         <p:spPr>
           <a:xfrm>
-            <a:off x="6233160" y="2154935"/>
-            <a:ext cx="2613660" cy="3605785"/>
-          </a:xfrm>
-          <a:prstGeom prst="rect">
-            <a:avLst/>
-          </a:prstGeom>
-          <a:noFill/>
-        </p:spPr>
-        <p:txBody>
-          <a:bodyPr wrap="square" lIns="0" rIns="0">
+            <a:off x="457200" y="3310127"/>
+            <a:ext cx="2064246" cy="633984"/>
+          </a:xfrm>
+          <a:prstGeom prst="rect">
+            <a:avLst/>
+          </a:prstGeom>
+          <a:noFill/>
+        </p:spPr>
+        <p:txBody>
+          <a:bodyPr wrap="none" lIns="0" rIns="0">
             <a:noAutofit/>
           </a:bodyPr>
           <a:lstStyle/>
@@ -22047,7 +21326,7 @@
                 </a:solidFill>
                 <a:latin typeface="Arial"/>
               </a:rPr>
-              <a:t>Keeps the Project current</a:t>
+              <a:t>Tester</a:t>
             </a:r>
           </a:p>
         </p:txBody>
@@ -22060,29 +21339,29 @@
         </p:nvSpPr>
         <p:spPr>
           <a:xfrm>
-            <a:off x="9121140" y="1499616"/>
-            <a:ext cx="2613660" cy="518159"/>
-          </a:xfrm>
-          <a:prstGeom prst="rect">
-            <a:avLst/>
-          </a:prstGeom>
-          <a:noFill/>
-        </p:spPr>
-        <p:txBody>
-          <a:bodyPr wrap="none" lIns="0" rIns="0">
-            <a:noAutofit/>
-          </a:bodyPr>
-          <a:lstStyle/>
-          <a:p>
-            <a:pPr algn="l"/>
-            <a:r>
-              <a:rPr sz="3400" b="1" i="0">
+            <a:off x="2643386" y="3310127"/>
+            <a:ext cx="6519545" cy="633984"/>
+          </a:xfrm>
+          <a:prstGeom prst="rect">
+            <a:avLst/>
+          </a:prstGeom>
+          <a:noFill/>
+        </p:spPr>
+        <p:txBody>
+          <a:bodyPr wrap="none" lIns="0" rIns="0">
+            <a:noAutofit/>
+          </a:bodyPr>
+          <a:lstStyle/>
+          <a:p>
+            <a:pPr algn="l"/>
+            <a:r>
+              <a:rPr sz="3400" b="0" i="0">
                 <a:solidFill>
                   <a:srgbClr val="0A2240"/>
                 </a:solidFill>
                 <a:latin typeface="Arial"/>
               </a:rPr>
-              <a:t>Demo</a:t>
+              <a:t>Breaks it on purpose</a:t>
             </a:r>
           </a:p>
         </p:txBody>
@@ -22095,16 +21374,16 @@
         </p:nvSpPr>
         <p:spPr>
           <a:xfrm>
-            <a:off x="9121140" y="2154935"/>
-            <a:ext cx="2613660" cy="3605785"/>
-          </a:xfrm>
-          <a:prstGeom prst="rect">
-            <a:avLst/>
-          </a:prstGeom>
-          <a:noFill/>
-        </p:spPr>
-        <p:txBody>
-          <a:bodyPr wrap="square" lIns="0" rIns="0">
+            <a:off x="457200" y="4218431"/>
+            <a:ext cx="2141160" cy="633984"/>
+          </a:xfrm>
+          <a:prstGeom prst="rect">
+            <a:avLst/>
+          </a:prstGeom>
+          <a:noFill/>
+        </p:spPr>
+        <p:txBody>
+          <a:bodyPr wrap="none" lIns="0" rIns="0">
             <a:noAutofit/>
           </a:bodyPr>
           <a:lstStyle/>
@@ -22117,6 +21396,111 @@
                 </a:solidFill>
                 <a:latin typeface="Arial"/>
               </a:rPr>
+              <a:t>Scribe</a:t>
+            </a:r>
+          </a:p>
+        </p:txBody>
+      </p:sp>
+      <p:sp>
+        <p:nvSpPr>
+          <p:cNvPr id="11" name="TextBox 10"/>
+          <p:cNvSpPr txBox="1"/>
+          <p:nvPr/>
+        </p:nvSpPr>
+        <p:spPr>
+          <a:xfrm>
+            <a:off x="2643386" y="4218431"/>
+            <a:ext cx="7978556" cy="633984"/>
+          </a:xfrm>
+          <a:prstGeom prst="rect">
+            <a:avLst/>
+          </a:prstGeom>
+          <a:noFill/>
+        </p:spPr>
+        <p:txBody>
+          <a:bodyPr wrap="none" lIns="0" rIns="0">
+            <a:noAutofit/>
+          </a:bodyPr>
+          <a:lstStyle/>
+          <a:p>
+            <a:pPr algn="l"/>
+            <a:r>
+              <a:rPr sz="3400" b="0" i="0">
+                <a:solidFill>
+                  <a:srgbClr val="0A2240"/>
+                </a:solidFill>
+                <a:latin typeface="Arial"/>
+              </a:rPr>
+              <a:t>Keeps the Project current</a:t>
+            </a:r>
+          </a:p>
+        </p:txBody>
+      </p:sp>
+      <p:sp>
+        <p:nvSpPr>
+          <p:cNvPr id="12" name="TextBox 11"/>
+          <p:cNvSpPr txBox="1"/>
+          <p:nvPr/>
+        </p:nvSpPr>
+        <p:spPr>
+          <a:xfrm>
+            <a:off x="457200" y="5126735"/>
+            <a:ext cx="2025788" cy="633984"/>
+          </a:xfrm>
+          <a:prstGeom prst="rect">
+            <a:avLst/>
+          </a:prstGeom>
+          <a:noFill/>
+        </p:spPr>
+        <p:txBody>
+          <a:bodyPr wrap="none" lIns="0" rIns="0">
+            <a:noAutofit/>
+          </a:bodyPr>
+          <a:lstStyle/>
+          <a:p>
+            <a:pPr algn="l"/>
+            <a:r>
+              <a:rPr sz="3400" b="0" i="0">
+                <a:solidFill>
+                  <a:srgbClr val="0A2240"/>
+                </a:solidFill>
+                <a:latin typeface="Arial"/>
+              </a:rPr>
+              <a:t>Demo</a:t>
+            </a:r>
+          </a:p>
+        </p:txBody>
+      </p:sp>
+      <p:sp>
+        <p:nvSpPr>
+          <p:cNvPr id="13" name="TextBox 12"/>
+          <p:cNvSpPr txBox="1"/>
+          <p:nvPr/>
+        </p:nvSpPr>
+        <p:spPr>
+          <a:xfrm>
+            <a:off x="2643386" y="5126735"/>
+            <a:ext cx="6517857" cy="633984"/>
+          </a:xfrm>
+          <a:prstGeom prst="rect">
+            <a:avLst/>
+          </a:prstGeom>
+          <a:noFill/>
+        </p:spPr>
+        <p:txBody>
+          <a:bodyPr wrap="none" lIns="0" rIns="0">
+            <a:noAutofit/>
+          </a:bodyPr>
+          <a:lstStyle/>
+          <a:p>
+            <a:pPr algn="l"/>
+            <a:r>
+              <a:rPr sz="3400" b="0" i="0">
+                <a:solidFill>
+                  <a:srgbClr val="0A2240"/>
+                </a:solidFill>
+                <a:latin typeface="Arial"/>
+              </a:rPr>
               <a:t>Tells the story Friday</a:t>
             </a:r>
           </a:p>
@@ -22124,7 +21508,7 @@
       </p:sp>
       <p:sp>
         <p:nvSpPr>
-          <p:cNvPr id="11" name="TextBox 10"/>
+          <p:cNvPr id="14" name="TextBox 13"/>
           <p:cNvSpPr/>
           <p:nvPr>
             <p:ph type="sldNum" idx="12"/>
@@ -22150,7 +21534,7 @@
             <a:fld id="{4B0E1F8A-6C1D-4E2A-9F3B-7A5C8D2E1F60}" type="slidenum">
               <a:rPr sz="1600" b="0" i="0">
                 <a:solidFill>
-                  <a:srgbClr val="5B6B82"/>
+                  <a:srgbClr val="0A2240"/>
                 </a:solidFill>
                 <a:latin typeface="Arial"/>
               </a:rPr>
@@ -22327,7 +21711,7 @@
             <a:fld id="{4B0E1F8A-6C1D-4E2A-9F3B-7A5C8D2E1F60}" type="slidenum">
               <a:rPr sz="1600" b="0" i="0">
                 <a:solidFill>
-                  <a:srgbClr val="5B6B82"/>
+                  <a:srgbClr val="0A2240"/>
                 </a:solidFill>
                 <a:latin typeface="Arial"/>
               </a:rPr>
@@ -22502,7 +21886,7 @@
             <a:r>
               <a:rPr sz="3400" b="0" i="0">
                 <a:solidFill>
-                  <a:srgbClr val="5B6B82"/>
+                  <a:srgbClr val="0A2240"/>
                 </a:solidFill>
                 <a:latin typeface="Arial"/>
               </a:rPr>
@@ -22539,7 +21923,7 @@
             <a:fld id="{4B0E1F8A-6C1D-4E2A-9F3B-7A5C8D2E1F60}" type="slidenum">
               <a:rPr sz="1600" b="0" i="0">
                 <a:solidFill>
-                  <a:srgbClr val="5B6B82"/>
+                  <a:srgbClr val="0A2240"/>
                 </a:solidFill>
                 <a:latin typeface="Arial"/>
               </a:rPr>
@@ -22716,7 +22100,7 @@
             <a:fld id="{4B0E1F8A-6C1D-4E2A-9F3B-7A5C8D2E1F60}" type="slidenum">
               <a:rPr sz="1600" b="0" i="0">
                 <a:solidFill>
-                  <a:srgbClr val="5B6B82"/>
+                  <a:srgbClr val="0A2240"/>
                 </a:solidFill>
                 <a:latin typeface="Arial"/>
               </a:rPr>
@@ -22812,7 +22196,7 @@
             <a:r>
               <a:rPr sz="3400" b="1" i="0">
                 <a:solidFill>
-                  <a:srgbClr val="5B6B82"/>
+                  <a:srgbClr val="0A2240"/>
                 </a:solidFill>
                 <a:latin typeface="Arial"/>
               </a:rPr>
@@ -22829,14 +22213,14 @@
         </p:nvSpPr>
         <p:spPr>
           <a:xfrm>
-            <a:off x="548640" y="2176271"/>
-            <a:ext cx="1650492" cy="54864"/>
+            <a:off x="457200" y="2176271"/>
+            <a:ext cx="1343682" cy="54864"/>
           </a:xfrm>
           <a:prstGeom prst="rect">
             <a:avLst/>
           </a:prstGeom>
           <a:solidFill>
-            <a:srgbClr val="5B6B82"/>
+            <a:srgbClr val="0A2240"/>
           </a:solidFill>
           <a:ln>
             <a:noFill/>
@@ -22908,8 +22292,8 @@
         </p:nvSpPr>
         <p:spPr>
           <a:xfrm>
-            <a:off x="6324600" y="2176271"/>
-            <a:ext cx="1650492" cy="54864"/>
+            <a:off x="6233160" y="2176271"/>
+            <a:ext cx="1536390" cy="54864"/>
           </a:xfrm>
           <a:prstGeom prst="rect">
             <a:avLst/>
@@ -23182,7 +22566,7 @@
             <a:fld id="{4B0E1F8A-6C1D-4E2A-9F3B-7A5C8D2E1F60}" type="slidenum">
               <a:rPr sz="1600" b="0" i="0">
                 <a:solidFill>
-                  <a:srgbClr val="5B6B82"/>
+                  <a:srgbClr val="0A2240"/>
                 </a:solidFill>
                 <a:latin typeface="Arial"/>
               </a:rPr>
@@ -23490,7 +22874,7 @@
             <a:fld id="{4B0E1F8A-6C1D-4E2A-9F3B-7A5C8D2E1F60}" type="slidenum">
               <a:rPr sz="1600" b="0" i="0">
                 <a:solidFill>
-                  <a:srgbClr val="5B6B82"/>
+                  <a:srgbClr val="0A2240"/>
                 </a:solidFill>
                 <a:latin typeface="Arial"/>
               </a:rPr>
@@ -23586,7 +22970,7 @@
             <a:r>
               <a:rPr sz="4200" b="1" i="0">
                 <a:solidFill>
-                  <a:srgbClr val="123A6B"/>
+                  <a:srgbClr val="0072CE"/>
                 </a:solidFill>
                 <a:latin typeface="Arial"/>
               </a:rPr>
@@ -23621,7 +23005,7 @@
             <a:r>
               <a:rPr sz="4200" b="1" i="0">
                 <a:solidFill>
-                  <a:srgbClr val="123A6B"/>
+                  <a:srgbClr val="0072CE"/>
                 </a:solidFill>
                 <a:latin typeface="Arial"/>
               </a:rPr>
@@ -23691,7 +23075,7 @@
             <a:r>
               <a:rPr sz="4200" b="1" i="0">
                 <a:solidFill>
-                  <a:srgbClr val="123A6B"/>
+                  <a:srgbClr val="0072CE"/>
                 </a:solidFill>
                 <a:latin typeface="Arial"/>
               </a:rPr>
@@ -23726,7 +23110,7 @@
             <a:r>
               <a:rPr sz="4200" b="1" i="0">
                 <a:solidFill>
-                  <a:srgbClr val="123A6B"/>
+                  <a:srgbClr val="0072CE"/>
                 </a:solidFill>
                 <a:latin typeface="Arial"/>
               </a:rPr>
@@ -23796,7 +23180,7 @@
             <a:r>
               <a:rPr sz="4200" b="1" i="0">
                 <a:solidFill>
-                  <a:srgbClr val="123A6B"/>
+                  <a:srgbClr val="0072CE"/>
                 </a:solidFill>
                 <a:latin typeface="Arial"/>
               </a:rPr>
@@ -23831,7 +23215,7 @@
             <a:r>
               <a:rPr sz="4200" b="1" i="0">
                 <a:solidFill>
-                  <a:srgbClr val="123A6B"/>
+                  <a:srgbClr val="0072CE"/>
                 </a:solidFill>
                 <a:latin typeface="Arial"/>
               </a:rPr>
@@ -23903,7 +23287,7 @@
             <a:fld id="{4B0E1F8A-6C1D-4E2A-9F3B-7A5C8D2E1F60}" type="slidenum">
               <a:rPr sz="1600" b="0" i="0">
                 <a:solidFill>
-                  <a:srgbClr val="5B6B82"/>
+                  <a:srgbClr val="0A2240"/>
                 </a:solidFill>
                 <a:latin typeface="Arial"/>
               </a:rPr>
@@ -23953,7 +23337,7 @@
             <a:avLst/>
           </a:prstGeom>
           <a:solidFill>
-            <a:srgbClr val="FF5F56"/>
+            <a:srgbClr val="FFFFFF"/>
           </a:solidFill>
           <a:ln>
             <a:noFill/>
@@ -23997,7 +23381,7 @@
             <a:avLst/>
           </a:prstGeom>
           <a:solidFill>
-            <a:srgbClr val="FFBD2E"/>
+            <a:srgbClr val="FFFFFF"/>
           </a:solidFill>
           <a:ln>
             <a:noFill/>
@@ -24041,7 +23425,7 @@
             <a:avLst/>
           </a:prstGeom>
           <a:solidFill>
-            <a:srgbClr val="27C93F"/>
+            <a:srgbClr val="FFFFFF"/>
           </a:solidFill>
           <a:ln>
             <a:noFill/>
@@ -24096,7 +23480,7 @@
             <a:r>
               <a:rPr sz="4200" b="0" i="0">
                 <a:solidFill>
-                  <a:srgbClr val="D4D4D4"/>
+                  <a:srgbClr val="FFFFFF"/>
                 </a:solidFill>
                 <a:latin typeface="Arial"/>
               </a:rPr>
@@ -24131,7 +23515,7 @@
             <a:r>
               <a:rPr sz="3400" b="0" i="0">
                 <a:solidFill>
-                  <a:srgbClr val="D4D4D4"/>
+                  <a:srgbClr val="FFFFFF"/>
                 </a:solidFill>
                 <a:latin typeface="Arial"/>
               </a:rPr>
@@ -24166,7 +23550,7 @@
             <a:r>
               <a:rPr sz="3400" b="0" i="0">
                 <a:solidFill>
-                  <a:srgbClr val="D4D4D4"/>
+                  <a:srgbClr val="FFFFFF"/>
                 </a:solidFill>
                 <a:latin typeface="Arial"/>
               </a:rPr>
@@ -24236,7 +23620,7 @@
             <a:r>
               <a:rPr sz="3400" b="0" i="0">
                 <a:solidFill>
-                  <a:srgbClr val="D4D4D4"/>
+                  <a:srgbClr val="FFFFFF"/>
                 </a:solidFill>
                 <a:latin typeface="Arial"/>
               </a:rPr>
@@ -24271,7 +23655,7 @@
             <a:r>
               <a:rPr sz="3400" b="0" i="0">
                 <a:solidFill>
-                  <a:srgbClr val="D4D4D4"/>
+                  <a:srgbClr val="FFFFFF"/>
                 </a:solidFill>
                 <a:latin typeface="Arial"/>
               </a:rPr>
@@ -24306,7 +23690,7 @@
             <a:r>
               <a:rPr sz="3400" b="0" i="0">
                 <a:solidFill>
-                  <a:srgbClr val="D4D4D4"/>
+                  <a:srgbClr val="FFFFFF"/>
                 </a:solidFill>
                 <a:latin typeface="Arial"/>
               </a:rPr>
@@ -24324,7 +23708,7 @@
         <p:spPr>
           <a:xfrm>
             <a:off x="457200" y="4946898"/>
-            <a:ext cx="4061995" cy="518159"/>
+            <a:ext cx="8670112" cy="518159"/>
           </a:xfrm>
           <a:prstGeom prst="rect">
             <a:avLst/>
@@ -24341,11 +23725,11 @@
             <a:r>
               <a:rPr sz="3400" b="0" i="0">
                 <a:solidFill>
-                  <a:srgbClr val="D4D4D4"/>
-                </a:solidFill>
-                <a:latin typeface="Arial"/>
-              </a:rPr>
-              <a:t>Done when: </a:t>
+                  <a:srgbClr val="FFFFFF"/>
+                </a:solidFill>
+                <a:latin typeface="Arial"/>
+              </a:rPr>
+              <a:t>Done when: 10 sample files</a:t>
             </a:r>
           </a:p>
         </p:txBody>
@@ -24358,8 +23742,8 @@
         </p:nvSpPr>
         <p:spPr>
           <a:xfrm>
-            <a:off x="2881647" y="4946898"/>
-            <a:ext cx="951348" cy="518159"/>
+            <a:off x="457200" y="5465057"/>
+            <a:ext cx="2103040" cy="518159"/>
           </a:xfrm>
           <a:prstGeom prst="rect">
             <a:avLst/>
@@ -24376,11 +23760,11 @@
             <a:r>
               <a:rPr sz="3400" b="0" i="0">
                 <a:solidFill>
-                  <a:srgbClr val="B5CEA8"/>
-                </a:solidFill>
-                <a:latin typeface="Arial"/>
-              </a:rPr>
-              <a:t>10</a:t>
+                  <a:srgbClr val="FFFFFF"/>
+                </a:solidFill>
+                <a:latin typeface="Arial"/>
+              </a:rPr>
+              <a:t>parse </a:t>
             </a:r>
           </a:p>
         </p:txBody>
@@ -24393,8 +23777,8 @@
         </p:nvSpPr>
         <p:spPr>
           <a:xfrm>
-            <a:off x="3361941" y="4946898"/>
-            <a:ext cx="4022526" cy="518159"/>
+            <a:off x="1657300" y="5465057"/>
+            <a:ext cx="1411486" cy="518159"/>
           </a:xfrm>
           <a:prstGeom prst="rect">
             <a:avLst/>
@@ -24411,11 +23795,11 @@
             <a:r>
               <a:rPr sz="3400" b="0" i="0">
                 <a:solidFill>
-                  <a:srgbClr val="D4D4D4"/>
-                </a:solidFill>
-                <a:latin typeface="Arial"/>
-              </a:rPr>
-              <a:t> sample files</a:t>
+                  <a:srgbClr val="569CD6"/>
+                </a:solidFill>
+                <a:latin typeface="Arial"/>
+              </a:rPr>
+              <a:t>with</a:t>
             </a:r>
           </a:p>
         </p:txBody>
@@ -24428,76 +23812,6 @@
         </p:nvSpPr>
         <p:spPr>
           <a:xfrm>
-            <a:off x="457200" y="5465057"/>
-            <a:ext cx="2103040" cy="518159"/>
-          </a:xfrm>
-          <a:prstGeom prst="rect">
-            <a:avLst/>
-          </a:prstGeom>
-          <a:noFill/>
-        </p:spPr>
-        <p:txBody>
-          <a:bodyPr wrap="none" lIns="0" rIns="0">
-            <a:noAutofit/>
-          </a:bodyPr>
-          <a:lstStyle/>
-          <a:p>
-            <a:pPr algn="l"/>
-            <a:r>
-              <a:rPr sz="3400" b="0" i="0">
-                <a:solidFill>
-                  <a:srgbClr val="D4D4D4"/>
-                </a:solidFill>
-                <a:latin typeface="Arial"/>
-              </a:rPr>
-              <a:t>parse </a:t>
-            </a:r>
-          </a:p>
-        </p:txBody>
-      </p:sp>
-      <p:sp>
-        <p:nvSpPr>
-          <p:cNvPr id="16" name="TextBox 15"/>
-          <p:cNvSpPr txBox="1"/>
-          <p:nvPr/>
-        </p:nvSpPr>
-        <p:spPr>
-          <a:xfrm>
-            <a:off x="1657300" y="5465057"/>
-            <a:ext cx="1411486" cy="518159"/>
-          </a:xfrm>
-          <a:prstGeom prst="rect">
-            <a:avLst/>
-          </a:prstGeom>
-          <a:noFill/>
-        </p:spPr>
-        <p:txBody>
-          <a:bodyPr wrap="none" lIns="0" rIns="0">
-            <a:noAutofit/>
-          </a:bodyPr>
-          <a:lstStyle/>
-          <a:p>
-            <a:pPr algn="l"/>
-            <a:r>
-              <a:rPr sz="3400" b="0" i="0">
-                <a:solidFill>
-                  <a:srgbClr val="C586C0"/>
-                </a:solidFill>
-                <a:latin typeface="Arial"/>
-              </a:rPr>
-              <a:t>with</a:t>
-            </a:r>
-          </a:p>
-        </p:txBody>
-      </p:sp>
-      <p:sp>
-        <p:nvSpPr>
-          <p:cNvPr id="17" name="TextBox 16"/>
-          <p:cNvSpPr txBox="1"/>
-          <p:nvPr/>
-        </p:nvSpPr>
-        <p:spPr>
-          <a:xfrm>
             <a:off x="2425179" y="5465057"/>
             <a:ext cx="5405635" cy="518159"/>
           </a:xfrm>
@@ -24516,7 +23830,7 @@
             <a:r>
               <a:rPr sz="3400" b="0" i="0">
                 <a:solidFill>
-                  <a:srgbClr val="D4D4D4"/>
+                  <a:srgbClr val="FFFFFF"/>
                 </a:solidFill>
                 <a:latin typeface="Arial"/>
               </a:rPr>
@@ -24527,7 +23841,7 @@
       </p:sp>
       <p:sp>
         <p:nvSpPr>
-          <p:cNvPr id="18" name="TextBox 17"/>
+          <p:cNvPr id="16" name="TextBox 15"/>
           <p:cNvSpPr/>
           <p:nvPr>
             <p:ph type="sldNum" idx="12"/>
@@ -24553,7 +23867,7 @@
             <a:fld id="{4B0E1F8A-6C1D-4E2A-9F3B-7A5C8D2E1F60}" type="slidenum">
               <a:rPr sz="1600" b="0" i="0">
                 <a:solidFill>
-                  <a:srgbClr val="5B6B82"/>
+                  <a:srgbClr val="0A2240"/>
                 </a:solidFill>
                 <a:latin typeface="Arial"/>
               </a:rPr>
@@ -24730,7 +24044,7 @@
             <a:fld id="{4B0E1F8A-6C1D-4E2A-9F3B-7A5C8D2E1F60}" type="slidenum">
               <a:rPr sz="1600" b="0" i="0">
                 <a:solidFill>
-                  <a:srgbClr val="5B6B82"/>
+                  <a:srgbClr val="0A2240"/>
                 </a:solidFill>
                 <a:latin typeface="Arial"/>
               </a:rPr>
@@ -24933,7 +24247,7 @@
             <a:fld id="{4B0E1F8A-6C1D-4E2A-9F3B-7A5C8D2E1F60}" type="slidenum">
               <a:rPr sz="1600" b="0" i="0">
                 <a:solidFill>
-                  <a:srgbClr val="5B6B82"/>
+                  <a:srgbClr val="0A2240"/>
                 </a:solidFill>
                 <a:latin typeface="Arial"/>
               </a:rPr>
@@ -25029,7 +24343,7 @@
             <a:r>
               <a:rPr sz="3400" b="1" i="0">
                 <a:solidFill>
-                  <a:srgbClr val="123A6B"/>
+                  <a:srgbClr val="0072CE"/>
                 </a:solidFill>
                 <a:latin typeface="Arial"/>
               </a:rPr>
@@ -25064,7 +24378,7 @@
             <a:r>
               <a:rPr sz="3400" b="1" i="0">
                 <a:solidFill>
-                  <a:srgbClr val="123A6B"/>
+                  <a:srgbClr val="0072CE"/>
                 </a:solidFill>
                 <a:latin typeface="Arial"/>
               </a:rPr>
@@ -25355,7 +24669,7 @@
             <a:fld id="{4B0E1F8A-6C1D-4E2A-9F3B-7A5C8D2E1F60}" type="slidenum">
               <a:rPr sz="1600" b="0" i="0">
                 <a:solidFill>
-                  <a:srgbClr val="5B6B82"/>
+                  <a:srgbClr val="0A2240"/>
                 </a:solidFill>
                 <a:latin typeface="Arial"/>
               </a:rPr>
@@ -25558,7 +24872,7 @@
             <a:fld id="{4B0E1F8A-6C1D-4E2A-9F3B-7A5C8D2E1F60}" type="slidenum">
               <a:rPr sz="1600" b="0" i="0">
                 <a:solidFill>
-                  <a:srgbClr val="5B6B82"/>
+                  <a:srgbClr val="0A2240"/>
                 </a:solidFill>
                 <a:latin typeface="Arial"/>
               </a:rPr>
@@ -25761,7 +25075,7 @@
             <a:fld id="{4B0E1F8A-6C1D-4E2A-9F3B-7A5C8D2E1F60}" type="slidenum">
               <a:rPr sz="1600" b="0" i="0">
                 <a:solidFill>
-                  <a:srgbClr val="5B6B82"/>
+                  <a:srgbClr val="0A2240"/>
                 </a:solidFill>
                 <a:latin typeface="Arial"/>
               </a:rPr>
@@ -26183,7 +25497,7 @@
             <a:fld id="{4B0E1F8A-6C1D-4E2A-9F3B-7A5C8D2E1F60}" type="slidenum">
               <a:rPr sz="1600" b="0" i="0">
                 <a:solidFill>
-                  <a:srgbClr val="5B6B82"/>
+                  <a:srgbClr val="0A2240"/>
                 </a:solidFill>
                 <a:latin typeface="Arial"/>
               </a:rPr>
@@ -26360,7 +25674,7 @@
             <a:fld id="{4B0E1F8A-6C1D-4E2A-9F3B-7A5C8D2E1F60}" type="slidenum">
               <a:rPr sz="1600" b="0" i="0">
                 <a:solidFill>
-                  <a:srgbClr val="5B6B82"/>
+                  <a:srgbClr val="0A2240"/>
                 </a:solidFill>
                 <a:latin typeface="Arial"/>
               </a:rPr>
@@ -26668,7 +25982,7 @@
             <a:fld id="{4B0E1F8A-6C1D-4E2A-9F3B-7A5C8D2E1F60}" type="slidenum">
               <a:rPr sz="1600" b="0" i="0">
                 <a:solidFill>
-                  <a:srgbClr val="5B6B82"/>
+                  <a:srgbClr val="0A2240"/>
                 </a:solidFill>
                 <a:latin typeface="Arial"/>
               </a:rPr>
@@ -26764,7 +26078,7 @@
             <a:r>
               <a:rPr sz="4200" b="1" i="0">
                 <a:solidFill>
-                  <a:srgbClr val="123A6B"/>
+                  <a:srgbClr val="0072CE"/>
                 </a:solidFill>
                 <a:latin typeface="Arial"/>
               </a:rPr>
@@ -26799,7 +26113,7 @@
             <a:r>
               <a:rPr sz="4200" b="1" i="0">
                 <a:solidFill>
-                  <a:srgbClr val="123A6B"/>
+                  <a:srgbClr val="0072CE"/>
                 </a:solidFill>
                 <a:latin typeface="Arial"/>
               </a:rPr>
@@ -26869,7 +26183,7 @@
             <a:r>
               <a:rPr sz="4200" b="1" i="0">
                 <a:solidFill>
-                  <a:srgbClr val="123A6B"/>
+                  <a:srgbClr val="0072CE"/>
                 </a:solidFill>
                 <a:latin typeface="Arial"/>
               </a:rPr>
@@ -26904,7 +26218,7 @@
             <a:r>
               <a:rPr sz="4200" b="1" i="0">
                 <a:solidFill>
-                  <a:srgbClr val="123A6B"/>
+                  <a:srgbClr val="0072CE"/>
                 </a:solidFill>
                 <a:latin typeface="Arial"/>
               </a:rPr>
@@ -26974,7 +26288,7 @@
             <a:r>
               <a:rPr sz="4200" b="1" i="0">
                 <a:solidFill>
-                  <a:srgbClr val="123A6B"/>
+                  <a:srgbClr val="0072CE"/>
                 </a:solidFill>
                 <a:latin typeface="Arial"/>
               </a:rPr>
@@ -27009,7 +26323,7 @@
             <a:r>
               <a:rPr sz="4200" b="1" i="0">
                 <a:solidFill>
-                  <a:srgbClr val="123A6B"/>
+                  <a:srgbClr val="0072CE"/>
                 </a:solidFill>
                 <a:latin typeface="Arial"/>
               </a:rPr>
@@ -27081,7 +26395,7 @@
             <a:fld id="{4B0E1F8A-6C1D-4E2A-9F3B-7A5C8D2E1F60}" type="slidenum">
               <a:rPr sz="1600" b="0" i="0">
                 <a:solidFill>
-                  <a:srgbClr val="5B6B82"/>
+                  <a:srgbClr val="0A2240"/>
                 </a:solidFill>
                 <a:latin typeface="Arial"/>
               </a:rPr>
@@ -27142,7 +26456,7 @@
             <a:r>
               <a:rPr sz="4200" b="0" i="0">
                 <a:solidFill>
-                  <a:srgbClr val="D4D4D4"/>
+                  <a:srgbClr val="FFFFFF"/>
                 </a:solidFill>
                 <a:latin typeface="Arial"/>
               </a:rPr>
@@ -27177,7 +26491,7 @@
             <a:r>
               <a:rPr sz="3400" b="0" i="0">
                 <a:solidFill>
-                  <a:srgbClr val="D4D4D4"/>
+                  <a:srgbClr val="FFFFFF"/>
                 </a:solidFill>
                 <a:latin typeface="Arial"/>
               </a:rPr>
@@ -27212,7 +26526,7 @@
             <a:r>
               <a:rPr sz="3400" b="0" i="0">
                 <a:solidFill>
-                  <a:srgbClr val="D4D4D4"/>
+                  <a:srgbClr val="FFFFFF"/>
                 </a:solidFill>
                 <a:latin typeface="Arial"/>
               </a:rPr>
@@ -27247,7 +26561,7 @@
             <a:r>
               <a:rPr sz="3400" b="0" i="0">
                 <a:solidFill>
-                  <a:srgbClr val="D4D4D4"/>
+                  <a:srgbClr val="FFFFFF"/>
                 </a:solidFill>
                 <a:latin typeface="Arial"/>
               </a:rPr>
@@ -27317,7 +26631,7 @@
             <a:r>
               <a:rPr sz="3400" b="0" i="0">
                 <a:solidFill>
-                  <a:srgbClr val="D4D4D4"/>
+                  <a:srgbClr val="FFFFFF"/>
                 </a:solidFill>
                 <a:latin typeface="Arial"/>
               </a:rPr>
@@ -27352,7 +26666,7 @@
             <a:r>
               <a:rPr sz="3400" b="0" i="0">
                 <a:solidFill>
-                  <a:srgbClr val="D4D4D4"/>
+                  <a:srgbClr val="FFFFFF"/>
                 </a:solidFill>
                 <a:latin typeface="Arial"/>
               </a:rPr>
@@ -27370,7 +26684,7 @@
         <p:spPr>
           <a:xfrm>
             <a:off x="457200" y="4480554"/>
-            <a:ext cx="4061995" cy="518159"/>
+            <a:ext cx="9515156" cy="518159"/>
           </a:xfrm>
           <a:prstGeom prst="rect">
             <a:avLst/>
@@ -27387,11 +26701,11 @@
             <a:r>
               <a:rPr sz="3400" b="0" i="0">
                 <a:solidFill>
-                  <a:srgbClr val="D4D4D4"/>
-                </a:solidFill>
-                <a:latin typeface="Arial"/>
-              </a:rPr>
-              <a:t>Done when: </a:t>
+                  <a:srgbClr val="FFFFFF"/>
+                </a:solidFill>
+                <a:latin typeface="Arial"/>
+              </a:rPr>
+              <a:t>Done when: 10 samples parse</a:t>
             </a:r>
           </a:p>
         </p:txBody>
@@ -27404,8 +26718,8 @@
         </p:nvSpPr>
         <p:spPr>
           <a:xfrm>
-            <a:off x="2881647" y="4480554"/>
-            <a:ext cx="951348" cy="518159"/>
+            <a:off x="457200" y="4998713"/>
+            <a:ext cx="1411486" cy="518159"/>
           </a:xfrm>
           <a:prstGeom prst="rect">
             <a:avLst/>
@@ -27422,11 +26736,11 @@
             <a:r>
               <a:rPr sz="3400" b="0" i="0">
                 <a:solidFill>
-                  <a:srgbClr val="B5CEA8"/>
-                </a:solidFill>
-                <a:latin typeface="Arial"/>
-              </a:rPr>
-              <a:t>10</a:t>
+                  <a:srgbClr val="569CD6"/>
+                </a:solidFill>
+                <a:latin typeface="Arial"/>
+              </a:rPr>
+              <a:t>with</a:t>
             </a:r>
           </a:p>
         </p:txBody>
@@ -27439,76 +26753,6 @@
         </p:nvSpPr>
         <p:spPr>
           <a:xfrm>
-            <a:off x="3361941" y="4480554"/>
-            <a:ext cx="4867572" cy="518159"/>
-          </a:xfrm>
-          <a:prstGeom prst="rect">
-            <a:avLst/>
-          </a:prstGeom>
-          <a:noFill/>
-        </p:spPr>
-        <p:txBody>
-          <a:bodyPr wrap="none" lIns="0" rIns="0">
-            <a:noAutofit/>
-          </a:bodyPr>
-          <a:lstStyle/>
-          <a:p>
-            <a:pPr algn="l"/>
-            <a:r>
-              <a:rPr sz="3400" b="0" i="0">
-                <a:solidFill>
-                  <a:srgbClr val="D4D4D4"/>
-                </a:solidFill>
-                <a:latin typeface="Arial"/>
-              </a:rPr>
-              <a:t> samples parse</a:t>
-            </a:r>
-          </a:p>
-        </p:txBody>
-      </p:sp>
-      <p:sp>
-        <p:nvSpPr>
-          <p:cNvPr id="12" name="TextBox 11"/>
-          <p:cNvSpPr txBox="1"/>
-          <p:nvPr/>
-        </p:nvSpPr>
-        <p:spPr>
-          <a:xfrm>
-            <a:off x="457200" y="4998713"/>
-            <a:ext cx="1411486" cy="518159"/>
-          </a:xfrm>
-          <a:prstGeom prst="rect">
-            <a:avLst/>
-          </a:prstGeom>
-          <a:noFill/>
-        </p:spPr>
-        <p:txBody>
-          <a:bodyPr wrap="none" lIns="0" rIns="0">
-            <a:noAutofit/>
-          </a:bodyPr>
-          <a:lstStyle/>
-          <a:p>
-            <a:pPr algn="l"/>
-            <a:r>
-              <a:rPr sz="3400" b="0" i="0">
-                <a:solidFill>
-                  <a:srgbClr val="C586C0"/>
-                </a:solidFill>
-                <a:latin typeface="Arial"/>
-              </a:rPr>
-              <a:t>with</a:t>
-            </a:r>
-          </a:p>
-        </p:txBody>
-      </p:sp>
-      <p:sp>
-        <p:nvSpPr>
-          <p:cNvPr id="13" name="TextBox 12"/>
-          <p:cNvSpPr txBox="1"/>
-          <p:nvPr/>
-        </p:nvSpPr>
-        <p:spPr>
-          <a:xfrm>
             <a:off x="1225079" y="4998713"/>
             <a:ext cx="5405635" cy="518159"/>
           </a:xfrm>
@@ -27527,7 +26771,7 @@
             <a:r>
               <a:rPr sz="3400" b="0" i="0">
                 <a:solidFill>
-                  <a:srgbClr val="D4D4D4"/>
+                  <a:srgbClr val="FFFFFF"/>
                 </a:solidFill>
                 <a:latin typeface="Arial"/>
               </a:rPr>
@@ -27538,7 +26782,7 @@
       </p:sp>
       <p:sp>
         <p:nvSpPr>
-          <p:cNvPr id="14" name="TextBox 13"/>
+          <p:cNvPr id="12" name="TextBox 11"/>
           <p:cNvSpPr/>
           <p:nvPr>
             <p:ph type="sldNum" idx="12"/>
@@ -27564,7 +26808,7 @@
             <a:fld id="{4B0E1F8A-6C1D-4E2A-9F3B-7A5C8D2E1F60}" type="slidenum">
               <a:rPr sz="1600" b="0" i="0">
                 <a:solidFill>
-                  <a:srgbClr val="5B6B82"/>
+                  <a:srgbClr val="0A2240"/>
                 </a:solidFill>
                 <a:latin typeface="Arial"/>
               </a:rPr>
@@ -27741,7 +26985,7 @@
             <a:fld id="{4B0E1F8A-6C1D-4E2A-9F3B-7A5C8D2E1F60}" type="slidenum">
               <a:rPr sz="1600" b="0" i="0">
                 <a:solidFill>
-                  <a:srgbClr val="5B6B82"/>
+                  <a:srgbClr val="0A2240"/>
                 </a:solidFill>
                 <a:latin typeface="Arial"/>
               </a:rPr>
@@ -27944,7 +27188,7 @@
             <a:fld id="{4B0E1F8A-6C1D-4E2A-9F3B-7A5C8D2E1F60}" type="slidenum">
               <a:rPr sz="1600" b="0" i="0">
                 <a:solidFill>
-                  <a:srgbClr val="5B6B82"/>
+                  <a:srgbClr val="0A2240"/>
                 </a:solidFill>
                 <a:latin typeface="Arial"/>
               </a:rPr>
@@ -28040,7 +27284,7 @@
             <a:r>
               <a:rPr sz="3400" b="1" i="0">
                 <a:solidFill>
-                  <a:srgbClr val="123A6B"/>
+                  <a:srgbClr val="0072CE"/>
                 </a:solidFill>
                 <a:latin typeface="Arial"/>
               </a:rPr>
@@ -28075,7 +27319,7 @@
             <a:r>
               <a:rPr sz="3400" b="1" i="0">
                 <a:solidFill>
-                  <a:srgbClr val="123A6B"/>
+                  <a:srgbClr val="0072CE"/>
                 </a:solidFill>
                 <a:latin typeface="Arial"/>
               </a:rPr>
@@ -28366,7 +27610,7 @@
             <a:fld id="{4B0E1F8A-6C1D-4E2A-9F3B-7A5C8D2E1F60}" type="slidenum">
               <a:rPr sz="1600" b="0" i="0">
                 <a:solidFill>
-                  <a:srgbClr val="5B6B82"/>
+                  <a:srgbClr val="0A2240"/>
                 </a:solidFill>
                 <a:latin typeface="Arial"/>
               </a:rPr>
@@ -28569,7 +27813,7 @@
             <a:fld id="{4B0E1F8A-6C1D-4E2A-9F3B-7A5C8D2E1F60}" type="slidenum">
               <a:rPr sz="1600" b="0" i="0">
                 <a:solidFill>
-                  <a:srgbClr val="5B6B82"/>
+                  <a:srgbClr val="0A2240"/>
                 </a:solidFill>
                 <a:latin typeface="Arial"/>
               </a:rPr>
@@ -29280,7 +28524,7 @@
             <a:fld id="{4B0E1F8A-6C1D-4E2A-9F3B-7A5C8D2E1F60}" type="slidenum">
               <a:rPr sz="1600" b="0" i="0">
                 <a:solidFill>
-                  <a:srgbClr val="5B6B82"/>
+                  <a:srgbClr val="0A2240"/>
                 </a:solidFill>
                 <a:latin typeface="Arial"/>
               </a:rPr>
@@ -29518,7 +28762,7 @@
             <a:fld id="{4B0E1F8A-6C1D-4E2A-9F3B-7A5C8D2E1F60}" type="slidenum">
               <a:rPr sz="1600" b="0" i="0">
                 <a:solidFill>
-                  <a:srgbClr val="5B6B82"/>
+                  <a:srgbClr val="0A2240"/>
                 </a:solidFill>
                 <a:latin typeface="Arial"/>
               </a:rPr>
@@ -29660,7 +28904,7 @@
             <a:fld id="{4B0E1F8A-6C1D-4E2A-9F3B-7A5C8D2E1F60}" type="slidenum">
               <a:rPr sz="1600" b="0" i="0">
                 <a:solidFill>
-                  <a:srgbClr val="5B6B82"/>
+                  <a:srgbClr val="0A2240"/>
                 </a:solidFill>
                 <a:latin typeface="Arial"/>
               </a:rPr>
@@ -29968,7 +29212,7 @@
             <a:fld id="{4B0E1F8A-6C1D-4E2A-9F3B-7A5C8D2E1F60}" type="slidenum">
               <a:rPr sz="1600" b="0" i="0">
                 <a:solidFill>
-                  <a:srgbClr val="5B6B82"/>
+                  <a:srgbClr val="0A2240"/>
                 </a:solidFill>
                 <a:latin typeface="Arial"/>
               </a:rPr>
@@ -30171,7 +29415,7 @@
             <a:fld id="{4B0E1F8A-6C1D-4E2A-9F3B-7A5C8D2E1F60}" type="slidenum">
               <a:rPr sz="1600" b="0" i="0">
                 <a:solidFill>
-                  <a:srgbClr val="5B6B82"/>
+                  <a:srgbClr val="0A2240"/>
                 </a:solidFill>
                 <a:latin typeface="Arial"/>
               </a:rPr>
@@ -30374,153 +29618,11 @@
             <a:fld id="{4B0E1F8A-6C1D-4E2A-9F3B-7A5C8D2E1F60}" type="slidenum">
               <a:rPr sz="1600" b="0" i="0">
                 <a:solidFill>
-                  <a:srgbClr val="5B6B82"/>
+                  <a:srgbClr val="0A2240"/>
                 </a:solidFill>
                 <a:latin typeface="Arial"/>
               </a:rPr>
               <a:t>42</a:t>
-            </a:fld>
-          </a:p>
-        </p:txBody>
-      </p:sp>
-    </p:spTree>
-  </p:cSld>
-  <p:clrMapOvr>
-    <a:masterClrMapping/>
-  </p:clrMapOvr>
-</p:sld>
-</file>
-
-<file path=ppt/slides/slide43.xml><?xml version="1.0" encoding="utf-8"?>
-<p:sld xmlns:a="http://schemas.openxmlformats.org/drawingml/2006/main" xmlns:p="http://schemas.openxmlformats.org/presentationml/2006/main" xmlns:r="http://schemas.openxmlformats.org/officeDocument/2006/relationships" showMasterSp="0">
-  <p:cSld>
-    <p:bg>
-      <p:bgPr>
-        <a:solidFill>
-          <a:srgbClr val="FFFFFF"/>
-        </a:solidFill>
-        <a:effectLst/>
-      </p:bgPr>
-    </p:bg>
-    <p:spTree>
-      <p:nvGrpSpPr>
-        <p:cNvPr id="1" name=""/>
-        <p:cNvGrpSpPr/>
-        <p:nvPr/>
-      </p:nvGrpSpPr>
-      <p:grpSpPr/>
-      <p:sp>
-        <p:nvSpPr>
-          <p:cNvPr id="2" name="Rectangle 1"/>
-          <p:cNvSpPr/>
-          <p:nvPr/>
-        </p:nvSpPr>
-        <p:spPr>
-          <a:xfrm>
-            <a:off x="457200" y="2926080"/>
-            <a:ext cx="128016" cy="1005840"/>
-          </a:xfrm>
-          <a:prstGeom prst="rect">
-            <a:avLst/>
-          </a:prstGeom>
-          <a:solidFill>
-            <a:srgbClr val="0072CE"/>
-          </a:solidFill>
-          <a:ln>
-            <a:noFill/>
-          </a:ln>
-          <a:effectLst/>
-        </p:spPr>
-        <p:style>
-          <a:lnRef idx="1">
-            <a:schemeClr val="accent1"/>
-          </a:lnRef>
-          <a:fillRef idx="3">
-            <a:schemeClr val="accent1"/>
-          </a:fillRef>
-          <a:effectRef idx="2">
-            <a:schemeClr val="accent1"/>
-          </a:effectRef>
-          <a:fontRef idx="minor">
-            <a:schemeClr val="lt1"/>
-          </a:fontRef>
-        </p:style>
-        <p:txBody>
-          <a:bodyPr rtlCol="0" anchor="ctr"/>
-          <a:lstStyle/>
-          <a:p>
-            <a:pPr algn="ctr"/>
-          </a:p>
-        </p:txBody>
-      </p:sp>
-      <p:sp>
-        <p:nvSpPr>
-          <p:cNvPr id="3" name="TextBox 2"/>
-          <p:cNvSpPr txBox="1"/>
-          <p:nvPr/>
-        </p:nvSpPr>
-        <p:spPr>
-          <a:xfrm>
-            <a:off x="996696" y="2926080"/>
-            <a:ext cx="11195304" cy="1005840"/>
-          </a:xfrm>
-          <a:prstGeom prst="rect">
-            <a:avLst/>
-          </a:prstGeom>
-          <a:noFill/>
-        </p:spPr>
-        <p:txBody>
-          <a:bodyPr wrap="none" lIns="0" rIns="0">
-            <a:noAutofit/>
-          </a:bodyPr>
-          <a:lstStyle/>
-          <a:p>
-            <a:pPr algn="l"/>
-            <a:r>
-              <a:rPr sz="6000" b="1" i="0">
-                <a:solidFill>
-                  <a:srgbClr val="0A2240"/>
-                </a:solidFill>
-                <a:latin typeface="Arial"/>
-              </a:rPr>
-              <a:t>Can you start unaided?</a:t>
-            </a:r>
-          </a:p>
-        </p:txBody>
-      </p:sp>
-      <p:sp>
-        <p:nvSpPr>
-          <p:cNvPr id="4" name="TextBox 3"/>
-          <p:cNvSpPr/>
-          <p:nvPr>
-            <p:ph type="sldNum" idx="12"/>
-          </p:nvPr>
-        </p:nvSpPr>
-        <p:spPr>
-          <a:xfrm>
-            <a:off x="11186160" y="6035040"/>
-            <a:ext cx="548640" cy="365760"/>
-          </a:xfrm>
-          <a:prstGeom prst="rect">
-            <a:avLst/>
-          </a:prstGeom>
-          <a:noFill/>
-        </p:spPr>
-        <p:txBody>
-          <a:bodyPr wrap="none" lIns="0" rIns="0">
-            <a:noAutofit/>
-          </a:bodyPr>
-          <a:lstStyle/>
-          <a:p>
-            <a:pPr algn="r"/>
-            <a:fld id="{4B0E1F8A-6C1D-4E2A-9F3B-7A5C8D2E1F60}" type="slidenum">
-              <a:rPr sz="1600" b="0" i="0">
-                <a:solidFill>
-                  <a:srgbClr val="5B6B82"/>
-                </a:solidFill>
-                <a:latin typeface="Arial"/>
-              </a:rPr>
-              <a:t>43</a:t>
             </a:fld>
           </a:p>
         </p:txBody>
@@ -30752,7 +29854,7 @@
             <a:r>
               <a:rPr sz="4200" b="1" i="0">
                 <a:solidFill>
-                  <a:srgbClr val="5B6B82"/>
+                  <a:srgbClr val="0A2240"/>
                 </a:solidFill>
                 <a:latin typeface="Arial"/>
               </a:rPr>
@@ -30789,7 +29891,7 @@
             <a:fld id="{4B0E1F8A-6C1D-4E2A-9F3B-7A5C8D2E1F60}" type="slidenum">
               <a:rPr sz="1600" b="0" i="0">
                 <a:solidFill>
-                  <a:srgbClr val="5B6B82"/>
+                  <a:srgbClr val="0A2240"/>
                 </a:solidFill>
                 <a:latin typeface="Arial"/>
               </a:rPr>
@@ -30885,7 +29987,7 @@
             <a:r>
               <a:rPr sz="4200" b="1" i="0">
                 <a:solidFill>
-                  <a:srgbClr val="123A6B"/>
+                  <a:srgbClr val="0072CE"/>
                 </a:solidFill>
                 <a:latin typeface="Arial"/>
               </a:rPr>
@@ -30903,13 +30005,13 @@
         <p:spPr>
           <a:xfrm>
             <a:off x="457200" y="2194560"/>
-            <a:ext cx="784098" cy="54864"/>
+            <a:ext cx="593303" cy="54864"/>
           </a:xfrm>
           <a:prstGeom prst="rect">
             <a:avLst/>
           </a:prstGeom>
           <a:solidFill>
-            <a:srgbClr val="123A6B"/>
+            <a:srgbClr val="0072CE"/>
           </a:solidFill>
           <a:ln>
             <a:noFill/>
@@ -30964,7 +30066,7 @@
             <a:r>
               <a:rPr sz="3400" b="1" i="0">
                 <a:solidFill>
-                  <a:srgbClr val="123A6B"/>
+                  <a:srgbClr val="0072CE"/>
                 </a:solidFill>
                 <a:latin typeface="Arial"/>
               </a:rPr>
@@ -31034,7 +30136,7 @@
             <a:r>
               <a:rPr sz="4200" b="1" i="0">
                 <a:solidFill>
-                  <a:srgbClr val="123A6B"/>
+                  <a:srgbClr val="0072CE"/>
                 </a:solidFill>
                 <a:latin typeface="Arial"/>
               </a:rPr>
@@ -31052,13 +30154,13 @@
         <p:spPr>
           <a:xfrm>
             <a:off x="3345180" y="2194560"/>
-            <a:ext cx="784098" cy="54864"/>
+            <a:ext cx="593303" cy="54864"/>
           </a:xfrm>
           <a:prstGeom prst="rect">
             <a:avLst/>
           </a:prstGeom>
           <a:solidFill>
-            <a:srgbClr val="123A6B"/>
+            <a:srgbClr val="0072CE"/>
           </a:solidFill>
           <a:ln>
             <a:noFill/>
@@ -31113,7 +30215,7 @@
             <a:r>
               <a:rPr sz="3400" b="1" i="0">
                 <a:solidFill>
-                  <a:srgbClr val="123A6B"/>
+                  <a:srgbClr val="0072CE"/>
                 </a:solidFill>
                 <a:latin typeface="Arial"/>
               </a:rPr>
@@ -31183,7 +30285,7 @@
             <a:r>
               <a:rPr sz="4200" b="1" i="0">
                 <a:solidFill>
-                  <a:srgbClr val="123A6B"/>
+                  <a:srgbClr val="0072CE"/>
                 </a:solidFill>
                 <a:latin typeface="Arial"/>
               </a:rPr>
@@ -31201,13 +30303,13 @@
         <p:spPr>
           <a:xfrm>
             <a:off x="6233160" y="2194560"/>
-            <a:ext cx="784098" cy="54864"/>
+            <a:ext cx="593303" cy="54864"/>
           </a:xfrm>
           <a:prstGeom prst="rect">
             <a:avLst/>
           </a:prstGeom>
           <a:solidFill>
-            <a:srgbClr val="123A6B"/>
+            <a:srgbClr val="0072CE"/>
           </a:solidFill>
           <a:ln>
             <a:noFill/>
@@ -31262,7 +30364,7 @@
             <a:r>
               <a:rPr sz="3400" b="1" i="0">
                 <a:solidFill>
-                  <a:srgbClr val="123A6B"/>
+                  <a:srgbClr val="0072CE"/>
                 </a:solidFill>
                 <a:latin typeface="Arial"/>
               </a:rPr>
@@ -31332,7 +30434,7 @@
             <a:r>
               <a:rPr sz="4200" b="1" i="0">
                 <a:solidFill>
-                  <a:srgbClr val="123A6B"/>
+                  <a:srgbClr val="0072CE"/>
                 </a:solidFill>
                 <a:latin typeface="Arial"/>
               </a:rPr>
@@ -31350,13 +30452,13 @@
         <p:spPr>
           <a:xfrm>
             <a:off x="9121140" y="2194560"/>
-            <a:ext cx="784098" cy="54864"/>
+            <a:ext cx="593303" cy="54864"/>
           </a:xfrm>
           <a:prstGeom prst="rect">
             <a:avLst/>
           </a:prstGeom>
           <a:solidFill>
-            <a:srgbClr val="123A6B"/>
+            <a:srgbClr val="0072CE"/>
           </a:solidFill>
           <a:ln>
             <a:noFill/>
@@ -31411,7 +30513,7 @@
             <a:r>
               <a:rPr sz="3400" b="1" i="0">
                 <a:solidFill>
-                  <a:srgbClr val="123A6B"/>
+                  <a:srgbClr val="0072CE"/>
                 </a:solidFill>
                 <a:latin typeface="Arial"/>
               </a:rPr>
@@ -31483,7 +30585,7 @@
             <a:fld id="{4B0E1F8A-6C1D-4E2A-9F3B-7A5C8D2E1F60}" type="slidenum">
               <a:rPr sz="1600" b="0" i="0">
                 <a:solidFill>
-                  <a:srgbClr val="5B6B82"/>
+                  <a:srgbClr val="0A2240"/>
                 </a:solidFill>
                 <a:latin typeface="Arial"/>
               </a:rPr>
@@ -31660,7 +30762,7 @@
             <a:fld id="{4B0E1F8A-6C1D-4E2A-9F3B-7A5C8D2E1F60}" type="slidenum">
               <a:rPr sz="1600" b="0" i="0">
                 <a:solidFill>
-                  <a:srgbClr val="5B6B82"/>
+                  <a:srgbClr val="0A2240"/>
                 </a:solidFill>
                 <a:latin typeface="Arial"/>
               </a:rPr>
@@ -31837,7 +30939,7 @@
             <a:fld id="{4B0E1F8A-6C1D-4E2A-9F3B-7A5C8D2E1F60}" type="slidenum">
               <a:rPr sz="1600" b="0" i="0">
                 <a:solidFill>
-                  <a:srgbClr val="5B6B82"/>
+                  <a:srgbClr val="0A2240"/>
                 </a:solidFill>
                 <a:latin typeface="Arial"/>
               </a:rPr>
@@ -32040,7 +31142,7 @@
             <a:fld id="{4B0E1F8A-6C1D-4E2A-9F3B-7A5C8D2E1F60}" type="slidenum">
               <a:rPr sz="1600" b="0" i="0">
                 <a:solidFill>
-                  <a:srgbClr val="5B6B82"/>
+                  <a:srgbClr val="0A2240"/>
                 </a:solidFill>
                 <a:latin typeface="Arial"/>
               </a:rPr>
